--- a/docs/slides_groundtruther_update_2026.pptx
+++ b/docs/slides_groundtruther_update_2026.pptx
@@ -26,6 +26,16 @@
     <p:sldId id="274" r:id="rId25"/>
     <p:sldId id="275" r:id="rId26"/>
     <p:sldId id="276" r:id="rId27"/>
+    <p:sldId id="277" r:id="rId28"/>
+    <p:sldId id="278" r:id="rId29"/>
+    <p:sldId id="279" r:id="rId30"/>
+    <p:sldId id="280" r:id="rId31"/>
+    <p:sldId id="281" r:id="rId32"/>
+    <p:sldId id="282" r:id="rId33"/>
+    <p:sldId id="283" r:id="rId34"/>
+    <p:sldId id="284" r:id="rId35"/>
+    <p:sldId id="285" r:id="rId36"/>
+    <p:sldId id="286" r:id="rId37"/>
   </p:sldIdLst>
   <p:sldSz cx="12191695" cy="6858000" type="screen4x3"/>
   <p:notesSz cx="6858000" cy="9144000"/>
@@ -3152,7 +3162,7 @@
                   <a:srgbClr val="0E6E6E"/>
                 </a:solidFill>
               </a:rPr>
-              <a:t>What changed since the paper</a:t>
+              <a:t>From plugin to measurement instrument</a:t>
             </a:r>
           </a:p>
           <a:p>
@@ -3163,7 +3173,7 @@
                   <a:srgbClr val="5B6B76"/>
                 </a:solidFill>
               </a:rPr>
-              <a:t>A QGIS plugin for seafloor characterization — multibeam acoustics,</a:t>
+              <a:t>A QGIS plugin for seafloor characterization — multibeam acoustics, seafloor</a:t>
             </a:r>
           </a:p>
           <a:p>
@@ -3174,7 +3184,7 @@
                   <a:srgbClr val="5B6B76"/>
                 </a:solidFill>
               </a:rPr>
-              <a:t>seafloor imagery &amp; survey video, together on one map.</a:t>
+              <a:t>imagery, survey video and now stereo geometry, together on one map.</a:t>
             </a:r>
           </a:p>
           <a:p>
@@ -3196,7 +3206,7 @@
                   <a:srgbClr val="5B6B76"/>
                 </a:solidFill>
               </a:rPr>
-              <a:t>Development update · 2026 · v0.4 · QGIS 4 / Qt 6</a:t>
+              <a:t>Development update · September 2026 · v0.4 · QGIS 4 / Qt 6</a:t>
             </a:r>
           </a:p>
         </p:txBody>
@@ -3248,7 +3258,7 @@
                   <a:srgbClr val="1A5276"/>
                 </a:solidFill>
               </a:rPr>
-              <a:t>Feature — MBES query builder</a:t>
+              <a:t>MBES query builder &amp; ARA</a:t>
             </a:r>
           </a:p>
         </p:txBody>
@@ -3282,7 +3292,7 @@
                   <a:srgbClr val="2E86C1"/>
                 </a:solidFill>
               </a:rPr>
-              <a:t>NEW</a:t>
+              <a:t>FEATURE</a:t>
             </a:r>
           </a:p>
         </p:txBody>
@@ -3335,7 +3345,7 @@
                   <a:srgbClr val="14303D"/>
                 </a:solidFill>
               </a:rPr>
-              <a:t>•  ARA scatterplot · 3-D surface · histograms · stats · in-shape images</a:t>
+              <a:t>•  ARA scatterplot, 3-D surface, histograms, statistics, in-shape image selection</a:t>
             </a:r>
           </a:p>
           <a:p>
@@ -3350,7 +3360,7 @@
                   <a:srgbClr val="14303D"/>
                 </a:solidFill>
               </a:rPr>
-              <a:t>•  Multi-level backscatter (new): auto-detects every BSWG-2015 level</a:t>
+              <a:t>•  Multi-level backscatter: auto-detects every BSWG-2015 level present</a:t>
             </a:r>
           </a:p>
           <a:p>
@@ -3365,7 +3375,7 @@
                   <a:srgbClr val="5B6B76"/>
                 </a:solidFill>
               </a:rPr>
-              <a:t>–  raw → RL → TL → area → AVG, back-compatible with the legacy format</a:t>
+              <a:t>–  (BS_raw → BS_RL → BS_TL → BS_area → BS_AVG), back-compatible</a:t>
             </a:r>
           </a:p>
           <a:p>
@@ -3380,7 +3390,37 @@
                   <a:srgbClr val="14303D"/>
                 </a:solidFill>
               </a:rPr>
-              <a:t>•  Beam-side filtering (Raw / Port / Starboard / Fold) fixed</a:t>
+              <a:t>•  Beam-side filtering (Raw / Port / Starboard / Fold) works correctly</a:t>
+            </a:r>
+          </a:p>
+          <a:p>
+            <a:pPr algn="l">
+              <a:spcAft>
+                <a:spcPts val="600"/>
+              </a:spcAft>
+            </a:pPr>
+            <a:r>
+              <a:rPr sz="1600" b="0" i="0">
+                <a:solidFill>
+                  <a:srgbClr val="14303D"/>
+                </a:solidFill>
+              </a:rPr>
+              <a:t>•  Sampling centre uses the calibrated USBL fix, so marker, sample and</a:t>
+            </a:r>
+          </a:p>
+          <a:p>
+            <a:pPr algn="l" lvl="1">
+              <a:spcAft>
+                <a:spcPts val="600"/>
+              </a:spcAft>
+            </a:pPr>
+            <a:r>
+              <a:rPr sz="1300" b="0" i="0">
+                <a:solidFill>
+                  <a:srgbClr val="5B6B76"/>
+                </a:solidFill>
+              </a:rPr>
+              <a:t>–  georeferenced rasters all coincide</a:t>
             </a:r>
           </a:p>
         </p:txBody>
@@ -3445,7 +3485,7 @@
                   <a:srgbClr val="1A5276"/>
                 </a:solidFill>
               </a:rPr>
-              <a:t>query builder: sampling ellipse + ARA scatterplot / 3-D</a:t>
+              <a:t>query builder: sampling unit + ARA scatterplot</a:t>
             </a:r>
           </a:p>
         </p:txBody>
@@ -3497,7 +3537,7 @@
                   <a:srgbClr val="1A5276"/>
                 </a:solidFill>
               </a:rPr>
-              <a:t>Feature — video player</a:t>
+              <a:t>Video player</a:t>
             </a:r>
           </a:p>
         </p:txBody>
@@ -3531,7 +3571,7 @@
                   <a:srgbClr val="2E86C1"/>
                 </a:solidFill>
               </a:rPr>
-              <a:t>NEW</a:t>
+              <a:t>FEATURE</a:t>
             </a:r>
           </a:p>
         </p:txBody>
@@ -3584,7 +3624,7 @@
                   <a:srgbClr val="14303D"/>
                 </a:solidFill>
               </a:rPr>
-              <a:t>•  Interlaced support (new): PyAV + yadif — fixes FFmpeg-8 black frames</a:t>
+              <a:t>•  Interlaced-source support: PyAV + yadif — fixes the FFmpeg-8 black-frame failure</a:t>
             </a:r>
           </a:p>
           <a:p>
@@ -3599,7 +3639,22 @@
                   <a:srgbClr val="14303D"/>
                 </a:solidFill>
               </a:rPr>
-              <a:t>•  Geo-link to map: canvas follows the frame at a fixed, CRS-independent scale</a:t>
+              <a:t>•  Geo-link: the canvas follows the frame at a fixed, CRS-independent map scale;</a:t>
+            </a:r>
+          </a:p>
+          <a:p>
+            <a:pPr algn="l" lvl="1">
+              <a:spcAft>
+                <a:spcPts val="600"/>
+              </a:spcAft>
+            </a:pPr>
+            <a:r>
+              <a:rPr sz="1300" b="0" i="0">
+                <a:solidFill>
+                  <a:srgbClr val="5B6B76"/>
+                </a:solidFill>
+              </a:rPr>
+              <a:t>–  marker and map stay in sync during play</a:t>
             </a:r>
           </a:p>
           <a:p>
@@ -3614,7 +3669,37 @@
                   <a:srgbClr val="14303D"/>
                 </a:solidFill>
               </a:rPr>
-              <a:t>•  GPS track as a persistent GeoJSON layer — no scratch warning, auto-regenerated</a:t>
+              <a:t>•  GPS track persisted as a real GeoJSON layer — restored with the project,</a:t>
+            </a:r>
+          </a:p>
+          <a:p>
+            <a:pPr algn="l" lvl="1">
+              <a:spcAft>
+                <a:spcPts val="600"/>
+              </a:spcAft>
+            </a:pPr>
+            <a:r>
+              <a:rPr sz="1300" b="0" i="0">
+                <a:solidFill>
+                  <a:srgbClr val="5B6B76"/>
+                </a:solidFill>
+              </a:rPr>
+              <a:t>–  auto-regenerated on load</a:t>
+            </a:r>
+          </a:p>
+          <a:p>
+            <a:pPr algn="l">
+              <a:spcAft>
+                <a:spcPts val="600"/>
+              </a:spcAft>
+            </a:pPr>
+            <a:r>
+              <a:rPr sz="1600" b="0" i="0">
+                <a:solidFill>
+                  <a:srgbClr val="14303D"/>
+                </a:solidFill>
+              </a:rPr>
+              <a:t>•  Per-frame bounding-box annotation; loads the MAREANO .log format directly</a:t>
             </a:r>
           </a:p>
         </p:txBody>
@@ -3679,7 +3764,7 @@
                   <a:srgbClr val="1A5276"/>
                 </a:solidFill>
               </a:rPr>
-              <a:t>video player docked + geo-linked map (track + marker)</a:t>
+              <a:t>video dock + GPS track on the map</a:t>
             </a:r>
           </a:p>
         </p:txBody>
@@ -3731,7 +3816,7 @@
                   <a:srgbClr val="1A5276"/>
                 </a:solidFill>
               </a:rPr>
-              <a:t>Video &amp; image annotation</a:t>
+              <a:t>Reporting</a:t>
             </a:r>
           </a:p>
         </p:txBody>
@@ -3765,7 +3850,7 @@
                   <a:srgbClr val="2E86C1"/>
                 </a:solidFill>
               </a:rPr>
-              <a:t>NEW</a:t>
+              <a:t>FEATURE</a:t>
             </a:r>
           </a:p>
         </p:txBody>
@@ -3803,7 +3888,7 @@
                   <a:srgbClr val="14303D"/>
                 </a:solidFill>
               </a:rPr>
-              <a:t>•  Image annotation: bounding boxes + species labels on stills;</a:t>
+              <a:t>•  One click sends query-builder products to the report builder: ARA scatterplot,</a:t>
             </a:r>
           </a:p>
           <a:p>
@@ -3818,7 +3903,7 @@
                   <a:srgbClr val="5B6B76"/>
                 </a:solidFill>
               </a:rPr>
-              <a:t>–  confidence-threshold filter; detector output overlay</a:t>
+              <a:t>–  3-D surface, histogram, statistics, sampling-unit description, image gallery</a:t>
             </a:r>
           </a:p>
           <a:p>
@@ -3833,7 +3918,7 @@
                   <a:srgbClr val="14303D"/>
                 </a:solidFill>
               </a:rPr>
-              <a:t>•  Video annotation: per-frame boxes, single-click draw → label → save;</a:t>
+              <a:t>•  Output to KMZ (geo-referenced balloon) and a templated HTML report (Jinja2):</a:t>
             </a:r>
           </a:p>
           <a:p>
@@ -3848,7 +3933,7 @@
                   <a:srgbClr val="5B6B76"/>
                 </a:solidFill>
               </a:rPr>
-              <a:t>–  'Add new box' pauses on draw and releases on resume</a:t>
+              <a:t>–  card layout, uniform thumbnails, click-to-zoom lightbox, browsable gallery</a:t>
             </a:r>
           </a:p>
           <a:p>
@@ -3863,22 +3948,7 @@
                   <a:srgbClr val="14303D"/>
                 </a:solidFill>
               </a:rPr>
-              <a:t>•  Shared label pool; edits persisted to CSV (frame_index ↔ bboxes / species / conf.)</a:t>
-            </a:r>
-          </a:p>
-          <a:p>
-            <a:pPr algn="l">
-              <a:spcAft>
-                <a:spcPts val="600"/>
-              </a:spcAft>
-            </a:pPr>
-            <a:r>
-              <a:rPr sz="1600" b="0" i="0">
-                <a:solidFill>
-                  <a:srgbClr val="14303D"/>
-                </a:solidFill>
-              </a:rPr>
-              <a:t>•  Annotations stay geolinked — every box ties back to a map position</a:t>
+              <a:t>•  PDF export of the composed report</a:t>
             </a:r>
           </a:p>
         </p:txBody>
@@ -3943,7 +4013,7 @@
                   <a:srgbClr val="1A5276"/>
                 </a:solidFill>
               </a:rPr>
-              <a:t>annotation editor: a frame/image with labelled boxes</a:t>
+              <a:t>HTML report with gallery + statistics table</a:t>
             </a:r>
           </a:p>
         </p:txBody>
@@ -3995,7 +4065,7 @@
                   <a:srgbClr val="1A5276"/>
                 </a:solidFill>
               </a:rPr>
-              <a:t>Feature — reporting</a:t>
+              <a:t>Documentation</a:t>
             </a:r>
           </a:p>
         </p:txBody>
@@ -4029,7 +4099,670 @@
                   <a:srgbClr val="2E86C1"/>
                 </a:solidFill>
               </a:rPr>
-              <a:t>NEW</a:t>
+              <a:t>DOCS</a:t>
+            </a:r>
+          </a:p>
+        </p:txBody>
+      </p:sp>
+      <p:sp>
+        <p:nvSpPr>
+          <p:cNvPr id="4" name="TextBox 3"/>
+          <p:cNvSpPr txBox="1"/>
+          <p:nvPr/>
+        </p:nvSpPr>
+        <p:spPr>
+          <a:xfrm>
+            <a:off x="640080" y="1463040"/>
+            <a:ext cx="10972800" cy="4937760"/>
+          </a:xfrm>
+          <a:prstGeom prst="rect">
+            <a:avLst/>
+          </a:prstGeom>
+          <a:noFill/>
+        </p:spPr>
+        <p:txBody>
+          <a:bodyPr wrap="square">
+            <a:spAutoFit/>
+          </a:bodyPr>
+          <a:lstStyle/>
+          <a:p>
+            <a:pPr algn="l">
+              <a:spcAft>
+                <a:spcPts val="600"/>
+              </a:spcAft>
+            </a:pPr>
+            <a:r>
+              <a:rPr sz="1800" b="0" i="0">
+                <a:solidFill>
+                  <a:srgbClr val="14303D"/>
+                </a:solidFill>
+              </a:rPr>
+              <a:t>•  User-facing docs are a MkDocs Material site, published to</a:t>
+            </a:r>
+          </a:p>
+          <a:p>
+            <a:pPr algn="l" lvl="1">
+              <a:spcAft>
+                <a:spcPts val="600"/>
+              </a:spcAft>
+            </a:pPr>
+            <a:r>
+              <a:rPr sz="1500" b="0" i="0">
+                <a:solidFill>
+                  <a:srgbClr val="5B6B76"/>
+                </a:solidFill>
+              </a:rPr>
+              <a:t>–  epifanio.github.io/groundtruther on merge</a:t>
+            </a:r>
+          </a:p>
+          <a:p>
+            <a:pPr algn="l">
+              <a:spcAft>
+                <a:spcPts val="600"/>
+              </a:spcAft>
+            </a:pPr>
+            <a:r>
+              <a:rPr sz="1800" b="0" i="0">
+                <a:solidFill>
+                  <a:srgbClr val="14303D"/>
+                </a:solidFill>
+              </a:rPr>
+              <a:t>•  Installation (Linux / macOS / Windows) · Tools (one page per feature) ·</a:t>
+            </a:r>
+          </a:p>
+          <a:p>
+            <a:pPr algn="l" lvl="1">
+              <a:spcAft>
+                <a:spcPts val="600"/>
+              </a:spcAft>
+            </a:pPr>
+            <a:r>
+              <a:rPr sz="1500" b="0" i="0">
+                <a:solidFill>
+                  <a:srgbClr val="5B6B76"/>
+                </a:solidFill>
+              </a:rPr>
+              <a:t>–  Configuration (all 27 keys + the validation model) · Data model · Architecture</a:t>
+            </a:r>
+          </a:p>
+          <a:p>
+            <a:pPr algn="l">
+              <a:spcAft>
+                <a:spcPts val="600"/>
+              </a:spcAft>
+            </a:pPr>
+            <a:r>
+              <a:rPr sz="1800" b="0" i="0">
+                <a:solidFill>
+                  <a:srgbClr val="14303D"/>
+                </a:solidFill>
+              </a:rPr>
+              <a:t>•  A data-model reference documents every column the plugin reads — including</a:t>
+            </a:r>
+          </a:p>
+          <a:p>
+            <a:pPr algn="l" lvl="1">
+              <a:spcAft>
+                <a:spcPts val="600"/>
+              </a:spcAft>
+            </a:pPr>
+            <a:r>
+              <a:rPr sz="1500" b="0" i="0">
+                <a:solidFill>
+                  <a:srgbClr val="5B6B76"/>
+                </a:solidFill>
+              </a:rPr>
+              <a:t>–  which position column is the USBL fix and which is a model.</a:t>
+            </a:r>
+          </a:p>
+          <a:p>
+            <a:pPr algn="l" lvl="1">
+              <a:spcAft>
+                <a:spcPts val="600"/>
+              </a:spcAft>
+            </a:pPr>
+            <a:r>
+              <a:rPr sz="1500" b="0" i="0">
+                <a:solidFill>
+                  <a:srgbClr val="5B6B76"/>
+                </a:solidFill>
+              </a:rPr>
+              <a:t>–  This is what surfaced the 180° bug in Act II.</a:t>
+            </a:r>
+          </a:p>
+          <a:p>
+            <a:pPr algn="l">
+              <a:spcAft>
+                <a:spcPts val="600"/>
+              </a:spcAft>
+            </a:pPr>
+            <a:r>
+              <a:rPr sz="1800" b="0" i="0">
+                <a:solidFill>
+                  <a:srgbClr val="14303D"/>
+                </a:solidFill>
+              </a:rPr>
+              <a:t>•  mkdocs build --strict in CI catches broken links and orphan pages; a unit test</a:t>
+            </a:r>
+          </a:p>
+          <a:p>
+            <a:pPr algn="l" lvl="1">
+              <a:spcAft>
+                <a:spcPts val="600"/>
+              </a:spcAft>
+            </a:pPr>
+            <a:r>
+              <a:rPr sz="1500" b="0" i="0">
+                <a:solidFill>
+                  <a:srgbClr val="5B6B76"/>
+                </a:solidFill>
+              </a:rPr>
+              <a:t>–  fails if a config key is added without its documentation row</a:t>
+            </a:r>
+          </a:p>
+        </p:txBody>
+      </p:sp>
+    </p:spTree>
+  </p:cSld>
+  <p:clrMapOvr>
+    <a:masterClrMapping/>
+  </p:clrMapOvr>
+</p:sld>
+</file>
+
+<file path=ppt/slides/slide14.xml><?xml version="1.0" encoding="utf-8"?>
+<p:sld xmlns:a="http://schemas.openxmlformats.org/drawingml/2006/main" xmlns:p="http://schemas.openxmlformats.org/presentationml/2006/main" xmlns:r="http://schemas.openxmlformats.org/officeDocument/2006/relationships">
+  <p:cSld>
+    <p:spTree>
+      <p:nvGrpSpPr>
+        <p:cNvPr id="1" name=""/>
+        <p:cNvGrpSpPr/>
+        <p:nvPr/>
+      </p:nvGrpSpPr>
+      <p:grpSpPr/>
+      <p:sp>
+        <p:nvSpPr>
+          <p:cNvPr id="2" name="TextBox 1"/>
+          <p:cNvSpPr txBox="1"/>
+          <p:nvPr/>
+        </p:nvSpPr>
+        <p:spPr>
+          <a:xfrm>
+            <a:off x="914400" y="2194560"/>
+            <a:ext cx="10332720" cy="2560320"/>
+          </a:xfrm>
+          <a:prstGeom prst="rect">
+            <a:avLst/>
+          </a:prstGeom>
+          <a:noFill/>
+        </p:spPr>
+        <p:txBody>
+          <a:bodyPr wrap="square">
+            <a:spAutoFit/>
+          </a:bodyPr>
+          <a:lstStyle/>
+          <a:p>
+            <a:pPr algn="ctr"/>
+            <a:r>
+              <a:rPr sz="5000" b="1" i="0">
+                <a:solidFill>
+                  <a:srgbClr val="1A5276"/>
+                </a:solidFill>
+              </a:rPr>
+              <a:t>Act II</a:t>
+            </a:r>
+          </a:p>
+          <a:p>
+            <a:pPr algn="ctr">
+              <a:spcBef>
+                <a:spcPts val="800"/>
+              </a:spcBef>
+            </a:pPr>
+            <a:r>
+              <a:rPr sz="2600" b="1" i="0">
+                <a:solidFill>
+                  <a:srgbClr val="0E6E6E"/>
+                </a:solidFill>
+              </a:rPr>
+              <a:t>Optical geometry</a:t>
+            </a:r>
+          </a:p>
+          <a:p>
+            <a:pPr algn="ctr"/>
+            <a:r>
+              <a:rPr sz="1400" b="0" i="0">
+                <a:solidFill>
+                  <a:srgbClr val="5B6B76"/>
+                </a:solidFill>
+              </a:rPr>
+              <a:t>Stereo reconstruction · roughness · georeferencing · mosaics ·</a:t>
+            </a:r>
+          </a:p>
+          <a:p>
+            <a:pPr algn="ctr"/>
+            <a:r>
+              <a:rPr sz="1400" b="0" i="0">
+                <a:solidFill>
+                  <a:srgbClr val="5B6B76"/>
+                </a:solidFill>
+              </a:rPr>
+              <a:t>the seabed ribbon</a:t>
+            </a:r>
+          </a:p>
+        </p:txBody>
+      </p:sp>
+    </p:spTree>
+  </p:cSld>
+  <p:clrMapOvr>
+    <a:masterClrMapping/>
+  </p:clrMapOvr>
+</p:sld>
+</file>
+
+<file path=ppt/slides/slide15.xml><?xml version="1.0" encoding="utf-8"?>
+<p:sld xmlns:a="http://schemas.openxmlformats.org/drawingml/2006/main" xmlns:p="http://schemas.openxmlformats.org/presentationml/2006/main" xmlns:r="http://schemas.openxmlformats.org/officeDocument/2006/relationships">
+  <p:cSld>
+    <p:spTree>
+      <p:nvGrpSpPr>
+        <p:cNvPr id="1" name=""/>
+        <p:cNvGrpSpPr/>
+        <p:nvPr/>
+      </p:nvGrpSpPr>
+      <p:grpSpPr/>
+      <p:sp>
+        <p:nvSpPr>
+          <p:cNvPr id="2" name="TextBox 1"/>
+          <p:cNvSpPr txBox="1"/>
+          <p:nvPr/>
+        </p:nvSpPr>
+        <p:spPr>
+          <a:xfrm>
+            <a:off x="502920" y="320040"/>
+            <a:ext cx="11155680" cy="914400"/>
+          </a:xfrm>
+          <a:prstGeom prst="rect">
+            <a:avLst/>
+          </a:prstGeom>
+          <a:noFill/>
+        </p:spPr>
+        <p:txBody>
+          <a:bodyPr wrap="square">
+            <a:spAutoFit/>
+          </a:bodyPr>
+          <a:lstStyle/>
+          <a:p>
+            <a:pPr algn="l"/>
+            <a:r>
+              <a:rPr sz="3000" b="1" i="0">
+                <a:solidFill>
+                  <a:srgbClr val="1A5276"/>
+                </a:solidFill>
+              </a:rPr>
+              <a:t>The gap this act is about</a:t>
+            </a:r>
+          </a:p>
+        </p:txBody>
+      </p:sp>
+      <p:sp>
+        <p:nvSpPr>
+          <p:cNvPr id="3" name="TextBox 2"/>
+          <p:cNvSpPr txBox="1"/>
+          <p:nvPr/>
+        </p:nvSpPr>
+        <p:spPr>
+          <a:xfrm>
+            <a:off x="640080" y="1371600"/>
+            <a:ext cx="10972800" cy="731520"/>
+          </a:xfrm>
+          <a:prstGeom prst="rect">
+            <a:avLst/>
+          </a:prstGeom>
+          <a:noFill/>
+        </p:spPr>
+        <p:txBody>
+          <a:bodyPr wrap="square">
+            <a:spAutoFit/>
+          </a:bodyPr>
+          <a:lstStyle/>
+          <a:p>
+            <a:pPr algn="l"/>
+            <a:r>
+              <a:rPr sz="1400" b="0" i="0">
+                <a:solidFill>
+                  <a:srgbClr val="5B6B76"/>
+                </a:solidFill>
+              </a:rPr>
+              <a:t>Roughness is measured inside one camera frame. Backscatter is measured over a footprint metres across. Between them sat a scale range nothing was measuring.</a:t>
+            </a:r>
+          </a:p>
+        </p:txBody>
+      </p:sp>
+      <p:graphicFrame>
+        <p:nvGraphicFramePr>
+          <p:cNvPr id="4" name="Table 3"/>
+          <p:cNvGraphicFramePr>
+            <a:graphicFrameLocks noGrp="1"/>
+          </p:cNvGraphicFramePr>
+          <p:nvPr/>
+        </p:nvGraphicFramePr>
+        <p:xfrm>
+          <a:off x="640080" y="2057400"/>
+          <a:ext cx="10881360" cy="1024128"/>
+        </p:xfrm>
+        <a:graphic>
+          <a:graphicData uri="http://schemas.openxmlformats.org/drawingml/2006/table">
+            <a:tbl>
+              <a:tblPr firstRow="1" bandRow="1">
+                <a:tableStyleId>{5C22544A-7EE6-4342-B048-85BDC9FD1C3A}</a:tableStyleId>
+              </a:tblPr>
+              <a:tblGrid>
+                <a:gridCol w="4352544"/>
+                <a:gridCol w="6528816"/>
+              </a:tblGrid>
+              <a:tr h="256032">
+                <a:tc>
+                  <a:txBody>
+                    <a:bodyPr wrap="square"/>
+                    <a:lstStyle/>
+                    <a:p>
+                      <a:pPr algn="l"/>
+                      <a:r>
+                        <a:rPr sz="1100" b="1" i="0">
+                          <a:solidFill>
+                            <a:srgbClr val="FFFFFF"/>
+                          </a:solidFill>
+                        </a:rPr>
+                        <a:t>product</a:t>
+                      </a:r>
+                    </a:p>
+                  </a:txBody>
+                  <a:tcPr marL="54864" marR="54864" marT="18288" marB="18288" anchor="ctr">
+                    <a:solidFill>
+                      <a:srgbClr val="1A5276"/>
+                    </a:solidFill>
+                  </a:tcPr>
+                </a:tc>
+                <a:tc>
+                  <a:txBody>
+                    <a:bodyPr wrap="square"/>
+                    <a:lstStyle/>
+                    <a:p>
+                      <a:pPr algn="l"/>
+                      <a:r>
+                        <a:rPr sz="1100" b="1" i="0">
+                          <a:solidFill>
+                            <a:srgbClr val="FFFFFF"/>
+                          </a:solidFill>
+                        </a:rPr>
+                        <a:t>wavelengths it supports</a:t>
+                      </a:r>
+                    </a:p>
+                  </a:txBody>
+                  <a:tcPr marL="54864" marR="54864" marT="18288" marB="18288" anchor="ctr">
+                    <a:solidFill>
+                      <a:srgbClr val="1A5276"/>
+                    </a:solidFill>
+                  </a:tcPr>
+                </a:tc>
+              </a:tr>
+              <a:tr h="256032">
+                <a:tc>
+                  <a:txBody>
+                    <a:bodyPr wrap="square"/>
+                    <a:lstStyle/>
+                    <a:p>
+                      <a:pPr algn="l"/>
+                      <a:r>
+                        <a:rPr sz="1100" b="0" i="0">
+                          <a:solidFill>
+                            <a:srgbClr val="14303D"/>
+                          </a:solidFill>
+                        </a:rPr>
+                        <a:t>per-frame stereo micro-DEM</a:t>
+                      </a:r>
+                    </a:p>
+                  </a:txBody>
+                  <a:tcPr marL="54864" marR="54864" marT="18288" marB="18288" anchor="ctr">
+                    <a:solidFill>
+                      <a:srgbClr val="FFFFFF"/>
+                    </a:solidFill>
+                  </a:tcPr>
+                </a:tc>
+                <a:tc>
+                  <a:txBody>
+                    <a:bodyPr wrap="square"/>
+                    <a:lstStyle/>
+                    <a:p>
+                      <a:pPr algn="l"/>
+                      <a:r>
+                        <a:rPr sz="1100" b="0" i="0">
+                          <a:solidFill>
+                            <a:srgbClr val="14303D"/>
+                          </a:solidFill>
+                        </a:rPr>
+                        <a:t>~3 mm … 1.2 m (one frame's footprint)</a:t>
+                      </a:r>
+                    </a:p>
+                  </a:txBody>
+                  <a:tcPr marL="54864" marR="54864" marT="18288" marB="18288" anchor="ctr">
+                    <a:solidFill>
+                      <a:srgbClr val="FFFFFF"/>
+                    </a:solidFill>
+                  </a:tcPr>
+                </a:tc>
+              </a:tr>
+              <a:tr h="256032">
+                <a:tc>
+                  <a:txBody>
+                    <a:bodyPr wrap="square"/>
+                    <a:lstStyle/>
+                    <a:p>
+                      <a:pPr algn="l"/>
+                      <a:r>
+                        <a:rPr sz="1100" b="0" i="0">
+                          <a:solidFill>
+                            <a:srgbClr val="14303D"/>
+                          </a:solidFill>
+                        </a:rPr>
+                        <a:t>MBES bathymetry (1 m grid)</a:t>
+                      </a:r>
+                    </a:p>
+                  </a:txBody>
+                  <a:tcPr marL="54864" marR="54864" marT="18288" marB="18288" anchor="ctr">
+                    <a:solidFill>
+                      <a:srgbClr val="FFFFFF"/>
+                    </a:solidFill>
+                  </a:tcPr>
+                </a:tc>
+                <a:tc>
+                  <a:txBody>
+                    <a:bodyPr wrap="square"/>
+                    <a:lstStyle/>
+                    <a:p>
+                      <a:pPr algn="l"/>
+                      <a:r>
+                        <a:rPr sz="1100" b="0" i="0">
+                          <a:solidFill>
+                            <a:srgbClr val="14303D"/>
+                          </a:solidFill>
+                        </a:rPr>
+                        <a:t>≥ 2–3 m</a:t>
+                      </a:r>
+                    </a:p>
+                  </a:txBody>
+                  <a:tcPr marL="54864" marR="54864" marT="18288" marB="18288" anchor="ctr">
+                    <a:solidFill>
+                      <a:srgbClr val="FFFFFF"/>
+                    </a:solidFill>
+                  </a:tcPr>
+                </a:tc>
+              </a:tr>
+              <a:tr h="256032">
+                <a:tc>
+                  <a:txBody>
+                    <a:bodyPr wrap="square"/>
+                    <a:lstStyle/>
+                    <a:p>
+                      <a:pPr algn="l"/>
+                      <a:r>
+                        <a:rPr sz="1100" b="1" i="0">
+                          <a:solidFill>
+                            <a:srgbClr val="14303D"/>
+                          </a:solidFill>
+                        </a:rPr>
+                        <a:t>the photogrammetric ribbon</a:t>
+                      </a:r>
+                    </a:p>
+                  </a:txBody>
+                  <a:tcPr marL="54864" marR="54864" marT="18288" marB="18288" anchor="ctr">
+                    <a:solidFill>
+                      <a:srgbClr val="EAF6FF"/>
+                    </a:solidFill>
+                  </a:tcPr>
+                </a:tc>
+                <a:tc>
+                  <a:txBody>
+                    <a:bodyPr wrap="square"/>
+                    <a:lstStyle/>
+                    <a:p>
+                      <a:pPr algn="l"/>
+                      <a:r>
+                        <a:rPr sz="1100" b="1" i="0">
+                          <a:solidFill>
+                            <a:srgbClr val="14303D"/>
+                          </a:solidFill>
+                        </a:rPr>
+                        <a:t>3 mm … 170 m — it spans the whole range</a:t>
+                      </a:r>
+                    </a:p>
+                  </a:txBody>
+                  <a:tcPr marL="54864" marR="54864" marT="18288" marB="18288" anchor="ctr">
+                    <a:solidFill>
+                      <a:srgbClr val="EAF6FF"/>
+                    </a:solidFill>
+                  </a:tcPr>
+                </a:tc>
+              </a:tr>
+            </a:tbl>
+          </a:graphicData>
+        </a:graphic>
+      </p:graphicFrame>
+      <p:sp>
+        <p:nvSpPr>
+          <p:cNvPr id="5" name="TextBox 4"/>
+          <p:cNvSpPr txBox="1"/>
+          <p:nvPr/>
+        </p:nvSpPr>
+        <p:spPr>
+          <a:xfrm>
+            <a:off x="640080" y="3282696"/>
+            <a:ext cx="10972800" cy="914400"/>
+          </a:xfrm>
+          <a:prstGeom prst="rect">
+            <a:avLst/>
+          </a:prstGeom>
+          <a:noFill/>
+        </p:spPr>
+        <p:txBody>
+          <a:bodyPr wrap="square">
+            <a:spAutoFit/>
+          </a:bodyPr>
+          <a:lstStyle/>
+          <a:p>
+            <a:pPr algn="l"/>
+            <a:r>
+              <a:rPr sz="1400" b="1" i="0">
+                <a:solidFill>
+                  <a:srgbClr val="0E6E6E"/>
+                </a:solidFill>
+              </a:rPr>
+              <a:t>γ₂ is fitted at frame scale, then used to interpret acoustics at metre scale. Nobody had checked the power law holds across the gap.</a:t>
+            </a:r>
+          </a:p>
+        </p:txBody>
+      </p:sp>
+    </p:spTree>
+  </p:cSld>
+  <p:clrMapOvr>
+    <a:masterClrMapping/>
+  </p:clrMapOvr>
+</p:sld>
+</file>
+
+<file path=ppt/slides/slide16.xml><?xml version="1.0" encoding="utf-8"?>
+<p:sld xmlns:a="http://schemas.openxmlformats.org/drawingml/2006/main" xmlns:p="http://schemas.openxmlformats.org/presentationml/2006/main" xmlns:r="http://schemas.openxmlformats.org/officeDocument/2006/relationships">
+  <p:cSld>
+    <p:spTree>
+      <p:nvGrpSpPr>
+        <p:cNvPr id="1" name=""/>
+        <p:cNvGrpSpPr/>
+        <p:nvPr/>
+      </p:nvGrpSpPr>
+      <p:grpSpPr/>
+      <p:sp>
+        <p:nvSpPr>
+          <p:cNvPr id="2" name="TextBox 1"/>
+          <p:cNvSpPr txBox="1"/>
+          <p:nvPr/>
+        </p:nvSpPr>
+        <p:spPr>
+          <a:xfrm>
+            <a:off x="502920" y="320040"/>
+            <a:ext cx="11155680" cy="914400"/>
+          </a:xfrm>
+          <a:prstGeom prst="rect">
+            <a:avLst/>
+          </a:prstGeom>
+          <a:noFill/>
+        </p:spPr>
+        <p:txBody>
+          <a:bodyPr wrap="square">
+            <a:spAutoFit/>
+          </a:bodyPr>
+          <a:lstStyle/>
+          <a:p>
+            <a:pPr algn="l"/>
+            <a:r>
+              <a:rPr sz="3000" b="1" i="0">
+                <a:solidFill>
+                  <a:srgbClr val="1A5276"/>
+                </a:solidFill>
+              </a:rPr>
+              <a:t>Stereo photogrammetric reconstruction</a:t>
+            </a:r>
+          </a:p>
+        </p:txBody>
+      </p:sp>
+      <p:sp>
+        <p:nvSpPr>
+          <p:cNvPr id="3" name="TextBox 2"/>
+          <p:cNvSpPr txBox="1"/>
+          <p:nvPr/>
+        </p:nvSpPr>
+        <p:spPr>
+          <a:xfrm>
+            <a:off x="10058400" y="457200"/>
+            <a:ext cx="1737360" cy="457200"/>
+          </a:xfrm>
+          <a:prstGeom prst="rect">
+            <a:avLst/>
+          </a:prstGeom>
+          <a:noFill/>
+        </p:spPr>
+        <p:txBody>
+          <a:bodyPr wrap="none">
+            <a:spAutoFit/>
+          </a:bodyPr>
+          <a:lstStyle/>
+          <a:p>
+            <a:pPr algn="r"/>
+            <a:r>
+              <a:rPr sz="1100" b="1" i="0">
+                <a:solidFill>
+                  <a:srgbClr val="2E86C1"/>
+                </a:solidFill>
+              </a:rPr>
+              <a:t>NEW TOOL</a:t>
             </a:r>
           </a:p>
         </p:txBody>
@@ -4067,7 +4800,7 @@
                   <a:srgbClr val="14303D"/>
                 </a:solidFill>
               </a:rPr>
-              <a:t>•  One click sends query products to the report builder:</a:t>
+              <a:t>•  A real-height micro-DEM of the patch under the camera, from the HabCam</a:t>
             </a:r>
           </a:p>
           <a:p>
@@ -4082,7 +4815,7 @@
                   <a:srgbClr val="5B6B76"/>
                 </a:solidFill>
               </a:rPr>
-              <a:t>–  ARA · 3-D · histogram · stats · sampling unit · image gallery</a:t>
+              <a:t>–  stereo pair itself — independently of the acoustics</a:t>
             </a:r>
           </a:p>
           <a:p>
@@ -4097,7 +4830,7 @@
                   <a:srgbClr val="14303D"/>
                 </a:solidFill>
               </a:rPr>
-              <a:t>•  Output to KMZ (geo-balloon) and a modern templated HTML report (Jinja2):</a:t>
+              <a:t>•  Computed server-side on a GPU (RAFT-Stereo, SGBM fallback). Only the frame's</a:t>
             </a:r>
           </a:p>
           <a:p>
@@ -4112,7 +4845,22 @@
                   <a:srgbClr val="5B6B76"/>
                 </a:solidFill>
               </a:rPr>
-              <a:t>–  card layout, uniform thumbnails, click-to-zoom lightbox</a:t>
+              <a:t>–  Imagename is sent — no image bytes leave the machine</a:t>
+            </a:r>
+          </a:p>
+          <a:p>
+            <a:pPr algn="l">
+              <a:spcAft>
+                <a:spcPts val="600"/>
+              </a:spcAft>
+            </a:pPr>
+            <a:r>
+              <a:rPr sz="1600" b="0" i="0">
+                <a:solidFill>
+                  <a:srgbClr val="14303D"/>
+                </a:solidFill>
+              </a:rPr>
+              <a:t>•  Float32 heights in millimetres, ~2–5 mm cells, NaN no-data, plus a</a:t>
             </a:r>
           </a:p>
           <a:p>
@@ -4127,7 +4875,7 @@
                   <a:srgbClr val="5B6B76"/>
                 </a:solidFill>
               </a:rPr>
-              <a:t>–  browsable gallery of the in-sample seafloor images</a:t>
+              <a:t>–  cell-for-cell co-registered orthophoto</a:t>
             </a:r>
           </a:p>
           <a:p>
@@ -4142,7 +4890,37 @@
                   <a:srgbClr val="14303D"/>
                 </a:solidFill>
               </a:rPr>
-              <a:t>•  Stats as a real HTML table · title + location summary · PDF export</a:t>
+              <a:t>•  Micro-DEM 3-D tab — the mesh draped with the orthophoto 1:1 (one texel/vertex)</a:t>
+            </a:r>
+          </a:p>
+          <a:p>
+            <a:pPr algn="l">
+              <a:spcAft>
+                <a:spcPts val="600"/>
+              </a:spcAft>
+            </a:pPr>
+            <a:r>
+              <a:rPr sz="1600" b="0" i="0">
+                <a:solidFill>
+                  <a:srgbClr val="14303D"/>
+                </a:solidFill>
+              </a:rPr>
+              <a:t>•  Edge spikes masked, not hidden: trim border · clip σ · erode</a:t>
+            </a:r>
+          </a:p>
+          <a:p>
+            <a:pPr algn="l">
+              <a:spcAft>
+                <a:spcPts val="600"/>
+              </a:spcAft>
+            </a:pPr>
+            <a:r>
+              <a:rPr sz="1600" b="0" i="0">
+                <a:solidFill>
+                  <a:srgbClr val="14303D"/>
+                </a:solidFill>
+              </a:rPr>
+              <a:t>•  Background QgsTask, cached per frame: ~14 s first, ~0.5 s after</a:t>
             </a:r>
           </a:p>
         </p:txBody>
@@ -4207,7 +4985,7 @@
                   <a:srgbClr val="1A5276"/>
                 </a:solidFill>
               </a:rPr>
-              <a:t>generated HTML report (gallery + lightbox + stats table)</a:t>
+              <a:t>Micro-DEM 3D tab, photo-textured mesh</a:t>
             </a:r>
           </a:p>
         </p:txBody>
@@ -4220,7 +4998,7 @@
 </p:sld>
 </file>
 
-<file path=ppt/slides/slide14.xml><?xml version="1.0" encoding="utf-8"?>
+<file path=ppt/slides/slide17.xml><?xml version="1.0" encoding="utf-8"?>
 <p:sld xmlns:a="http://schemas.openxmlformats.org/drawingml/2006/main" xmlns:p="http://schemas.openxmlformats.org/presentationml/2006/main" xmlns:r="http://schemas.openxmlformats.org/officeDocument/2006/relationships">
   <p:cSld>
     <p:spTree>
@@ -4259,202 +5037,7 @@
                   <a:srgbClr val="1A5276"/>
                 </a:solidFill>
               </a:rPr>
-              <a:t>Bug-fix roundup (selected)</a:t>
-            </a:r>
-          </a:p>
-        </p:txBody>
-      </p:sp>
-      <p:sp>
-        <p:nvSpPr>
-          <p:cNvPr id="3" name="TextBox 2"/>
-          <p:cNvSpPr txBox="1"/>
-          <p:nvPr/>
-        </p:nvSpPr>
-        <p:spPr>
-          <a:xfrm>
-            <a:off x="640080" y="1463040"/>
-            <a:ext cx="10972800" cy="4937760"/>
-          </a:xfrm>
-          <a:prstGeom prst="rect">
-            <a:avLst/>
-          </a:prstGeom>
-          <a:noFill/>
-        </p:spPr>
-        <p:txBody>
-          <a:bodyPr wrap="square">
-            <a:spAutoFit/>
-          </a:bodyPr>
-          <a:lstStyle/>
-          <a:p>
-            <a:pPr algn="l">
-              <a:spcAft>
-                <a:spcPts val="600"/>
-              </a:spcAft>
-            </a:pPr>
-            <a:r>
-              <a:rPr sz="1800" b="0" i="0">
-                <a:solidFill>
-                  <a:srgbClr val="14303D"/>
-                </a:solidFill>
-              </a:rPr>
-              <a:t>•  3-D WGL viewer blank on Qt 6 → fixed (PyOpenGL context)</a:t>
-            </a:r>
-          </a:p>
-          <a:p>
-            <a:pPr algn="l">
-              <a:spcAft>
-                <a:spcPts val="600"/>
-              </a:spcAft>
-            </a:pPr>
-            <a:r>
-              <a:rPr sz="1800" b="0" i="0">
-                <a:solidFill>
-                  <a:srgbClr val="14303D"/>
-                </a:solidFill>
-              </a:rPr>
-              <a:t>•  ARA beam radios (L / R / Fold) had no effect → fixed</a:t>
-            </a:r>
-          </a:p>
-          <a:p>
-            <a:pPr algn="l">
-              <a:spcAft>
-                <a:spcPts val="600"/>
-              </a:spcAft>
-            </a:pPr>
-            <a:r>
-              <a:rPr sz="1800" b="0" i="0">
-                <a:solidFill>
-                  <a:srgbClr val="14303D"/>
-                </a:solidFill>
-              </a:rPr>
-              <a:t>•  KMZ save crashed on un-generated products → guarded + de-duplicated</a:t>
-            </a:r>
-          </a:p>
-          <a:p>
-            <a:pPr algn="l">
-              <a:spcAft>
-                <a:spcPts val="600"/>
-              </a:spcAft>
-            </a:pPr>
-            <a:r>
-              <a:rPr sz="1800" b="0" i="0">
-                <a:solidFill>
-                  <a:srgbClr val="14303D"/>
-                </a:solidFill>
-              </a:rPr>
-              <a:t>•  Docks / video player came back undocked → restoreState</a:t>
-            </a:r>
-          </a:p>
-          <a:p>
-            <a:pPr algn="l">
-              <a:spcAft>
-                <a:spcPts val="600"/>
-              </a:spcAft>
-            </a:pPr>
-            <a:r>
-              <a:rPr sz="1800" b="0" i="0">
-                <a:solidFill>
-                  <a:srgbClr val="14303D"/>
-                </a:solidFill>
-              </a:rPr>
-              <a:t>•  Geo-link marker moved but map didn't follow → throttle fix</a:t>
-            </a:r>
-          </a:p>
-          <a:p>
-            <a:pPr algn="l">
-              <a:spcAft>
-                <a:spcPts val="600"/>
-              </a:spcAft>
-            </a:pPr>
-            <a:r>
-              <a:rPr sz="1800" b="0" i="0">
-                <a:solidFill>
-                  <a:srgbClr val="14303D"/>
-                </a:solidFill>
-              </a:rPr>
-              <a:t>•  Zoom was projection-dependent → map scale (1:N), CRS-independent</a:t>
-            </a:r>
-          </a:p>
-          <a:p>
-            <a:pPr algn="l">
-              <a:spcAft>
-                <a:spcPts val="600"/>
-              </a:spcAft>
-            </a:pPr>
-            <a:r>
-              <a:rPr sz="1800" b="0" i="0">
-                <a:solidFill>
-                  <a:srgbClr val="14303D"/>
-                </a:solidFill>
-              </a:rPr>
-              <a:t>•  Interlaced video → black frames → PyAV / yadif</a:t>
-            </a:r>
-          </a:p>
-          <a:p>
-            <a:pPr algn="l">
-              <a:spcAft>
-                <a:spcPts val="600"/>
-              </a:spcAft>
-            </a:pPr>
-            <a:r>
-              <a:rPr sz="1800" b="0" i="0">
-                <a:solidFill>
-                  <a:srgbClr val="14303D"/>
-                </a:solidFill>
-              </a:rPr>
-              <a:t>•  Stale / broken track reference on reload → auto-regenerate</a:t>
-            </a:r>
-          </a:p>
-        </p:txBody>
-      </p:sp>
-    </p:spTree>
-  </p:cSld>
-  <p:clrMapOvr>
-    <a:masterClrMapping/>
-  </p:clrMapOvr>
-</p:sld>
-</file>
-
-<file path=ppt/slides/slide15.xml><?xml version="1.0" encoding="utf-8"?>
-<p:sld xmlns:a="http://schemas.openxmlformats.org/drawingml/2006/main" xmlns:p="http://schemas.openxmlformats.org/presentationml/2006/main" xmlns:r="http://schemas.openxmlformats.org/officeDocument/2006/relationships">
-  <p:cSld>
-    <p:spTree>
-      <p:nvGrpSpPr>
-        <p:cNvPr id="1" name=""/>
-        <p:cNvGrpSpPr/>
-        <p:nvPr/>
-      </p:nvGrpSpPr>
-      <p:grpSpPr/>
-      <p:sp>
-        <p:nvSpPr>
-          <p:cNvPr id="2" name="TextBox 1"/>
-          <p:cNvSpPr txBox="1"/>
-          <p:nvPr/>
-        </p:nvSpPr>
-        <p:spPr>
-          <a:xfrm>
-            <a:off x="502920" y="320040"/>
-            <a:ext cx="11155680" cy="914400"/>
-          </a:xfrm>
-          <a:prstGeom prst="rect">
-            <a:avLst/>
-          </a:prstGeom>
-          <a:noFill/>
-        </p:spPr>
-        <p:txBody>
-          <a:bodyPr wrap="square">
-            <a:spAutoFit/>
-          </a:bodyPr>
-          <a:lstStyle/>
-          <a:p>
-            <a:pPr algn="l"/>
-            <a:r>
-              <a:rPr sz="3000" b="1" i="0">
-                <a:solidFill>
-                  <a:srgbClr val="1A5276"/>
-                </a:solidFill>
-              </a:rPr>
-              <a:t>Use case — HabCam</a:t>
+              <a:t>Seafloor roughness — γ₂, and what to trust</a:t>
             </a:r>
           </a:p>
         </p:txBody>
@@ -4488,7 +5071,7 @@
                   <a:srgbClr val="2E86C1"/>
                 </a:solidFill>
               </a:rPr>
-              <a:t>IMAGERY</a:t>
+              <a:t>NEW TOOL</a:t>
             </a:r>
           </a:p>
         </p:txBody>
@@ -4526,7 +5109,22 @@
                   <a:srgbClr val="14303D"/>
                 </a:solidFill>
               </a:rPr>
-              <a:t>•  Optical + acoustic ground-truthing of benthic habitat</a:t>
+              <a:t>•  Metrics tab: γ₂ · substrate &amp; texture hints · w₂ · rms height · rugosity ·</a:t>
+            </a:r>
+          </a:p>
+          <a:p>
+            <a:pPr algn="l" lvl="1">
+              <a:spcAft>
+                <a:spcPts val="600"/>
+              </a:spcAft>
+            </a:pPr>
+            <a:r>
+              <a:rPr sz="1300" b="0" i="0">
+                <a:solidFill>
+                  <a:srgbClr val="5B6B76"/>
+                </a:solidFill>
+              </a:rPr>
+              <a:t>–  anisotropy · altitude · quality · matcher</a:t>
             </a:r>
           </a:p>
           <a:p>
@@ -4541,7 +5139,22 @@
                   <a:srgbClr val="14303D"/>
                 </a:solidFill>
               </a:rPr>
-              <a:t>•  Browse tens of thousands of stills with metadata, linked to the MBES surface</a:t>
+              <a:t>•  Spectrum tab: radial relief power spectrum log-log, fitted power law, fit band</a:t>
+            </a:r>
+          </a:p>
+          <a:p>
+            <a:pPr algn="l" lvl="1">
+              <a:spcAft>
+                <a:spcPts val="600"/>
+              </a:spcAft>
+            </a:pPr>
+            <a:r>
+              <a:rPr sz="1300" b="0" i="0">
+                <a:solidFill>
+                  <a:srgbClr val="5B6B76"/>
+                </a:solidFill>
+              </a:rPr>
+              <a:t>–  shaded, γ₂ / w₂ / R² annotated</a:t>
             </a:r>
           </a:p>
           <a:p>
@@ -4556,7 +5169,7 @@
                   <a:srgbClr val="14303D"/>
                 </a:solidFill>
               </a:rPr>
-              <a:t>•  Sampling unit → backscatter angular response and the images inside it → annotate → report</a:t>
+              <a:t>•  γ₂ — the spectral exponent — is the load-bearing output. Robust across matchers</a:t>
             </a:r>
           </a:p>
           <a:p>
@@ -4571,7 +5184,52 @@
                   <a:srgbClr val="14303D"/>
                 </a:solidFill>
               </a:rPr>
-              <a:t>•  Reference dataset: HabCam test data on Zenodo (CC-BY-4.0)</a:t>
+              <a:t>•  w₂ and rms are NOT trustworthy in absolute terms: no consistent RAFT-vs-SGBM</a:t>
+            </a:r>
+          </a:p>
+          <a:p>
+            <a:pPr algn="l" lvl="1">
+              <a:spcAft>
+                <a:spcPts val="600"/>
+              </a:spcAft>
+            </a:pPr>
+            <a:r>
+              <a:rPr sz="1300" b="0" i="0">
+                <a:solidFill>
+                  <a:srgbClr val="5B6B76"/>
+                </a:solidFill>
+              </a:rPr>
+              <a:t>–  bias, and the median rms (50 mm) sits far above the 3–23 mm literature range</a:t>
+            </a:r>
+          </a:p>
+          <a:p>
+            <a:pPr algn="l">
+              <a:spcAft>
+                <a:spcPts val="600"/>
+              </a:spcAft>
+            </a:pPr>
+            <a:r>
+              <a:rPr sz="1600" b="0" i="0">
+                <a:solidFill>
+                  <a:srgbClr val="14303D"/>
+                </a:solidFill>
+              </a:rPr>
+              <a:t>•  When quality != ok, every field is null — shown, not faked</a:t>
+            </a:r>
+          </a:p>
+          <a:p>
+            <a:pPr algn="l">
+              <a:spcAft>
+                <a:spcPts val="600"/>
+              </a:spcAft>
+            </a:pPr>
+            <a:r>
+              <a:rPr sz="1600" b="0" i="0">
+                <a:solidFill>
+                  <a:srgbClr val="14303D"/>
+                </a:solidFill>
+              </a:rPr>
+              <a:t>•  Where the curve peels off the fit at high K, that's the stereo noise floor</a:t>
             </a:r>
           </a:p>
         </p:txBody>
@@ -4636,7 +5294,7 @@
                   <a:srgbClr val="1A5276"/>
                 </a:solidFill>
               </a:rPr>
-              <a:t>HabCam still + metadata panel + map context</a:t>
+              <a:t>Metrics + Spectrum tabs side by side</a:t>
             </a:r>
           </a:p>
         </p:txBody>
@@ -4649,7 +5307,7 @@
 </p:sld>
 </file>
 
-<file path=ppt/slides/slide16.xml><?xml version="1.0" encoding="utf-8"?>
+<file path=ppt/slides/slide18.xml><?xml version="1.0" encoding="utf-8"?>
 <p:sld xmlns:a="http://schemas.openxmlformats.org/drawingml/2006/main" xmlns:p="http://schemas.openxmlformats.org/presentationml/2006/main" xmlns:r="http://schemas.openxmlformats.org/officeDocument/2006/relationships">
   <p:cSld>
     <p:spTree>
@@ -4688,7 +5346,7 @@
                   <a:srgbClr val="1A5276"/>
                 </a:solidFill>
               </a:rPr>
-              <a:t>Use case — MAREANO</a:t>
+              <a:t>Georeferencing — and a 180° bug worth telling</a:t>
             </a:r>
           </a:p>
         </p:txBody>
@@ -4722,7 +5380,7 @@
                   <a:srgbClr val="2E86C1"/>
                 </a:solidFill>
               </a:rPr>
-              <a:t>VIDEO</a:t>
+              <a:t>FIX</a:t>
             </a:r>
           </a:p>
         </p:txBody>
@@ -4730,6 +5388,876 @@
       <p:sp>
         <p:nvSpPr>
           <p:cNvPr id="4" name="TextBox 3"/>
+          <p:cNvSpPr txBox="1"/>
+          <p:nvPr/>
+        </p:nvSpPr>
+        <p:spPr>
+          <a:xfrm>
+            <a:off x="640080" y="1371600"/>
+            <a:ext cx="10972800" cy="731520"/>
+          </a:xfrm>
+          <a:prstGeom prst="rect">
+            <a:avLst/>
+          </a:prstGeom>
+          <a:noFill/>
+        </p:spPr>
+        <p:txBody>
+          <a:bodyPr wrap="square">
+            <a:spAutoFit/>
+          </a:bodyPr>
+          <a:lstStyle/>
+          <a:p>
+            <a:pPr algn="l"/>
+            <a:r>
+              <a:rPr sz="1400" b="0" i="0">
+                <a:solidFill>
+                  <a:srgbClr val="5B6B76"/>
+                </a:solidFill>
+              </a:rPr>
+              <a:t>The bug (#31): the plugin sent the nav's `bearing` column as heading. bearing points ASTERN — so every georeferenced product was rotated 180°, and a saved ±180 heading offset was the natural way to paper over it.</a:t>
+            </a:r>
+          </a:p>
+        </p:txBody>
+      </p:sp>
+      <p:graphicFrame>
+        <p:nvGraphicFramePr>
+          <p:cNvPr id="5" name="Table 4"/>
+          <p:cNvGraphicFramePr>
+            <a:graphicFrameLocks noGrp="1"/>
+          </p:cNvGraphicFramePr>
+          <p:nvPr/>
+        </p:nvGraphicFramePr>
+        <p:xfrm>
+          <a:off x="640080" y="2057400"/>
+          <a:ext cx="10881360" cy="768096"/>
+        </p:xfrm>
+        <a:graphic>
+          <a:graphicData uri="http://schemas.openxmlformats.org/drawingml/2006/table">
+            <a:tbl>
+              <a:tblPr firstRow="1" bandRow="1">
+                <a:tableStyleId>{5C22544A-7EE6-4342-B048-85BDC9FD1C3A}</a:tableStyleId>
+              </a:tblPr>
+              <a:tblGrid>
+                <a:gridCol w="4663440"/>
+                <a:gridCol w="3108960"/>
+                <a:gridCol w="3108960"/>
+              </a:tblGrid>
+              <a:tr h="256032">
+                <a:tc>
+                  <a:txBody>
+                    <a:bodyPr wrap="square"/>
+                    <a:lstStyle/>
+                    <a:p>
+                      <a:pPr algn="l"/>
+                      <a:r>
+                        <a:rPr sz="1100" b="1" i="0">
+                          <a:solidFill>
+                            <a:srgbClr val="FFFFFF"/>
+                          </a:solidFill>
+                        </a:rPr>
+                        <a:t>hypothesis</a:t>
+                      </a:r>
+                    </a:p>
+                  </a:txBody>
+                  <a:tcPr marL="54864" marR="54864" marT="18288" marB="18288" anchor="ctr">
+                    <a:solidFill>
+                      <a:srgbClr val="1A5276"/>
+                    </a:solidFill>
+                  </a:tcPr>
+                </a:tc>
+                <a:tc>
+                  <a:txBody>
+                    <a:bodyPr wrap="square"/>
+                    <a:lstStyle/>
+                    <a:p>
+                      <a:pPr algn="l"/>
+                      <a:r>
+                        <a:rPr sz="1100" b="1" i="0">
+                          <a:solidFill>
+                            <a:srgbClr val="FFFFFF"/>
+                          </a:solidFill>
+                        </a:rPr>
+                        <a:t>median residual</a:t>
+                      </a:r>
+                    </a:p>
+                  </a:txBody>
+                  <a:tcPr marL="54864" marR="54864" marT="18288" marB="18288" anchor="ctr">
+                    <a:solidFill>
+                      <a:srgbClr val="1A5276"/>
+                    </a:solidFill>
+                  </a:tcPr>
+                </a:tc>
+                <a:tc>
+                  <a:txBody>
+                    <a:bodyPr wrap="square"/>
+                    <a:lstStyle/>
+                    <a:p>
+                      <a:pPr algn="l"/>
+                      <a:r>
+                        <a:rPr sz="1100" b="1" i="0">
+                          <a:solidFill>
+                            <a:srgbClr val="FFFFFF"/>
+                          </a:solidFill>
+                        </a:rPr>
+                        <a:t>within 30°</a:t>
+                      </a:r>
+                    </a:p>
+                  </a:txBody>
+                  <a:tcPr marL="54864" marR="54864" marT="18288" marB="18288" anchor="ctr">
+                    <a:solidFill>
+                      <a:srgbClr val="1A5276"/>
+                    </a:solidFill>
+                  </a:tcPr>
+                </a:tc>
+              </a:tr>
+              <a:tr h="256032">
+                <a:tc>
+                  <a:txBody>
+                    <a:bodyPr wrap="square"/>
+                    <a:lstStyle/>
+                    <a:p>
+                      <a:pPr algn="l"/>
+                      <a:r>
+                        <a:rPr sz="1100" b="0" i="0">
+                          <a:solidFill>
+                            <a:srgbClr val="14303D"/>
+                          </a:solidFill>
+                        </a:rPr>
+                        <a:t>heading = bearing (old)</a:t>
+                      </a:r>
+                    </a:p>
+                  </a:txBody>
+                  <a:tcPr marL="54864" marR="54864" marT="18288" marB="18288" anchor="ctr">
+                    <a:solidFill>
+                      <a:srgbClr val="FFFFFF"/>
+                    </a:solidFill>
+                  </a:tcPr>
+                </a:tc>
+                <a:tc>
+                  <a:txBody>
+                    <a:bodyPr wrap="square"/>
+                    <a:lstStyle/>
+                    <a:p>
+                      <a:pPr algn="l"/>
+                      <a:r>
+                        <a:rPr sz="1100" b="0" i="0">
+                          <a:solidFill>
+                            <a:srgbClr val="14303D"/>
+                          </a:solidFill>
+                        </a:rPr>
+                        <a:t>−175.3°</a:t>
+                      </a:r>
+                    </a:p>
+                  </a:txBody>
+                  <a:tcPr marL="54864" marR="54864" marT="18288" marB="18288" anchor="ctr">
+                    <a:solidFill>
+                      <a:srgbClr val="FFFFFF"/>
+                    </a:solidFill>
+                  </a:tcPr>
+                </a:tc>
+                <a:tc>
+                  <a:txBody>
+                    <a:bodyPr wrap="square"/>
+                    <a:lstStyle/>
+                    <a:p>
+                      <a:pPr algn="l"/>
+                      <a:r>
+                        <a:rPr sz="1100" b="0" i="0">
+                          <a:solidFill>
+                            <a:srgbClr val="14303D"/>
+                          </a:solidFill>
+                        </a:rPr>
+                        <a:t>0 %</a:t>
+                      </a:r>
+                    </a:p>
+                  </a:txBody>
+                  <a:tcPr marL="54864" marR="54864" marT="18288" marB="18288" anchor="ctr">
+                    <a:solidFill>
+                      <a:srgbClr val="FFFFFF"/>
+                    </a:solidFill>
+                  </a:tcPr>
+                </a:tc>
+              </a:tr>
+              <a:tr h="256032">
+                <a:tc>
+                  <a:txBody>
+                    <a:bodyPr wrap="square"/>
+                    <a:lstStyle/>
+                    <a:p>
+                      <a:pPr algn="l"/>
+                      <a:r>
+                        <a:rPr sz="1100" b="1" i="0">
+                          <a:solidFill>
+                            <a:srgbClr val="14303D"/>
+                          </a:solidFill>
+                        </a:rPr>
+                        <a:t>heading = bearing + 180</a:t>
+                      </a:r>
+                    </a:p>
+                  </a:txBody>
+                  <a:tcPr marL="54864" marR="54864" marT="18288" marB="18288" anchor="ctr">
+                    <a:solidFill>
+                      <a:srgbClr val="EAF6FF"/>
+                    </a:solidFill>
+                  </a:tcPr>
+                </a:tc>
+                <a:tc>
+                  <a:txBody>
+                    <a:bodyPr wrap="square"/>
+                    <a:lstStyle/>
+                    <a:p>
+                      <a:pPr algn="l"/>
+                      <a:r>
+                        <a:rPr sz="1100" b="1" i="0">
+                          <a:solidFill>
+                            <a:srgbClr val="14303D"/>
+                          </a:solidFill>
+                        </a:rPr>
+                        <a:t>+3.9°</a:t>
+                      </a:r>
+                    </a:p>
+                  </a:txBody>
+                  <a:tcPr marL="54864" marR="54864" marT="18288" marB="18288" anchor="ctr">
+                    <a:solidFill>
+                      <a:srgbClr val="EAF6FF"/>
+                    </a:solidFill>
+                  </a:tcPr>
+                </a:tc>
+                <a:tc>
+                  <a:txBody>
+                    <a:bodyPr wrap="square"/>
+                    <a:lstStyle/>
+                    <a:p>
+                      <a:pPr algn="l"/>
+                      <a:r>
+                        <a:rPr sz="1100" b="1" i="0">
+                          <a:solidFill>
+                            <a:srgbClr val="14303D"/>
+                          </a:solidFill>
+                        </a:rPr>
+                        <a:t>100 %</a:t>
+                      </a:r>
+                    </a:p>
+                  </a:txBody>
+                  <a:tcPr marL="54864" marR="54864" marT="18288" marB="18288" anchor="ctr">
+                    <a:solidFill>
+                      <a:srgbClr val="EAF6FF"/>
+                    </a:solidFill>
+                  </a:tcPr>
+                </a:tc>
+              </a:tr>
+            </a:tbl>
+          </a:graphicData>
+        </a:graphic>
+      </p:graphicFrame>
+      <p:sp>
+        <p:nvSpPr>
+          <p:cNvPr id="6" name="TextBox 5"/>
+          <p:cNvSpPr txBox="1"/>
+          <p:nvPr/>
+        </p:nvSpPr>
+        <p:spPr>
+          <a:xfrm>
+            <a:off x="640080" y="3026664"/>
+            <a:ext cx="10972800" cy="3465576"/>
+          </a:xfrm>
+          <a:prstGeom prst="rect">
+            <a:avLst/>
+          </a:prstGeom>
+          <a:noFill/>
+        </p:spPr>
+        <p:txBody>
+          <a:bodyPr wrap="square">
+            <a:spAutoFit/>
+          </a:bodyPr>
+          <a:lstStyle/>
+          <a:p>
+            <a:pPr algn="l">
+              <a:spcAft>
+                <a:spcPts val="600"/>
+              </a:spcAft>
+            </a:pPr>
+            <a:r>
+              <a:rPr sz="1400" b="0" i="0">
+                <a:solidFill>
+                  <a:srgbClr val="14303D"/>
+                </a:solidFill>
+              </a:rPr>
+              <a:t>•  Proved on the imagery, not by argument: imagery-derived course minus nav course</a:t>
+            </a:r>
+          </a:p>
+          <a:p>
+            <a:pPr algn="l" lvl="1">
+              <a:spcAft>
+                <a:spcPts val="600"/>
+              </a:spcAft>
+            </a:pPr>
+            <a:r>
+              <a:rPr sz="1200" b="0" i="0">
+                <a:solidFill>
+                  <a:srgbClr val="5B6B76"/>
+                </a:solidFill>
+              </a:rPr>
+              <a:t>–  over 250 registered frame pairs (table above)</a:t>
+            </a:r>
+          </a:p>
+          <a:p>
+            <a:pPr algn="l">
+              <a:spcAft>
+                <a:spcPts val="600"/>
+              </a:spcAft>
+            </a:pPr>
+            <a:r>
+              <a:rPr sz="1400" b="0" i="0">
+                <a:solidFill>
+                  <a:srgbClr val="14303D"/>
+                </a:solidFill>
+              </a:rPr>
+              <a:t>•  Side benefit: a single frame's heading is good to ~4° — now a measured number</a:t>
+            </a:r>
+          </a:p>
+          <a:p>
+            <a:pPr algn="l">
+              <a:spcAft>
+                <a:spcPts val="600"/>
+              </a:spcAft>
+            </a:pPr>
+            <a:r>
+              <a:rPr sz="1400" b="0" i="0">
+                <a:solidFill>
+                  <a:srgbClr val="14303D"/>
+                </a:solidFill>
+              </a:rPr>
+              <a:t>•  Rotation ≠ reflection. Heading offset fixes a rotation; Mirror fixes a handedness</a:t>
+            </a:r>
+          </a:p>
+          <a:p>
+            <a:pPr algn="l" lvl="1">
+              <a:spcAft>
+                <a:spcPts val="600"/>
+              </a:spcAft>
+            </a:pPr>
+            <a:r>
+              <a:rPr sz="1200" b="0" i="0">
+                <a:solidFill>
+                  <a:srgbClr val="5B6B76"/>
+                </a:solidFill>
+              </a:rPr>
+              <a:t>–  flip. No rotation can undo a reflection — rasters exported before the fix</a:t>
+            </a:r>
+          </a:p>
+          <a:p>
+            <a:pPr algn="l" lvl="1">
+              <a:spcAft>
+                <a:spcPts val="600"/>
+              </a:spcAft>
+            </a:pPr>
+            <a:r>
+              <a:rPr sz="1200" b="0" i="0">
+                <a:solidFill>
+                  <a:srgbClr val="5B6B76"/>
+                </a:solidFill>
+              </a:rPr>
+              <a:t>–  are 180° out and need regenerating</a:t>
+            </a:r>
+          </a:p>
+        </p:txBody>
+      </p:sp>
+    </p:spTree>
+  </p:cSld>
+  <p:clrMapOvr>
+    <a:masterClrMapping/>
+  </p:clrMapOvr>
+</p:sld>
+</file>
+
+<file path=ppt/slides/slide19.xml><?xml version="1.0" encoding="utf-8"?>
+<p:sld xmlns:a="http://schemas.openxmlformats.org/drawingml/2006/main" xmlns:p="http://schemas.openxmlformats.org/presentationml/2006/main" xmlns:r="http://schemas.openxmlformats.org/officeDocument/2006/relationships">
+  <p:cSld>
+    <p:spTree>
+      <p:nvGrpSpPr>
+        <p:cNvPr id="1" name=""/>
+        <p:cNvGrpSpPr/>
+        <p:nvPr/>
+      </p:nvGrpSpPr>
+      <p:grpSpPr/>
+      <p:sp>
+        <p:nvSpPr>
+          <p:cNvPr id="2" name="TextBox 1"/>
+          <p:cNvSpPr txBox="1"/>
+          <p:nvPr/>
+        </p:nvSpPr>
+        <p:spPr>
+          <a:xfrm>
+            <a:off x="502920" y="320040"/>
+            <a:ext cx="11155680" cy="914400"/>
+          </a:xfrm>
+          <a:prstGeom prst="rect">
+            <a:avLst/>
+          </a:prstGeom>
+          <a:noFill/>
+        </p:spPr>
+        <p:txBody>
+          <a:bodyPr wrap="square">
+            <a:spAutoFit/>
+          </a:bodyPr>
+          <a:lstStyle/>
+          <a:p>
+            <a:pPr algn="l"/>
+            <a:r>
+              <a:rPr sz="3000" b="1" i="0">
+                <a:solidFill>
+                  <a:srgbClr val="1A5276"/>
+                </a:solidFill>
+              </a:rPr>
+              <a:t>Georeferenced mosaics</a:t>
+            </a:r>
+          </a:p>
+        </p:txBody>
+      </p:sp>
+      <p:sp>
+        <p:nvSpPr>
+          <p:cNvPr id="3" name="TextBox 2"/>
+          <p:cNvSpPr txBox="1"/>
+          <p:nvPr/>
+        </p:nvSpPr>
+        <p:spPr>
+          <a:xfrm>
+            <a:off x="10058400" y="457200"/>
+            <a:ext cx="1737360" cy="457200"/>
+          </a:xfrm>
+          <a:prstGeom prst="rect">
+            <a:avLst/>
+          </a:prstGeom>
+          <a:noFill/>
+        </p:spPr>
+        <p:txBody>
+          <a:bodyPr wrap="none">
+            <a:spAutoFit/>
+          </a:bodyPr>
+          <a:lstStyle/>
+          <a:p>
+            <a:pPr algn="r"/>
+            <a:r>
+              <a:rPr sz="1100" b="1" i="0">
+                <a:solidFill>
+                  <a:srgbClr val="2E86C1"/>
+                </a:solidFill>
+              </a:rPr>
+              <a:t>NEW TOOL</a:t>
+            </a:r>
+          </a:p>
+        </p:txBody>
+      </p:sp>
+      <p:graphicFrame>
+        <p:nvGraphicFramePr>
+          <p:cNvPr id="4" name="Table 3"/>
+          <p:cNvGraphicFramePr>
+            <a:graphicFrameLocks noGrp="1"/>
+          </p:cNvGraphicFramePr>
+          <p:nvPr/>
+        </p:nvGraphicFramePr>
+        <p:xfrm>
+          <a:off x="640080" y="1371600"/>
+          <a:ext cx="10881360" cy="1280160"/>
+        </p:xfrm>
+        <a:graphic>
+          <a:graphicData uri="http://schemas.openxmlformats.org/drawingml/2006/table">
+            <a:tbl>
+              <a:tblPr firstRow="1" bandRow="1">
+                <a:tableStyleId>{5C22544A-7EE6-4342-B048-85BDC9FD1C3A}</a:tableStyleId>
+              </a:tblPr>
+              <a:tblGrid>
+                <a:gridCol w="2176272"/>
+                <a:gridCol w="8705088"/>
+              </a:tblGrid>
+              <a:tr h="256032">
+                <a:tc>
+                  <a:txBody>
+                    <a:bodyPr wrap="square"/>
+                    <a:lstStyle/>
+                    <a:p>
+                      <a:pPr algn="l"/>
+                      <a:r>
+                        <a:rPr sz="1100" b="1" i="0">
+                          <a:solidFill>
+                            <a:srgbClr val="FFFFFF"/>
+                          </a:solidFill>
+                        </a:rPr>
+                        <a:t>mode</a:t>
+                      </a:r>
+                    </a:p>
+                  </a:txBody>
+                  <a:tcPr marL="54864" marR="54864" marT="18288" marB="18288" anchor="ctr">
+                    <a:solidFill>
+                      <a:srgbClr val="1A5276"/>
+                    </a:solidFill>
+                  </a:tcPr>
+                </a:tc>
+                <a:tc>
+                  <a:txBody>
+                    <a:bodyPr wrap="square"/>
+                    <a:lstStyle/>
+                    <a:p>
+                      <a:pPr algn="l"/>
+                      <a:r>
+                        <a:rPr sz="1100" b="1" i="0">
+                          <a:solidFill>
+                            <a:srgbClr val="FFFFFF"/>
+                          </a:solidFill>
+                        </a:rPr>
+                        <a:t>how frames are placed</a:t>
+                      </a:r>
+                    </a:p>
+                  </a:txBody>
+                  <a:tcPr marL="54864" marR="54864" marT="18288" marB="18288" anchor="ctr">
+                    <a:solidFill>
+                      <a:srgbClr val="1A5276"/>
+                    </a:solidFill>
+                  </a:tcPr>
+                </a:tc>
+              </a:tr>
+              <a:tr h="256032">
+                <a:tc>
+                  <a:txBody>
+                    <a:bodyPr wrap="square"/>
+                    <a:lstStyle/>
+                    <a:p>
+                      <a:pPr algn="l"/>
+                      <a:r>
+                        <a:rPr sz="1100" b="0" i="0">
+                          <a:solidFill>
+                            <a:srgbClr val="14303D"/>
+                          </a:solidFill>
+                        </a:rPr>
+                        <a:t>Auto (default)</a:t>
+                      </a:r>
+                    </a:p>
+                  </a:txBody>
+                  <a:tcPr marL="54864" marR="54864" marT="18288" marB="18288" anchor="ctr">
+                    <a:solidFill>
+                      <a:srgbClr val="FFFFFF"/>
+                    </a:solidFill>
+                  </a:tcPr>
+                </a:tc>
+                <a:tc>
+                  <a:txBody>
+                    <a:bodyPr wrap="square"/>
+                    <a:lstStyle/>
+                    <a:p>
+                      <a:pPr algn="l"/>
+                      <a:r>
+                        <a:rPr sz="1100" b="0" i="0">
+                          <a:solidFill>
+                            <a:srgbClr val="14303D"/>
+                          </a:solidFill>
+                        </a:rPr>
+                        <a:t>Per window, from nav-predicted overlap: piled-up → pixel, well-spread → flat</a:t>
+                      </a:r>
+                    </a:p>
+                  </a:txBody>
+                  <a:tcPr marL="54864" marR="54864" marT="18288" marB="18288" anchor="ctr">
+                    <a:solidFill>
+                      <a:srgbClr val="FFFFFF"/>
+                    </a:solidFill>
+                  </a:tcPr>
+                </a:tc>
+              </a:tr>
+              <a:tr h="256032">
+                <a:tc>
+                  <a:txBody>
+                    <a:bodyPr wrap="square"/>
+                    <a:lstStyle/>
+                    <a:p>
+                      <a:pPr algn="l"/>
+                      <a:r>
+                        <a:rPr sz="1100" b="0" i="0">
+                          <a:solidFill>
+                            <a:srgbClr val="14303D"/>
+                          </a:solidFill>
+                        </a:rPr>
+                        <a:t>Flat</a:t>
+                      </a:r>
+                    </a:p>
+                  </a:txBody>
+                  <a:tcPr marL="54864" marR="54864" marT="18288" marB="18288" anchor="ctr">
+                    <a:solidFill>
+                      <a:srgbClr val="FFFFFF"/>
+                    </a:solidFill>
+                  </a:tcPr>
+                </a:tc>
+                <a:tc>
+                  <a:txBody>
+                    <a:bodyPr wrap="square"/>
+                    <a:lstStyle/>
+                    <a:p>
+                      <a:pPr algn="l"/>
+                      <a:r>
+                        <a:rPr sz="1100" b="0" i="0">
+                          <a:solidFill>
+                            <a:srgbClr val="14303D"/>
+                          </a:solidFill>
+                        </a:rPr>
+                        <a:t>Navigation alone (position, heading, flat-seabed scale). Fast</a:t>
+                      </a:r>
+                    </a:p>
+                  </a:txBody>
+                  <a:tcPr marL="54864" marR="54864" marT="18288" marB="18288" anchor="ctr">
+                    <a:solidFill>
+                      <a:srgbClr val="FFFFFF"/>
+                    </a:solidFill>
+                  </a:tcPr>
+                </a:tc>
+              </a:tr>
+              <a:tr h="256032">
+                <a:tc>
+                  <a:txBody>
+                    <a:bodyPr wrap="square"/>
+                    <a:lstStyle/>
+                    <a:p>
+                      <a:pPr algn="l"/>
+                      <a:r>
+                        <a:rPr sz="1100" b="0" i="0">
+                          <a:solidFill>
+                            <a:srgbClr val="14303D"/>
+                          </a:solidFill>
+                        </a:rPr>
+                        <a:t>Ortho</a:t>
+                      </a:r>
+                    </a:p>
+                  </a:txBody>
+                  <a:tcPr marL="54864" marR="54864" marT="18288" marB="18288" anchor="ctr">
+                    <a:solidFill>
+                      <a:srgbClr val="FFFFFF"/>
+                    </a:solidFill>
+                  </a:tcPr>
+                </a:tc>
+                <a:tc>
+                  <a:txBody>
+                    <a:bodyPr wrap="square"/>
+                    <a:lstStyle/>
+                    <a:p>
+                      <a:pPr algn="l"/>
+                      <a:r>
+                        <a:rPr sz="1100" b="0" i="0">
+                          <a:solidFill>
+                            <a:srgbClr val="14303D"/>
+                          </a:solidFill>
+                        </a:rPr>
+                        <a:t>Relief-corrected per-frame orthophoto, then nav placement. Slowest</a:t>
+                      </a:r>
+                    </a:p>
+                  </a:txBody>
+                  <a:tcPr marL="54864" marR="54864" marT="18288" marB="18288" anchor="ctr">
+                    <a:solidFill>
+                      <a:srgbClr val="FFFFFF"/>
+                    </a:solidFill>
+                  </a:tcPr>
+                </a:tc>
+              </a:tr>
+              <a:tr h="256032">
+                <a:tc>
+                  <a:txBody>
+                    <a:bodyPr wrap="square"/>
+                    <a:lstStyle/>
+                    <a:p>
+                      <a:pPr algn="l"/>
+                      <a:r>
+                        <a:rPr sz="1100" b="0" i="0">
+                          <a:solidFill>
+                            <a:srgbClr val="14303D"/>
+                          </a:solidFill>
+                        </a:rPr>
+                        <a:t>Pixel</a:t>
+                      </a:r>
+                    </a:p>
+                  </a:txBody>
+                  <a:tcPr marL="54864" marR="54864" marT="18288" marB="18288" anchor="ctr">
+                    <a:solidFill>
+                      <a:srgbClr val="FFFFFF"/>
+                    </a:solidFill>
+                  </a:tcPr>
+                </a:tc>
+                <a:tc>
+                  <a:txBody>
+                    <a:bodyPr wrap="square"/>
+                    <a:lstStyle/>
+                    <a:p>
+                      <a:pPr algn="l"/>
+                      <a:r>
+                        <a:rPr sz="1100" b="0" i="0">
+                          <a:solidFill>
+                            <a:srgbClr val="14303D"/>
+                          </a:solidFill>
+                        </a:rPr>
+                        <a:t>Registered by image content, georeferenced through the reference frame's nav</a:t>
+                      </a:r>
+                    </a:p>
+                  </a:txBody>
+                  <a:tcPr marL="54864" marR="54864" marT="18288" marB="18288" anchor="ctr">
+                    <a:solidFill>
+                      <a:srgbClr val="FFFFFF"/>
+                    </a:solidFill>
+                  </a:tcPr>
+                </a:tc>
+              </a:tr>
+            </a:tbl>
+          </a:graphicData>
+        </a:graphic>
+      </p:graphicFrame>
+      <p:sp>
+        <p:nvSpPr>
+          <p:cNvPr id="5" name="TextBox 4"/>
+          <p:cNvSpPr txBox="1"/>
+          <p:nvPr/>
+        </p:nvSpPr>
+        <p:spPr>
+          <a:xfrm>
+            <a:off x="640080" y="2852928"/>
+            <a:ext cx="10972800" cy="3639312"/>
+          </a:xfrm>
+          <a:prstGeom prst="rect">
+            <a:avLst/>
+          </a:prstGeom>
+          <a:noFill/>
+        </p:spPr>
+        <p:txBody>
+          <a:bodyPr wrap="square">
+            <a:spAutoFit/>
+          </a:bodyPr>
+          <a:lstStyle/>
+          <a:p>
+            <a:pPr algn="l">
+              <a:spcAft>
+                <a:spcPts val="600"/>
+              </a:spcAft>
+            </a:pPr>
+            <a:r>
+              <a:rPr sz="1400" b="0" i="0">
+                <a:solidFill>
+                  <a:srgbClr val="14303D"/>
+                </a:solidFill>
+              </a:rPr>
+              <a:t>•  Illumination correction (flat-fields the strobe vignette) and gain compensation</a:t>
+            </a:r>
+          </a:p>
+          <a:p>
+            <a:pPr algn="l" lvl="1">
+              <a:spcAft>
+                <a:spcPts val="600"/>
+              </a:spcAft>
+            </a:pPr>
+            <a:r>
+              <a:rPr sz="1200" b="0" i="0">
+                <a:solidFill>
+                  <a:srgbClr val="5B6B76"/>
+                </a:solidFill>
+              </a:rPr>
+              <a:t>–  on by default — this is what makes a mosaic look continuous</a:t>
+            </a:r>
+          </a:p>
+          <a:p>
+            <a:pPr algn="l">
+              <a:spcAft>
+                <a:spcPts val="600"/>
+              </a:spcAft>
+            </a:pPr>
+            <a:r>
+              <a:rPr sz="1400" b="0" i="0">
+                <a:solidFill>
+                  <a:srgbClr val="14303D"/>
+                </a:solidFill>
+              </a:rPr>
+              <a:t>•  Presets: Browse (3 mm, fast) · Publication (ortho, 0.8 mm, lanczos, 8192 px, RGBA)</a:t>
+            </a:r>
+          </a:p>
+          <a:p>
+            <a:pPr algn="l">
+              <a:spcAft>
+                <a:spcPts val="600"/>
+              </a:spcAft>
+            </a:pPr>
+            <a:r>
+              <a:rPr sz="1400" b="0" i="0">
+                <a:solidFill>
+                  <a:srgbClr val="14303D"/>
+                </a:solidFill>
+              </a:rPr>
+              <a:t>•  Honest failure mode: featureless mud cannot be content-registered by any method —</a:t>
+            </a:r>
+          </a:p>
+          <a:p>
+            <a:pPr algn="l" lvl="1">
+              <a:spcAft>
+                <a:spcPts val="600"/>
+              </a:spcAft>
+            </a:pPr>
+            <a:r>
+              <a:rPr sz="1200" b="0" i="0">
+                <a:solidFill>
+                  <a:srgbClr val="5B6B76"/>
+                </a:solidFill>
+              </a:rPr>
+              <a:t>–  'only 0/10 pairs registered — low texture, mosaic is nav-placed'</a:t>
+            </a:r>
+          </a:p>
+        </p:txBody>
+      </p:sp>
+    </p:spTree>
+  </p:cSld>
+  <p:clrMapOvr>
+    <a:masterClrMapping/>
+  </p:clrMapOvr>
+</p:sld>
+</file>
+
+<file path=ppt/slides/slide2.xml><?xml version="1.0" encoding="utf-8"?>
+<p:sld xmlns:a="http://schemas.openxmlformats.org/drawingml/2006/main" xmlns:p="http://schemas.openxmlformats.org/presentationml/2006/main" xmlns:r="http://schemas.openxmlformats.org/officeDocument/2006/relationships">
+  <p:cSld>
+    <p:spTree>
+      <p:nvGrpSpPr>
+        <p:cNvPr id="1" name=""/>
+        <p:cNvGrpSpPr/>
+        <p:nvPr/>
+      </p:nvGrpSpPr>
+      <p:grpSpPr/>
+      <p:sp>
+        <p:nvSpPr>
+          <p:cNvPr id="2" name="TextBox 1"/>
+          <p:cNvSpPr txBox="1"/>
+          <p:nvPr/>
+        </p:nvSpPr>
+        <p:spPr>
+          <a:xfrm>
+            <a:off x="502920" y="320040"/>
+            <a:ext cx="11155680" cy="914400"/>
+          </a:xfrm>
+          <a:prstGeom prst="rect">
+            <a:avLst/>
+          </a:prstGeom>
+          <a:noFill/>
+        </p:spPr>
+        <p:txBody>
+          <a:bodyPr wrap="square">
+            <a:spAutoFit/>
+          </a:bodyPr>
+          <a:lstStyle/>
+          <a:p>
+            <a:pPr algn="l"/>
+            <a:r>
+              <a:rPr sz="3000" b="1" i="0">
+                <a:solidFill>
+                  <a:srgbClr val="1A5276"/>
+                </a:solidFill>
+              </a:rPr>
+              <a:t>Recap — what it is</a:t>
+            </a:r>
+          </a:p>
+        </p:txBody>
+      </p:sp>
+      <p:sp>
+        <p:nvSpPr>
+          <p:cNvPr id="3" name="TextBox 2"/>
           <p:cNvSpPr txBox="1"/>
           <p:nvPr/>
         </p:nvSpPr>
@@ -4760,7 +6288,7 @@
                   <a:srgbClr val="14303D"/>
                 </a:solidFill>
               </a:rPr>
-              <a:t>•  Norwegian seabed-mapping programme — towed-camera video transects</a:t>
+              <a:t>•  Runs inside QGIS as a dock-based toolset</a:t>
             </a:r>
           </a:p>
           <a:p>
@@ -4775,7 +6303,67 @@
                   <a:srgbClr val="14303D"/>
                 </a:solidFill>
               </a:rPr>
-              <a:t>•  Loads the MAREANO survey .log format directly (DDM → decimal degrees)</a:t>
+              <a:t>•  Joins four data worlds on one map:</a:t>
+            </a:r>
+          </a:p>
+          <a:p>
+            <a:pPr algn="l" lvl="1">
+              <a:spcAft>
+                <a:spcPts val="600"/>
+              </a:spcAft>
+            </a:pPr>
+            <a:r>
+              <a:rPr sz="1300" b="0" i="0">
+                <a:solidFill>
+                  <a:srgbClr val="5B6B76"/>
+                </a:solidFill>
+              </a:rPr>
+              <a:t>–  MBES bathymetry + backscatter (ARA)</a:t>
+            </a:r>
+          </a:p>
+          <a:p>
+            <a:pPr algn="l" lvl="1">
+              <a:spcAft>
+                <a:spcPts val="600"/>
+              </a:spcAft>
+            </a:pPr>
+            <a:r>
+              <a:rPr sz="1300" b="0" i="0">
+                <a:solidFill>
+                  <a:srgbClr val="5B6B76"/>
+                </a:solidFill>
+              </a:rPr>
+              <a:t>–  Seafloor imagery (HabCam-style stereo stills)</a:t>
+            </a:r>
+          </a:p>
+          <a:p>
+            <a:pPr algn="l" lvl="1">
+              <a:spcAft>
+                <a:spcPts val="600"/>
+              </a:spcAft>
+            </a:pPr>
+            <a:r>
+              <a:rPr sz="1300" b="0" i="0">
+                <a:solidFill>
+                  <a:srgbClr val="5B6B76"/>
+                </a:solidFill>
+              </a:rPr>
+              <a:t>–  Survey video with per-frame GPS</a:t>
+            </a:r>
+          </a:p>
+          <a:p>
+            <a:pPr algn="l" lvl="1">
+              <a:spcAft>
+                <a:spcPts val="600"/>
+              </a:spcAft>
+            </a:pPr>
+            <a:r>
+              <a:rPr sz="1300" b="0" i="0">
+                <a:solidFill>
+                  <a:srgbClr val="5B6B76"/>
+                </a:solidFill>
+              </a:rPr>
+              <a:t>–  Stereo geometry — micro-DEMs, roughness, mosaics (new)</a:t>
             </a:r>
           </a:p>
           <a:p>
@@ -4790,7 +6378,7 @@
                   <a:srgbClr val="14303D"/>
                 </a:solidFill>
               </a:rPr>
-              <a:t>•  Video geo-linked to the map; GPS track drawn as a persistent layer</a:t>
+              <a:t>•  Ground-truth annotation → statistics → KMZ / HTML reports</a:t>
             </a:r>
           </a:p>
           <a:p>
@@ -4805,14 +6393,14 @@
                   <a:srgbClr val="14303D"/>
                 </a:solidFill>
               </a:rPr>
-              <a:t>•  Per-frame species / substrate annotation alongside the acoustics</a:t>
-            </a:r>
-          </a:p>
-        </p:txBody>
-      </p:sp>
-      <p:sp>
-        <p:nvSpPr>
-          <p:cNvPr id="5" name="Rounded Rectangle 4"/>
+              <a:t>•  Heavy work stays server-side: GRASS backend + a GPU stereo service</a:t>
+            </a:r>
+          </a:p>
+        </p:txBody>
+      </p:sp>
+      <p:sp>
+        <p:nvSpPr>
+          <p:cNvPr id="4" name="Rounded Rectangle 3"/>
           <p:cNvSpPr/>
           <p:nvPr/>
         </p:nvSpPr>
@@ -4870,7 +6458,7 @@
                   <a:srgbClr val="1A5276"/>
                 </a:solidFill>
               </a:rPr>
-              <a:t>MAREANO video transect + track on the canvas</a:t>
+              <a:t>GroundTruther docked in QGIS (overview)</a:t>
             </a:r>
           </a:p>
         </p:txBody>
@@ -4883,7 +6471,7 @@
 </p:sld>
 </file>
 
-<file path=ppt/slides/slide17.xml><?xml version="1.0" encoding="utf-8"?>
+<file path=ppt/slides/slide20.xml><?xml version="1.0" encoding="utf-8"?>
 <p:sld xmlns:a="http://schemas.openxmlformats.org/drawingml/2006/main" xmlns:p="http://schemas.openxmlformats.org/presentationml/2006/main" xmlns:r="http://schemas.openxmlformats.org/officeDocument/2006/relationships">
   <p:cSld>
     <p:spTree>
@@ -4922,7 +6510,7 @@
                   <a:srgbClr val="1A5276"/>
                 </a:solidFill>
               </a:rPr>
-              <a:t>Is this a unique tool?</a:t>
+              <a:t>The photogrammetric seabed ribbon</a:t>
             </a:r>
           </a:p>
         </p:txBody>
@@ -4930,6 +6518,40 @@
       <p:sp>
         <p:nvSpPr>
           <p:cNvPr id="3" name="TextBox 2"/>
+          <p:cNvSpPr txBox="1"/>
+          <p:nvPr/>
+        </p:nvSpPr>
+        <p:spPr>
+          <a:xfrm>
+            <a:off x="10058400" y="457200"/>
+            <a:ext cx="1737360" cy="457200"/>
+          </a:xfrm>
+          <a:prstGeom prst="rect">
+            <a:avLst/>
+          </a:prstGeom>
+          <a:noFill/>
+        </p:spPr>
+        <p:txBody>
+          <a:bodyPr wrap="none">
+            <a:spAutoFit/>
+          </a:bodyPr>
+          <a:lstStyle/>
+          <a:p>
+            <a:pPr algn="r"/>
+            <a:r>
+              <a:rPr sz="1100" b="1" i="0">
+                <a:solidFill>
+                  <a:srgbClr val="2E86C1"/>
+                </a:solidFill>
+              </a:rPr>
+              <a:t>NEW</a:t>
+            </a:r>
+          </a:p>
+        </p:txBody>
+      </p:sp>
+      <p:sp>
+        <p:nvSpPr>
+          <p:cNvPr id="4" name="TextBox 3"/>
           <p:cNvSpPr txBox="1"/>
           <p:nvPr/>
         </p:nvSpPr>
@@ -4955,12 +6577,42 @@
               </a:spcAft>
             </a:pPr>
             <a:r>
-              <a:rPr sz="1800" b="0" i="0">
+              <a:rPr sz="1300" b="0" i="0">
                 <a:solidFill>
                   <a:srgbClr val="14303D"/>
                 </a:solidFill>
               </a:rPr>
-              <a:t>•  Yes — the integration is the differentiator.</a:t>
+              <a:t>•  Composite a few hundred per-frame micro-DEMs along ONE HabCam line into ~170 m</a:t>
+            </a:r>
+          </a:p>
+          <a:p>
+            <a:pPr algn="l" lvl="1">
+              <a:spcAft>
+                <a:spcPts val="600"/>
+              </a:spcAft>
+            </a:pPr>
+            <a:r>
+              <a:rPr sz="1150" b="0" i="0">
+                <a:solidFill>
+                  <a:srgbClr val="5B6B76"/>
+                </a:solidFill>
+              </a:rPr>
+              <a:t>–  of millimetre-resolution georeferenced seabed. A script (scripts/build_ribbon.py),</a:t>
+            </a:r>
+          </a:p>
+          <a:p>
+            <a:pPr algn="l" lvl="1">
+              <a:spcAft>
+                <a:spcPts val="600"/>
+              </a:spcAft>
+            </a:pPr>
+            <a:r>
+              <a:rPr sz="1150" b="0" i="0">
+                <a:solidFill>
+                  <a:srgbClr val="5B6B76"/>
+                </a:solidFill>
+              </a:rPr>
+              <a:t>–  not yet a dock — look at a ribbon first</a:t>
             </a:r>
           </a:p>
           <a:p>
@@ -4970,12 +6622,72 @@
               </a:spcAft>
             </a:pPr>
             <a:r>
-              <a:rPr sz="1800" b="0" i="0">
+              <a:rPr sz="1300" b="0" i="0">
                 <a:solidFill>
                   <a:srgbClr val="14303D"/>
                 </a:solidFill>
               </a:rPr>
-              <a:t>•  Most workflows are siloed: acoustics, image annotation, video review, GIS — all separate</a:t>
+              <a:t>•  Choose the strip by TEXTURE, never by relief. On this survey they are</a:t>
+            </a:r>
+          </a:p>
+          <a:p>
+            <a:pPr algn="l" lvl="1">
+              <a:spcAft>
+                <a:spcPts val="600"/>
+              </a:spcAft>
+            </a:pPr>
+            <a:r>
+              <a:rPr sz="1150" b="0" i="0">
+                <a:solidFill>
+                  <a:srgbClr val="5B6B76"/>
+                </a:solidFill>
+              </a:rPr>
+              <a:t>–  uncorrelated: two runs with ~4 m of relief (3.75 and 4.04 m) linked on 0 % of</a:t>
+            </a:r>
+          </a:p>
+          <a:p>
+            <a:pPr algn="l" lvl="1">
+              <a:spcAft>
+                <a:spcPts val="600"/>
+              </a:spcAft>
+            </a:pPr>
+            <a:r>
+              <a:rPr sz="1150" b="0" i="0">
+                <a:solidFill>
+                  <a:srgbClr val="5B6B76"/>
+                </a:solidFill>
+              </a:rPr>
+              <a:t>–  sampled pairs — featureless mud — while the strip with the MOST relief in the</a:t>
+            </a:r>
+          </a:p>
+          <a:p>
+            <a:pPr algn="l" lvl="1">
+              <a:spcAft>
+                <a:spcPts val="600"/>
+              </a:spcAft>
+            </a:pPr>
+            <a:r>
+              <a:rPr sz="1150" b="0" i="0">
+                <a:solidFill>
+                  <a:srgbClr val="5B6B76"/>
+                </a:solidFill>
+              </a:rPr>
+              <a:t>–  survey (5.80 m) managed only 22 median inliers. Picking by relief would have</a:t>
+            </a:r>
+          </a:p>
+          <a:p>
+            <a:pPr algn="l" lvl="1">
+              <a:spcAft>
+                <a:spcPts val="600"/>
+              </a:spcAft>
+            </a:pPr>
+            <a:r>
+              <a:rPr sz="1150" b="0" i="0">
+                <a:solidFill>
+                  <a:srgbClr val="5B6B76"/>
+                </a:solidFill>
+              </a:rPr>
+              <a:t>–  chosen one of the dead ones</a:t>
             </a:r>
           </a:p>
           <a:p>
@@ -4985,12 +6697,57 @@
               </a:spcAft>
             </a:pPr>
             <a:r>
-              <a:rPr sz="1800" b="0" i="0">
+              <a:rPr sz="1300" b="0" i="0">
                 <a:solidFill>
                   <a:srgbClr val="14303D"/>
                 </a:solidFill>
               </a:rPr>
-              <a:t>•  GroundTruther puts MBES + imagery + video + annotation + GRASS + reporting on one QGIS map, free &amp; open source</a:t>
+              <a:t>•  ORB + RANSAC needs help here: no preprocessing (CLAHE and flat-fielding both</a:t>
+            </a:r>
+          </a:p>
+          <a:p>
+            <a:pPr algn="l" lvl="1">
+              <a:spcAft>
+                <a:spcPts val="600"/>
+              </a:spcAft>
+            </a:pPr>
+            <a:r>
+              <a:rPr sz="1150" b="0" i="0">
+                <a:solidFill>
+                  <a:srgbClr val="5B6B76"/>
+                </a:solidFill>
+              </a:rPr>
+              <a:t>–  LOWERED inliers), a loose Lowe ratio 0.95, detection masked to the overlapping</a:t>
+            </a:r>
+          </a:p>
+          <a:p>
+            <a:pPr algn="l" lvl="1">
+              <a:spcAft>
+                <a:spcPts val="600"/>
+              </a:spcAft>
+            </a:pPr>
+            <a:r>
+              <a:rPr sz="1150" b="0" i="0">
+                <a:solidFill>
+                  <a:srgbClr val="5B6B76"/>
+                </a:solidFill>
+              </a:rPr>
+              <a:t>–  band, and a displacement prefilter + physical gate — without the gate RANSAC</a:t>
+            </a:r>
+          </a:p>
+          <a:p>
+            <a:pPr algn="l" lvl="1">
+              <a:spcAft>
+                <a:spcPts val="600"/>
+              </a:spcAft>
+            </a:pPr>
+            <a:r>
+              <a:rPr sz="1150" b="0" i="0">
+                <a:solidFill>
+                  <a:srgbClr val="5B6B76"/>
+                </a:solidFill>
+              </a:rPr>
+              <a:t>–  confidently returns 15–25-inlier consensuses on completely wrong transforms</a:t>
             </a:r>
           </a:p>
           <a:p>
@@ -5000,42 +6757,72 @@
               </a:spcAft>
             </a:pPr>
             <a:r>
-              <a:rPr sz="1800" b="0" i="0">
+              <a:rPr sz="1300" b="0" i="0">
                 <a:solidFill>
                   <a:srgbClr val="14303D"/>
                 </a:solidFill>
               </a:rPr>
-              <a:t>•  Cloud GRASS backend keeps heavy geoprocessing server-side</a:t>
-            </a:r>
-          </a:p>
-          <a:p>
-            <a:pPr algn="l">
-              <a:spcAft>
-                <a:spcPts val="600"/>
-              </a:spcAft>
-            </a:pPr>
-            <a:r>
-              <a:rPr sz="1800" b="0" i="0">
-                <a:solidFill>
-                  <a:srgbClr val="14303D"/>
-                </a:solidFill>
-              </a:rPr>
-              <a:t>•  Open formats throughout (Parquet · GeoJSON · KMZ · CSV / .log)</a:t>
-            </a:r>
-          </a:p>
-          <a:p>
-            <a:pPr algn="l">
-              <a:spcAft>
-                <a:spcPts val="600"/>
-              </a:spcAft>
-            </a:pPr>
-            <a:r>
-              <a:rPr sz="1800" b="0" i="0">
-                <a:solidFill>
-                  <a:srgbClr val="14303D"/>
-                </a:solidFill>
-              </a:rPr>
-              <a:t>•  Not a replacement for specialist acoustic suites — a connective, ground-truthing layer</a:t>
+              <a:t>•  Pixels where they work, navigation everywhere else: the USBL is</a:t>
+            </a:r>
+          </a:p>
+          <a:p>
+            <a:pPr algn="l" lvl="1">
+              <a:spcAft>
+                <a:spcPts val="600"/>
+              </a:spcAft>
+            </a:pPr>
+            <a:r>
+              <a:rPr sz="1150" b="0" i="0">
+                <a:solidFill>
+                  <a:srgbClr val="5B6B76"/>
+                </a:solidFill>
+              </a:rPr>
+              <a:t>–  piecewise-constant (median step 92 mm against a true 491 mm), so nav-placed</a:t>
+            </a:r>
+          </a:p>
+          <a:p>
+            <a:pPr algn="l" lvl="1">
+              <a:spcAft>
+                <a:spcPts val="600"/>
+              </a:spcAft>
+            </a:pPr>
+            <a:r>
+              <a:rPr sz="1150" b="0" i="0">
+                <a:solidFill>
+                  <a:srgbClr val="5B6B76"/>
+                </a:solidFill>
+              </a:rPr>
+              <a:t>–  frames stack in clumps of ~6 and jump. The chain integrates the links, bridges</a:t>
+            </a:r>
+          </a:p>
+          <a:p>
+            <a:pPr algn="l" lvl="1">
+              <a:spcAft>
+                <a:spcPts val="600"/>
+              </a:spcAft>
+            </a:pPr>
+            <a:r>
+              <a:rPr sz="1150" b="0" i="0">
+                <a:solidFill>
+                  <a:srgbClr val="5B6B76"/>
+                </a:solidFill>
+              </a:rPr>
+              <a:t>–  gaps with nav, then rubber-sheets back onto it — absolute placement from the</a:t>
+            </a:r>
+          </a:p>
+          <a:p>
+            <a:pPr algn="l" lvl="1">
+              <a:spcAft>
+                <a:spcPts val="600"/>
+              </a:spcAft>
+            </a:pPr>
+            <a:r>
+              <a:rPr sz="1150" b="0" i="0">
+                <a:solidFill>
+                  <a:srgbClr val="5B6B76"/>
+                </a:solidFill>
+              </a:rPr>
+              <a:t>–  USBL, relative geometry from the pixels</a:t>
             </a:r>
           </a:p>
         </p:txBody>
@@ -5048,7 +6835,7 @@
 </p:sld>
 </file>
 
-<file path=ppt/slides/slide18.xml><?xml version="1.0" encoding="utf-8"?>
+<file path=ppt/slides/slide21.xml><?xml version="1.0" encoding="utf-8"?>
 <p:sld xmlns:a="http://schemas.openxmlformats.org/drawingml/2006/main" xmlns:p="http://schemas.openxmlformats.org/presentationml/2006/main" xmlns:r="http://schemas.openxmlformats.org/officeDocument/2006/relationships">
   <p:cSld>
     <p:spTree>
@@ -5087,7 +6874,7 @@
                   <a:srgbClr val="1A5276"/>
                 </a:solidFill>
               </a:rPr>
-              <a:t>What's next?</a:t>
+              <a:t>The ribbon — measured</a:t>
             </a:r>
           </a:p>
         </p:txBody>
@@ -5095,6 +6882,605 @@
       <p:sp>
         <p:nvSpPr>
           <p:cNvPr id="3" name="TextBox 2"/>
+          <p:cNvSpPr txBox="1"/>
+          <p:nvPr/>
+        </p:nvSpPr>
+        <p:spPr>
+          <a:xfrm>
+            <a:off x="10058400" y="457200"/>
+            <a:ext cx="1737360" cy="457200"/>
+          </a:xfrm>
+          <a:prstGeom prst="rect">
+            <a:avLst/>
+          </a:prstGeom>
+          <a:noFill/>
+        </p:spPr>
+        <p:txBody>
+          <a:bodyPr wrap="none">
+            <a:spAutoFit/>
+          </a:bodyPr>
+          <a:lstStyle/>
+          <a:p>
+            <a:pPr algn="r"/>
+            <a:r>
+              <a:rPr sz="1100" b="1" i="0">
+                <a:solidFill>
+                  <a:srgbClr val="2E86C1"/>
+                </a:solidFill>
+              </a:rPr>
+              <a:t>RESULTS</a:t>
+            </a:r>
+          </a:p>
+        </p:txBody>
+      </p:sp>
+      <p:sp>
+        <p:nvSpPr>
+          <p:cNvPr id="4" name="TextBox 3"/>
+          <p:cNvSpPr txBox="1"/>
+          <p:nvPr/>
+        </p:nvSpPr>
+        <p:spPr>
+          <a:xfrm>
+            <a:off x="640080" y="1371600"/>
+            <a:ext cx="10972800" cy="731520"/>
+          </a:xfrm>
+          <a:prstGeom prst="rect">
+            <a:avLst/>
+          </a:prstGeom>
+          <a:noFill/>
+        </p:spPr>
+        <p:txBody>
+          <a:bodyPr wrap="square">
+            <a:spAutoFit/>
+          </a:bodyPr>
+          <a:lstStyle/>
+          <a:p>
+            <a:pPr algn="l"/>
+            <a:r>
+              <a:rPr sz="1400" b="0" i="0">
+                <a:solidFill>
+                  <a:srgbClr val="5B6B76"/>
+                </a:solidFill>
+              </a:rPr>
+              <a:t>Strip 6663–6958: 296 frames, 172 m, EPSG:32619, track-aligned at 273.1°, 1256 × 48 339 cells at 3 mm.</a:t>
+            </a:r>
+          </a:p>
+        </p:txBody>
+      </p:sp>
+      <p:graphicFrame>
+        <p:nvGraphicFramePr>
+          <p:cNvPr id="5" name="Table 4"/>
+          <p:cNvGraphicFramePr>
+            <a:graphicFrameLocks noGrp="1"/>
+          </p:cNvGraphicFramePr>
+          <p:nvPr/>
+        </p:nvGraphicFramePr>
+        <p:xfrm>
+          <a:off x="640080" y="2057400"/>
+          <a:ext cx="10881360" cy="1536192"/>
+        </p:xfrm>
+        <a:graphic>
+          <a:graphicData uri="http://schemas.openxmlformats.org/drawingml/2006/table">
+            <a:tbl>
+              <a:tblPr bandRow="1">
+                <a:tableStyleId>{5C22544A-7EE6-4342-B048-85BDC9FD1C3A}</a:tableStyleId>
+              </a:tblPr>
+              <a:tblGrid>
+                <a:gridCol w="4352544"/>
+                <a:gridCol w="6528816"/>
+              </a:tblGrid>
+              <a:tr h="256032">
+                <a:tc>
+                  <a:txBody>
+                    <a:bodyPr wrap="square"/>
+                    <a:lstStyle/>
+                    <a:p>
+                      <a:pPr algn="l"/>
+                      <a:r>
+                        <a:rPr sz="1100" b="0" i="0">
+                          <a:solidFill>
+                            <a:srgbClr val="14303D"/>
+                          </a:solidFill>
+                        </a:rPr>
+                        <a:t>link rate</a:t>
+                      </a:r>
+                    </a:p>
+                  </a:txBody>
+                  <a:tcPr marL="54864" marR="54864" marT="18288" marB="18288" anchor="ctr">
+                    <a:solidFill>
+                      <a:srgbClr val="FFFFFF"/>
+                    </a:solidFill>
+                  </a:tcPr>
+                </a:tc>
+                <a:tc>
+                  <a:txBody>
+                    <a:bodyPr wrap="square"/>
+                    <a:lstStyle/>
+                    <a:p>
+                      <a:pPr algn="l"/>
+                      <a:r>
+                        <a:rPr sz="1100" b="0" i="0">
+                          <a:solidFill>
+                            <a:srgbClr val="14303D"/>
+                          </a:solidFill>
+                        </a:rPr>
+                        <a:t>89.8 % (265 / 295 pairs), median 309 inliers</a:t>
+                      </a:r>
+                    </a:p>
+                  </a:txBody>
+                  <a:tcPr marL="54864" marR="54864" marT="18288" marB="18288" anchor="ctr">
+                    <a:solidFill>
+                      <a:srgbClr val="FFFFFF"/>
+                    </a:solidFill>
+                  </a:tcPr>
+                </a:tc>
+              </a:tr>
+              <a:tr h="256032">
+                <a:tc>
+                  <a:txBody>
+                    <a:bodyPr wrap="square"/>
+                    <a:lstStyle/>
+                    <a:p>
+                      <a:pPr algn="l"/>
+                      <a:r>
+                        <a:rPr sz="1100" b="0" i="0">
+                          <a:solidFill>
+                            <a:srgbClr val="14303D"/>
+                          </a:solidFill>
+                        </a:rPr>
+                        <a:t>longest unbroken registered run</a:t>
+                      </a:r>
+                    </a:p>
+                  </a:txBody>
+                  <a:tcPr marL="54864" marR="54864" marT="18288" marB="18288" anchor="ctr">
+                    <a:solidFill>
+                      <a:srgbClr val="FFFFFF"/>
+                    </a:solidFill>
+                  </a:tcPr>
+                </a:tc>
+                <a:tc>
+                  <a:txBody>
+                    <a:bodyPr wrap="square"/>
+                    <a:lstStyle/>
+                    <a:p>
+                      <a:pPr algn="l"/>
+                      <a:r>
+                        <a:rPr sz="1100" b="0" i="0">
+                          <a:solidFill>
+                            <a:srgbClr val="14303D"/>
+                          </a:solidFill>
+                        </a:rPr>
+                        <a:t>119 pairs (mean 48)</a:t>
+                      </a:r>
+                    </a:p>
+                  </a:txBody>
+                  <a:tcPr marL="54864" marR="54864" marT="18288" marB="18288" anchor="ctr">
+                    <a:solidFill>
+                      <a:srgbClr val="FFFFFF"/>
+                    </a:solidFill>
+                  </a:tcPr>
+                </a:tc>
+              </a:tr>
+              <a:tr h="256032">
+                <a:tc>
+                  <a:txBody>
+                    <a:bodyPr wrap="square"/>
+                    <a:lstStyle/>
+                    <a:p>
+                      <a:pPr algn="l"/>
+                      <a:r>
+                        <a:rPr sz="1100" b="0" i="0">
+                          <a:solidFill>
+                            <a:srgbClr val="14303D"/>
+                          </a:solidFill>
+                        </a:rPr>
+                        <a:t>quality != ok</a:t>
+                      </a:r>
+                    </a:p>
+                  </a:txBody>
+                  <a:tcPr marL="54864" marR="54864" marT="18288" marB="18288" anchor="ctr">
+                    <a:solidFill>
+                      <a:srgbClr val="FFFFFF"/>
+                    </a:solidFill>
+                  </a:tcPr>
+                </a:tc>
+                <a:tc>
+                  <a:txBody>
+                    <a:bodyPr wrap="square"/>
+                    <a:lstStyle/>
+                    <a:p>
+                      <a:pPr algn="l"/>
+                      <a:r>
+                        <a:rPr sz="1100" b="0" i="0">
+                          <a:solidFill>
+                            <a:srgbClr val="14303D"/>
+                          </a:solidFill>
+                        </a:rPr>
+                        <a:t>2.0 % (6 frames, all insufficient_coverage)</a:t>
+                      </a:r>
+                    </a:p>
+                  </a:txBody>
+                  <a:tcPr marL="54864" marR="54864" marT="18288" marB="18288" anchor="ctr">
+                    <a:solidFill>
+                      <a:srgbClr val="FFFFFF"/>
+                    </a:solidFill>
+                  </a:tcPr>
+                </a:tc>
+              </a:tr>
+              <a:tr h="256032">
+                <a:tc>
+                  <a:txBody>
+                    <a:bodyPr wrap="square"/>
+                    <a:lstStyle/>
+                    <a:p>
+                      <a:pPr algn="l"/>
+                      <a:r>
+                        <a:rPr sz="1100" b="0" i="0">
+                          <a:solidFill>
+                            <a:srgbClr val="14303D"/>
+                          </a:solidFill>
+                        </a:rPr>
+                        <a:t>service altitude vs Altimeter</a:t>
+                      </a:r>
+                    </a:p>
+                  </a:txBody>
+                  <a:tcPr marL="54864" marR="54864" marT="18288" marB="18288" anchor="ctr">
+                    <a:solidFill>
+                      <a:srgbClr val="FFFFFF"/>
+                    </a:solidFill>
+                  </a:tcPr>
+                </a:tc>
+                <a:tc>
+                  <a:txBody>
+                    <a:bodyPr wrap="square"/>
+                    <a:lstStyle/>
+                    <a:p>
+                      <a:pPr algn="l"/>
+                      <a:r>
+                        <a:rPr sz="1100" b="0" i="0">
+                          <a:solidFill>
+                            <a:srgbClr val="14303D"/>
+                          </a:solidFill>
+                        </a:rPr>
+                        <a:t>median 37 mm</a:t>
+                      </a:r>
+                    </a:p>
+                  </a:txBody>
+                  <a:tcPr marL="54864" marR="54864" marT="18288" marB="18288" anchor="ctr">
+                    <a:solidFill>
+                      <a:srgbClr val="FFFFFF"/>
+                    </a:solidFill>
+                  </a:tcPr>
+                </a:tc>
+              </a:tr>
+              <a:tr h="256032">
+                <a:tc>
+                  <a:txBody>
+                    <a:bodyPr wrap="square"/>
+                    <a:lstStyle/>
+                    <a:p>
+                      <a:pPr algn="l"/>
+                      <a:r>
+                        <a:rPr sz="1100" b="1" i="0">
+                          <a:solidFill>
+                            <a:srgbClr val="14303D"/>
+                          </a:solidFill>
+                        </a:rPr>
+                        <a:t>seam error, pixel-linked</a:t>
+                      </a:r>
+                    </a:p>
+                  </a:txBody>
+                  <a:tcPr marL="54864" marR="54864" marT="18288" marB="18288" anchor="ctr">
+                    <a:solidFill>
+                      <a:srgbClr val="EAF6FF"/>
+                    </a:solidFill>
+                  </a:tcPr>
+                </a:tc>
+                <a:tc>
+                  <a:txBody>
+                    <a:bodyPr wrap="square"/>
+                    <a:lstStyle/>
+                    <a:p>
+                      <a:pPr algn="l"/>
+                      <a:r>
+                        <a:rPr sz="1100" b="1" i="0">
+                          <a:solidFill>
+                            <a:srgbClr val="14303D"/>
+                          </a:solidFill>
+                        </a:rPr>
+                        <a:t>62.0 mm → 13.7 mm after levelling</a:t>
+                      </a:r>
+                    </a:p>
+                  </a:txBody>
+                  <a:tcPr marL="54864" marR="54864" marT="18288" marB="18288" anchor="ctr">
+                    <a:solidFill>
+                      <a:srgbClr val="EAF6FF"/>
+                    </a:solidFill>
+                  </a:tcPr>
+                </a:tc>
+              </a:tr>
+              <a:tr h="256032">
+                <a:tc>
+                  <a:txBody>
+                    <a:bodyPr wrap="square"/>
+                    <a:lstStyle/>
+                    <a:p>
+                      <a:pPr algn="l"/>
+                      <a:r>
+                        <a:rPr sz="1100" b="0" i="0">
+                          <a:solidFill>
+                            <a:srgbClr val="14303D"/>
+                          </a:solidFill>
+                        </a:rPr>
+                        <a:t>seam error, nav-bridged</a:t>
+                      </a:r>
+                    </a:p>
+                  </a:txBody>
+                  <a:tcPr marL="54864" marR="54864" marT="18288" marB="18288" anchor="ctr">
+                    <a:solidFill>
+                      <a:srgbClr val="FFFFFF"/>
+                    </a:solidFill>
+                  </a:tcPr>
+                </a:tc>
+                <a:tc>
+                  <a:txBody>
+                    <a:bodyPr wrap="square"/>
+                    <a:lstStyle/>
+                    <a:p>
+                      <a:pPr algn="l"/>
+                      <a:r>
+                        <a:rPr sz="1100" b="0" i="0">
+                          <a:solidFill>
+                            <a:srgbClr val="14303D"/>
+                          </a:solidFill>
+                        </a:rPr>
+                        <a:t>235.5 mm → 119.3 mm — 8.7× worse</a:t>
+                      </a:r>
+                    </a:p>
+                  </a:txBody>
+                  <a:tcPr marL="54864" marR="54864" marT="18288" marB="18288" anchor="ctr">
+                    <a:solidFill>
+                      <a:srgbClr val="FFFFFF"/>
+                    </a:solidFill>
+                  </a:tcPr>
+                </a:tc>
+              </a:tr>
+            </a:tbl>
+          </a:graphicData>
+        </a:graphic>
+      </p:graphicFrame>
+      <p:sp>
+        <p:nvSpPr>
+          <p:cNvPr id="6" name="TextBox 5"/>
+          <p:cNvSpPr txBox="1"/>
+          <p:nvPr/>
+        </p:nvSpPr>
+        <p:spPr>
+          <a:xfrm>
+            <a:off x="640080" y="3794760"/>
+            <a:ext cx="10972800" cy="2697480"/>
+          </a:xfrm>
+          <a:prstGeom prst="rect">
+            <a:avLst/>
+          </a:prstGeom>
+          <a:noFill/>
+        </p:spPr>
+        <p:txBody>
+          <a:bodyPr wrap="square">
+            <a:spAutoFit/>
+          </a:bodyPr>
+          <a:lstStyle/>
+          <a:p>
+            <a:pPr algn="l">
+              <a:spcAft>
+                <a:spcPts val="600"/>
+              </a:spcAft>
+            </a:pPr>
+            <a:r>
+              <a:rPr sz="1400" b="0" i="0">
+                <a:solidFill>
+                  <a:srgbClr val="14303D"/>
+                </a:solidFill>
+              </a:rPr>
+              <a:t>•  The vertical error was the depth sensor, not the stereo. V_Depth is quantized to</a:t>
+            </a:r>
+          </a:p>
+          <a:p>
+            <a:pPr algn="l" lvl="1">
+              <a:spcAft>
+                <a:spcPts val="600"/>
+              </a:spcAft>
+            </a:pPr>
+            <a:r>
+              <a:rPr sz="1200" b="0" i="0">
+                <a:solidFill>
+                  <a:srgbClr val="5B6B76"/>
+                </a:solidFill>
+              </a:rPr>
+              <a:t>–  10 mm and steps with σ = 82 mm — essentially the whole per-frame scatter.</a:t>
+            </a:r>
+          </a:p>
+          <a:p>
+            <a:pPr algn="l" lvl="1">
+              <a:spcAft>
+                <a:spcPts val="600"/>
+              </a:spcAft>
+            </a:pPr>
+            <a:r>
+              <a:rPr sz="1200" b="0" i="0">
+                <a:solidFill>
+                  <a:srgbClr val="5B6B76"/>
+                </a:solidFill>
+              </a:rPr>
+              <a:t>–  Levelling solves per-frame offsets from overlap medians (robust IRLS, lag-1 and</a:t>
+            </a:r>
+          </a:p>
+          <a:p>
+            <a:pPr algn="l" lvl="1">
+              <a:spcAft>
+                <a:spcPts val="600"/>
+              </a:spcAft>
+            </a:pPr>
+            <a:r>
+              <a:rPr sz="1200" b="0" i="0">
+                <a:solidFill>
+                  <a:srgbClr val="5B6B76"/>
+                </a:solidFill>
+              </a:rPr>
+              <a:t>–  lag-2 pairs for loop closure), keeping the datum with the vehicle</a:t>
+            </a:r>
+          </a:p>
+          <a:p>
+            <a:pPr algn="l">
+              <a:spcAft>
+                <a:spcPts val="600"/>
+              </a:spcAft>
+            </a:pPr>
+            <a:r>
+              <a:rPr sz="1400" b="0" i="0">
+                <a:solidFill>
+                  <a:srgbClr val="14303D"/>
+                </a:solidFill>
+              </a:rPr>
+              <a:t>•  The trade, stated: seams 4.5× better, but the 1 m profile agrees LESS with the</a:t>
+            </a:r>
+          </a:p>
+          <a:p>
+            <a:pPr algn="l" lvl="1">
+              <a:spcAft>
+                <a:spcPts val="600"/>
+              </a:spcAft>
+            </a:pPr>
+            <a:r>
+              <a:rPr sz="1200" b="0" i="0">
+                <a:solidFill>
+                  <a:srgbClr val="5B6B76"/>
+                </a:solidFill>
+              </a:rPr>
+              <a:t>–  MBES (0.147 → 0.185 m). Some large corrections over-fit bad overlaps</a:t>
+            </a:r>
+          </a:p>
+          <a:p>
+            <a:pPr algn="l">
+              <a:spcAft>
+                <a:spcPts val="600"/>
+              </a:spcAft>
+            </a:pPr>
+            <a:r>
+              <a:rPr sz="1400" b="0" i="0">
+                <a:solidFill>
+                  <a:srgbClr val="14303D"/>
+                </a:solidFill>
+              </a:rPr>
+              <a:t>•  Independent checks: chain azimuth 273.1° vs nav 273.2°; focal length calibrated</a:t>
+            </a:r>
+          </a:p>
+          <a:p>
+            <a:pPr algn="l" lvl="1">
+              <a:spcAft>
+                <a:spcPts val="600"/>
+              </a:spcAft>
+            </a:pPr>
+            <a:r>
+              <a:rPr sz="1200" b="0" i="0">
+                <a:solidFill>
+                  <a:srgbClr val="5B6B76"/>
+                </a:solidFill>
+              </a:rPr>
+              <a:t>–  against nav displacement 2507 px vs nominal 2480.28 — ratio 1.011</a:t>
+            </a:r>
+          </a:p>
+        </p:txBody>
+      </p:sp>
+    </p:spTree>
+  </p:cSld>
+  <p:clrMapOvr>
+    <a:masterClrMapping/>
+  </p:clrMapOvr>
+</p:sld>
+</file>
+
+<file path=ppt/slides/slide22.xml><?xml version="1.0" encoding="utf-8"?>
+<p:sld xmlns:a="http://schemas.openxmlformats.org/drawingml/2006/main" xmlns:p="http://schemas.openxmlformats.org/presentationml/2006/main" xmlns:r="http://schemas.openxmlformats.org/officeDocument/2006/relationships">
+  <p:cSld>
+    <p:spTree>
+      <p:nvGrpSpPr>
+        <p:cNvPr id="1" name=""/>
+        <p:cNvGrpSpPr/>
+        <p:nvPr/>
+      </p:nvGrpSpPr>
+      <p:grpSpPr/>
+      <p:sp>
+        <p:nvSpPr>
+          <p:cNvPr id="2" name="TextBox 1"/>
+          <p:cNvSpPr txBox="1"/>
+          <p:nvPr/>
+        </p:nvSpPr>
+        <p:spPr>
+          <a:xfrm>
+            <a:off x="502920" y="320040"/>
+            <a:ext cx="11155680" cy="914400"/>
+          </a:xfrm>
+          <a:prstGeom prst="rect">
+            <a:avLst/>
+          </a:prstGeom>
+          <a:noFill/>
+        </p:spPr>
+        <p:txBody>
+          <a:bodyPr wrap="square">
+            <a:spAutoFit/>
+          </a:bodyPr>
+          <a:lstStyle/>
+          <a:p>
+            <a:pPr algn="l"/>
+            <a:r>
+              <a:rPr sz="3000" b="1" i="0">
+                <a:solidFill>
+                  <a:srgbClr val="1A5276"/>
+                </a:solidFill>
+              </a:rPr>
+              <a:t>Does the power law cross the gap?</a:t>
+            </a:r>
+          </a:p>
+        </p:txBody>
+      </p:sp>
+      <p:sp>
+        <p:nvSpPr>
+          <p:cNvPr id="3" name="TextBox 2"/>
+          <p:cNvSpPr txBox="1"/>
+          <p:nvPr/>
+        </p:nvSpPr>
+        <p:spPr>
+          <a:xfrm>
+            <a:off x="10058400" y="457200"/>
+            <a:ext cx="1737360" cy="457200"/>
+          </a:xfrm>
+          <a:prstGeom prst="rect">
+            <a:avLst/>
+          </a:prstGeom>
+          <a:noFill/>
+        </p:spPr>
+        <p:txBody>
+          <a:bodyPr wrap="none">
+            <a:spAutoFit/>
+          </a:bodyPr>
+          <a:lstStyle/>
+          <a:p>
+            <a:pPr algn="r"/>
+            <a:r>
+              <a:rPr sz="1100" b="1" i="0">
+                <a:solidFill>
+                  <a:srgbClr val="2E86C1"/>
+                </a:solidFill>
+              </a:rPr>
+              <a:t>SUGGESTIVE, NOT SETTLED</a:t>
+            </a:r>
+          </a:p>
+        </p:txBody>
+      </p:sp>
+      <p:sp>
+        <p:nvSpPr>
+          <p:cNvPr id="4" name="TextBox 3"/>
           <p:cNvSpPr txBox="1"/>
           <p:nvPr/>
         </p:nvSpPr>
@@ -5120,12 +7506,42 @@
               </a:spcAft>
             </a:pPr>
             <a:r>
-              <a:rPr sz="1800" b="0" i="0">
+              <a:rPr sz="1300" b="0" i="0">
                 <a:solidFill>
                   <a:srgbClr val="14303D"/>
                 </a:solidFill>
               </a:rPr>
-              <a:t>•  ML-assisted annotation — pre-populate boxes; review instead of draw</a:t>
+              <a:t>•  The per-frame fit is 2-D and isotropic; a ribbon profile measures the 1-D</a:t>
+            </a:r>
+          </a:p>
+          <a:p>
+            <a:pPr algn="l" lvl="1">
+              <a:spcAft>
+                <a:spcPts val="600"/>
+              </a:spcAft>
+            </a:pPr>
+            <a:r>
+              <a:rPr sz="1150" b="0" i="0">
+                <a:solidFill>
+                  <a:srgbClr val="5B6B76"/>
+                </a:solidFill>
+              </a:rPr>
+              <a:t>–  spectrum. Integrating out the cross-track wavenumber gives a closed form with</a:t>
+            </a:r>
+          </a:p>
+          <a:p>
+            <a:pPr algn="l" lvl="1">
+              <a:spcAft>
+                <a:spcPts val="600"/>
+              </a:spcAft>
+            </a:pPr>
+            <a:r>
+              <a:rPr sz="1150" b="0" i="0">
+                <a:solidFill>
+                  <a:srgbClr val="5B6B76"/>
+                </a:solidFill>
+              </a:rPr>
+              <a:t>–  NO free parameter — so γ₁ = γ₂ − 1 and the amplitude are both predicted</a:t>
             </a:r>
           </a:p>
           <a:p>
@@ -5135,12 +7551,27 @@
               </a:spcAft>
             </a:pPr>
             <a:r>
-              <a:rPr sz="1800" b="0" i="0">
+              <a:rPr sz="1300" b="0" i="0">
                 <a:solidFill>
                   <a:srgbClr val="14303D"/>
                 </a:solidFill>
               </a:rPr>
-              <a:t>•  More backscatter analytics &amp; calibration; multi-file mosaics</a:t>
+              <a:t>•  Measured in the 1.2–3 m band: 9.45× (+9.8 dB) more power than the per-frame law</a:t>
+            </a:r>
+          </a:p>
+          <a:p>
+            <a:pPr algn="l" lvl="1">
+              <a:spcAft>
+                <a:spcPts val="600"/>
+              </a:spcAft>
+            </a:pPr>
+            <a:r>
+              <a:rPr sz="1150" b="0" i="0">
+                <a:solidFill>
+                  <a:srgbClr val="5B6B76"/>
+                </a:solidFill>
+              </a:rPr>
+              <a:t>–  predicts, fitted γ₁ = 2.29 ± 1.56 against a predicted 1.97</a:t>
             </a:r>
           </a:p>
           <a:p>
@@ -5150,12 +7581,27 @@
               </a:spcAft>
             </a:pPr>
             <a:r>
-              <a:rPr sz="1800" b="0" i="0">
+              <a:rPr sz="1300" b="0" i="0">
                 <a:solidFill>
                   <a:srgbClr val="14303D"/>
                 </a:solidFill>
               </a:rPr>
-              <a:t>•  Scale to very large soundings (10⁷+ rows) — Arrow-native, optional GPU</a:t>
+              <a:t>•  The slope is unconstrained. ±1.56 spans every plausible exponent — the band is a</a:t>
+            </a:r>
+          </a:p>
+          <a:p>
+            <a:pPr algn="l" lvl="1">
+              <a:spcAft>
+                <a:spcPts val="600"/>
+              </a:spcAft>
+            </a:pPr>
+            <a:r>
+              <a:rPr sz="1150" b="0" i="0">
+                <a:solidFill>
+                  <a:srgbClr val="5B6B76"/>
+                </a:solidFill>
+              </a:rPr>
+              <a:t>–  third of a decade, all a 145 m ribbon can offer</a:t>
             </a:r>
           </a:p>
           <a:p>
@@ -5165,12 +7611,42 @@
               </a:spcAft>
             </a:pPr>
             <a:r>
-              <a:rPr sz="1800" b="0" i="0">
+              <a:rPr sz="1300" b="0" i="0">
                 <a:solidFill>
                   <a:srgbClr val="14303D"/>
                 </a:solidFill>
               </a:rPr>
-              <a:t>•  Richer GRASS recipe presets; 'analysis as a saved session'</a:t>
+              <a:t>•  The amplitude excess is only 1.7× above the ribbon's own noise floor: a per-frame</a:t>
+            </a:r>
+          </a:p>
+          <a:p>
+            <a:pPr algn="l" lvl="1">
+              <a:spcAft>
+                <a:spcPts val="600"/>
+              </a:spcAft>
+            </a:pPr>
+            <a:r>
+              <a:rPr sz="1150" b="0" i="0">
+                <a:solidFill>
+                  <a:srgbClr val="5B6B76"/>
+                </a:solidFill>
+              </a:rPr>
+              <a:t>–  vertical error held across each frame and changing every 0.49 m puts a nearly</a:t>
+            </a:r>
+          </a:p>
+          <a:p>
+            <a:pPr algn="l" lvl="1">
+              <a:spcAft>
+                <a:spcPts val="600"/>
+              </a:spcAft>
+            </a:pPr>
+            <a:r>
+              <a:rPr sz="1150" b="0" i="0">
+                <a:solidFill>
+                  <a:srgbClr val="5B6B76"/>
+                </a:solidFill>
+              </a:rPr>
+              <a:t>–  FLAT spectrum across exactly this band (14× at the robust σ = 21 mm)</a:t>
             </a:r>
           </a:p>
           <a:p>
@@ -5180,12 +7656,27 @@
               </a:spcAft>
             </a:pPr>
             <a:r>
-              <a:rPr sz="1800" b="0" i="0">
+              <a:rPr sz="1300" b="0" i="0">
                 <a:solidFill>
                   <a:srgbClr val="14303D"/>
                 </a:solidFill>
               </a:rPr>
-              <a:t>•  Multi-user / shared cloud sessions; signed report bundles</a:t>
+              <a:t>•  What would settle it is now a number: per-frame vertical placement must reach</a:t>
+            </a:r>
+          </a:p>
+          <a:p>
+            <a:pPr algn="l" lvl="1">
+              <a:spcAft>
+                <a:spcPts val="600"/>
+              </a:spcAft>
+            </a:pPr>
+            <a:r>
+              <a:rPr sz="1150" b="0" i="0">
+                <a:solidFill>
+                  <a:srgbClr val="5B6B76"/>
+                </a:solidFill>
+              </a:rPr>
+              <a:t>–  ≈ 6 mm, from 60 mm — a vertical bundle adjustment</a:t>
             </a:r>
           </a:p>
           <a:p>
@@ -5195,12 +7686,72 @@
               </a:spcAft>
             </a:pPr>
             <a:r>
-              <a:rPr sz="1800" b="0" i="0">
+              <a:rPr sz="1300" b="0" i="0">
                 <a:solidFill>
                   <a:srgbClr val="14303D"/>
                 </a:solidFill>
               </a:rPr>
-              <a:t>•  More survey-log adapters out of the box; turnkey installer + CI</a:t>
+              <a:t>•  Supporting: MBES along-track γ₁ = 3.60 ± 0.16 (γ₂ ≈ 4.60) over 2–40 m, far</a:t>
+            </a:r>
+          </a:p>
+          <a:p>
+            <a:pPr algn="l" lvl="1">
+              <a:spcAft>
+                <a:spcPts val="600"/>
+              </a:spcAft>
+            </a:pPr>
+            <a:r>
+              <a:rPr sz="1150" b="0" i="0">
+                <a:solidFill>
+                  <a:srgbClr val="5B6B76"/>
+                </a:solidFill>
+              </a:rPr>
+              <a:t>–  steeper than the per-frame 2.97, with the ribbon's 3.29 BETWEEN them — the shape</a:t>
+            </a:r>
+          </a:p>
+          <a:p>
+            <a:pPr algn="l" lvl="1">
+              <a:spcAft>
+                <a:spcPts val="600"/>
+              </a:spcAft>
+            </a:pPr>
+            <a:r>
+              <a:rPr sz="1150" b="0" i="0">
+                <a:solidFill>
+                  <a:srgbClr val="5B6B76"/>
+                </a:solidFill>
+              </a:rPr>
+              <a:t>–  of a gradual break, at an error bar that makes it a remark</a:t>
+            </a:r>
+          </a:p>
+          <a:p>
+            <a:pPr algn="l">
+              <a:spcAft>
+                <a:spcPts val="600"/>
+              </a:spcAft>
+            </a:pPr>
+            <a:r>
+              <a:rPr sz="1300" b="0" i="0">
+                <a:solidFill>
+                  <a:srgbClr val="14303D"/>
+                </a:solidFill>
+              </a:rPr>
+              <a:t>•  And the ribbon does not beat the altimeter on vertical accuracy (0.185 m vs</a:t>
+            </a:r>
+          </a:p>
+          <a:p>
+            <a:pPr algn="l" lvl="1">
+              <a:spcAft>
+                <a:spcPts val="600"/>
+              </a:spcAft>
+            </a:pPr>
+            <a:r>
+              <a:rPr sz="1150" b="0" i="0">
+                <a:solidFill>
+                  <a:srgbClr val="5B6B76"/>
+                </a:solidFill>
+              </a:rPr>
+              <a:t>–  0.115 m median |dz| against the MBES). It adds texture, not depth</a:t>
             </a:r>
           </a:p>
         </p:txBody>
@@ -5213,7 +7764,85 @@
 </p:sld>
 </file>
 
-<file path=ppt/slides/slide19.xml><?xml version="1.0" encoding="utf-8"?>
+<file path=ppt/slides/slide23.xml><?xml version="1.0" encoding="utf-8"?>
+<p:sld xmlns:a="http://schemas.openxmlformats.org/drawingml/2006/main" xmlns:p="http://schemas.openxmlformats.org/presentationml/2006/main" xmlns:r="http://schemas.openxmlformats.org/officeDocument/2006/relationships">
+  <p:cSld>
+    <p:spTree>
+      <p:nvGrpSpPr>
+        <p:cNvPr id="1" name=""/>
+        <p:cNvGrpSpPr/>
+        <p:nvPr/>
+      </p:nvGrpSpPr>
+      <p:grpSpPr/>
+      <p:sp>
+        <p:nvSpPr>
+          <p:cNvPr id="2" name="TextBox 1"/>
+          <p:cNvSpPr txBox="1"/>
+          <p:nvPr/>
+        </p:nvSpPr>
+        <p:spPr>
+          <a:xfrm>
+            <a:off x="914400" y="2194560"/>
+            <a:ext cx="10332720" cy="2560320"/>
+          </a:xfrm>
+          <a:prstGeom prst="rect">
+            <a:avLst/>
+          </a:prstGeom>
+          <a:noFill/>
+        </p:spPr>
+        <p:txBody>
+          <a:bodyPr wrap="square">
+            <a:spAutoFit/>
+          </a:bodyPr>
+          <a:lstStyle/>
+          <a:p>
+            <a:pPr algn="ctr"/>
+            <a:r>
+              <a:rPr sz="5000" b="1" i="0">
+                <a:solidFill>
+                  <a:srgbClr val="1A5276"/>
+                </a:solidFill>
+              </a:rPr>
+              <a:t>Act III</a:t>
+            </a:r>
+          </a:p>
+          <a:p>
+            <a:pPr algn="ctr">
+              <a:spcBef>
+                <a:spcPts val="800"/>
+              </a:spcBef>
+            </a:pPr>
+            <a:r>
+              <a:rPr sz="2600" b="1" i="0">
+                <a:solidFill>
+                  <a:srgbClr val="0E6E6E"/>
+                </a:solidFill>
+              </a:rPr>
+              <a:t>The science it made possible</a:t>
+            </a:r>
+          </a:p>
+          <a:p>
+            <a:pPr algn="ctr"/>
+            <a:r>
+              <a:rPr sz="1400" b="0" i="0">
+                <a:solidFill>
+                  <a:srgbClr val="5B6B76"/>
+                </a:solidFill>
+              </a:rPr>
+              <a:t>HRS1508 — does stereo roughness add anything to acoustics?</a:t>
+            </a:r>
+          </a:p>
+        </p:txBody>
+      </p:sp>
+    </p:spTree>
+  </p:cSld>
+  <p:clrMapOvr>
+    <a:masterClrMapping/>
+  </p:clrMapOvr>
+</p:sld>
+</file>
+
+<file path=ppt/slides/slide24.xml><?xml version="1.0" encoding="utf-8"?>
 <p:sld xmlns:a="http://schemas.openxmlformats.org/drawingml/2006/main" xmlns:p="http://schemas.openxmlformats.org/presentationml/2006/main" xmlns:r="http://schemas.openxmlformats.org/officeDocument/2006/relationships">
   <p:cSld>
     <p:spTree>
@@ -5252,7 +7881,1905 @@
                   <a:srgbClr val="1A5276"/>
                 </a:solidFill>
               </a:rPr>
-              <a:t>Would you use it?</a:t>
+              <a:t>HRS1508 — the question and the setup</a:t>
+            </a:r>
+          </a:p>
+        </p:txBody>
+      </p:sp>
+      <p:sp>
+        <p:nvSpPr>
+          <p:cNvPr id="3" name="TextBox 2"/>
+          <p:cNvSpPr txBox="1"/>
+          <p:nvPr/>
+        </p:nvSpPr>
+        <p:spPr>
+          <a:xfrm>
+            <a:off x="640080" y="1371600"/>
+            <a:ext cx="10972800" cy="731520"/>
+          </a:xfrm>
+          <a:prstGeom prst="rect">
+            <a:avLst/>
+          </a:prstGeom>
+          <a:noFill/>
+        </p:spPr>
+        <p:txBody>
+          <a:bodyPr wrap="square">
+            <a:spAutoFit/>
+          </a:bodyPr>
+          <a:lstStyle/>
+          <a:p>
+            <a:pPr algn="l"/>
+            <a:r>
+              <a:rPr sz="1400" b="0" i="0">
+                <a:solidFill>
+                  <a:srgbClr val="5B6B76"/>
+                </a:solidFill>
+              </a:rPr>
+              <a:t>Does optical roughness carry substrate information that backscatter does not? A binary problem — Substrate A vs Substrate E — on the HRS1508 survey.</a:t>
+            </a:r>
+          </a:p>
+        </p:txBody>
+      </p:sp>
+      <p:graphicFrame>
+        <p:nvGraphicFramePr>
+          <p:cNvPr id="4" name="Table 3"/>
+          <p:cNvGraphicFramePr>
+            <a:graphicFrameLocks noGrp="1"/>
+          </p:cNvGraphicFramePr>
+          <p:nvPr/>
+        </p:nvGraphicFramePr>
+        <p:xfrm>
+          <a:off x="640080" y="2057400"/>
+          <a:ext cx="10881360" cy="1536192"/>
+        </p:xfrm>
+        <a:graphic>
+          <a:graphicData uri="http://schemas.openxmlformats.org/drawingml/2006/table">
+            <a:tbl>
+              <a:tblPr firstRow="1" bandRow="1">
+                <a:tableStyleId>{5C22544A-7EE6-4342-B048-85BDC9FD1C3A}</a:tableStyleId>
+              </a:tblPr>
+              <a:tblGrid>
+                <a:gridCol w="2176272"/>
+                <a:gridCol w="8705088"/>
+              </a:tblGrid>
+              <a:tr h="256032">
+                <a:tc>
+                  <a:txBody>
+                    <a:bodyPr wrap="square"/>
+                    <a:lstStyle/>
+                    <a:p>
+                      <a:pPr algn="l"/>
+                      <a:r>
+                        <a:rPr sz="1100" b="1" i="0">
+                          <a:solidFill>
+                            <a:srgbClr val="FFFFFF"/>
+                          </a:solidFill>
+                        </a:rPr>
+                        <a:t>stream</a:t>
+                      </a:r>
+                    </a:p>
+                  </a:txBody>
+                  <a:tcPr marL="54864" marR="54864" marT="18288" marB="18288" anchor="ctr">
+                    <a:solidFill>
+                      <a:srgbClr val="1A5276"/>
+                    </a:solidFill>
+                  </a:tcPr>
+                </a:tc>
+                <a:tc>
+                  <a:txBody>
+                    <a:bodyPr wrap="square"/>
+                    <a:lstStyle/>
+                    <a:p>
+                      <a:pPr algn="l"/>
+                      <a:r>
+                        <a:rPr sz="1100" b="1" i="0">
+                          <a:solidFill>
+                            <a:srgbClr val="FFFFFF"/>
+                          </a:solidFill>
+                        </a:rPr>
+                        <a:t>what went in</a:t>
+                      </a:r>
+                    </a:p>
+                  </a:txBody>
+                  <a:tcPr marL="54864" marR="54864" marT="18288" marB="18288" anchor="ctr">
+                    <a:solidFill>
+                      <a:srgbClr val="1A5276"/>
+                    </a:solidFill>
+                  </a:tcPr>
+                </a:tc>
+              </a:tr>
+              <a:tr h="256032">
+                <a:tc>
+                  <a:txBody>
+                    <a:bodyPr wrap="square"/>
+                    <a:lstStyle/>
+                    <a:p>
+                      <a:pPr algn="l"/>
+                      <a:r>
+                        <a:rPr sz="1100" b="0" i="0">
+                          <a:solidFill>
+                            <a:srgbClr val="14303D"/>
+                          </a:solidFill>
+                        </a:rPr>
+                        <a:t>MBES beams</a:t>
+                      </a:r>
+                    </a:p>
+                  </a:txBody>
+                  <a:tcPr marL="54864" marR="54864" marT="18288" marB="18288" anchor="ctr">
+                    <a:solidFill>
+                      <a:srgbClr val="FFFFFF"/>
+                    </a:solidFill>
+                  </a:tcPr>
+                </a:tc>
+                <a:tc>
+                  <a:txBody>
+                    <a:bodyPr wrap="square"/>
+                    <a:lstStyle/>
+                    <a:p>
+                      <a:pPr algn="l"/>
+                      <a:r>
+                        <a:rPr sz="1100" b="0" i="0">
+                          <a:solidFill>
+                            <a:srgbClr val="14303D"/>
+                          </a:solidFill>
+                        </a:rPr>
+                        <a:t>29 027 174 beams, all 512 formed beams/ping, full angular range</a:t>
+                      </a:r>
+                    </a:p>
+                  </a:txBody>
+                  <a:tcPr marL="54864" marR="54864" marT="18288" marB="18288" anchor="ctr">
+                    <a:solidFill>
+                      <a:srgbClr val="FFFFFF"/>
+                    </a:solidFill>
+                  </a:tcPr>
+                </a:tc>
+              </a:tr>
+              <a:tr h="256032">
+                <a:tc>
+                  <a:txBody>
+                    <a:bodyPr wrap="square"/>
+                    <a:lstStyle/>
+                    <a:p>
+                      <a:pPr algn="l"/>
+                      <a:r>
+                        <a:rPr sz="1100" b="0" i="0">
+                          <a:solidFill>
+                            <a:srgbClr val="14303D"/>
+                          </a:solidFill>
+                        </a:rPr>
+                        <a:t>cells</a:t>
+                      </a:r>
+                    </a:p>
+                  </a:txBody>
+                  <a:tcPr marL="54864" marR="54864" marT="18288" marB="18288" anchor="ctr">
+                    <a:solidFill>
+                      <a:srgbClr val="FFFFFF"/>
+                    </a:solidFill>
+                  </a:tcPr>
+                </a:tc>
+                <a:tc>
+                  <a:txBody>
+                    <a:bodyPr wrap="square"/>
+                    <a:lstStyle/>
+                    <a:p>
+                      <a:pPr algn="l"/>
+                      <a:r>
+                        <a:rPr sz="1100" b="0" i="0">
+                          <a:solidFill>
+                            <a:srgbClr val="14303D"/>
+                          </a:solidFill>
+                        </a:rPr>
+                        <a:t>25 m grid → 2318 ARA cells (median 9846 beams/cell, 6 angle bins)</a:t>
+                      </a:r>
+                    </a:p>
+                  </a:txBody>
+                  <a:tcPr marL="54864" marR="54864" marT="18288" marB="18288" anchor="ctr">
+                    <a:solidFill>
+                      <a:srgbClr val="FFFFFF"/>
+                    </a:solidFill>
+                  </a:tcPr>
+                </a:tc>
+              </a:tr>
+              <a:tr h="256032">
+                <a:tc>
+                  <a:txBody>
+                    <a:bodyPr wrap="square"/>
+                    <a:lstStyle/>
+                    <a:p>
+                      <a:pPr algn="l"/>
+                      <a:r>
+                        <a:rPr sz="1100" b="0" i="0">
+                          <a:solidFill>
+                            <a:srgbClr val="14303D"/>
+                          </a:solidFill>
+                        </a:rPr>
+                        <a:t>optical nav</a:t>
+                      </a:r>
+                    </a:p>
+                  </a:txBody>
+                  <a:tcPr marL="54864" marR="54864" marT="18288" marB="18288" anchor="ctr">
+                    <a:solidFill>
+                      <a:srgbClr val="FFFFFF"/>
+                    </a:solidFill>
+                  </a:tcPr>
+                </a:tc>
+                <a:tc>
+                  <a:txBody>
+                    <a:bodyPr wrap="square"/>
+                    <a:lstStyle/>
+                    <a:p>
+                      <a:pPr algn="l"/>
+                      <a:r>
+                        <a:rPr sz="1100" b="0" i="0">
+                          <a:solidFill>
+                            <a:srgbClr val="14303D"/>
+                          </a:solidFill>
+                        </a:rPr>
+                        <a:t>123 394 HabCam frames, positioned by calibrated USBL</a:t>
+                      </a:r>
+                    </a:p>
+                  </a:txBody>
+                  <a:tcPr marL="54864" marR="54864" marT="18288" marB="18288" anchor="ctr">
+                    <a:solidFill>
+                      <a:srgbClr val="FFFFFF"/>
+                    </a:solidFill>
+                  </a:tcPr>
+                </a:tc>
+              </a:tr>
+              <a:tr h="256032">
+                <a:tc>
+                  <a:txBody>
+                    <a:bodyPr wrap="square"/>
+                    <a:lstStyle/>
+                    <a:p>
+                      <a:pPr algn="l"/>
+                      <a:r>
+                        <a:rPr sz="1100" b="0" i="0">
+                          <a:solidFill>
+                            <a:srgbClr val="14303D"/>
+                          </a:solidFill>
+                        </a:rPr>
+                        <a:t>stereo roughness</a:t>
+                      </a:r>
+                    </a:p>
+                  </a:txBody>
+                  <a:tcPr marL="54864" marR="54864" marT="18288" marB="18288" anchor="ctr">
+                    <a:solidFill>
+                      <a:srgbClr val="FFFFFF"/>
+                    </a:solidFill>
+                  </a:tcPr>
+                </a:tc>
+                <a:tc>
+                  <a:txBody>
+                    <a:bodyPr wrap="square"/>
+                    <a:lstStyle/>
+                    <a:p>
+                      <a:pPr algn="l"/>
+                      <a:r>
+                        <a:rPr sz="1100" b="0" i="0">
+                          <a:solidFill>
+                            <a:srgbClr val="14303D"/>
+                          </a:solidFill>
+                        </a:rPr>
+                        <a:t>12 563 per-frame records → γ₂, rugosity, anisotropy</a:t>
+                      </a:r>
+                    </a:p>
+                  </a:txBody>
+                  <a:tcPr marL="54864" marR="54864" marT="18288" marB="18288" anchor="ctr">
+                    <a:solidFill>
+                      <a:srgbClr val="FFFFFF"/>
+                    </a:solidFill>
+                  </a:tcPr>
+                </a:tc>
+              </a:tr>
+              <a:tr h="256032">
+                <a:tc>
+                  <a:txBody>
+                    <a:bodyPr wrap="square"/>
+                    <a:lstStyle/>
+                    <a:p>
+                      <a:pPr algn="l"/>
+                      <a:r>
+                        <a:rPr sz="1100" b="1" i="0">
+                          <a:solidFill>
+                            <a:srgbClr val="14303D"/>
+                          </a:solidFill>
+                        </a:rPr>
+                        <a:t>analysis set</a:t>
+                      </a:r>
+                    </a:p>
+                  </a:txBody>
+                  <a:tcPr marL="54864" marR="54864" marT="18288" marB="18288" anchor="ctr">
+                    <a:solidFill>
+                      <a:srgbClr val="EAF6FF"/>
+                    </a:solidFill>
+                  </a:tcPr>
+                </a:tc>
+                <a:tc>
+                  <a:txBody>
+                    <a:bodyPr wrap="square"/>
+                    <a:lstStyle/>
+                    <a:p>
+                      <a:pPr algn="l"/>
+                      <a:r>
+                        <a:rPr sz="1100" b="1" i="0">
+                          <a:solidFill>
+                            <a:srgbClr val="14303D"/>
+                          </a:solidFill>
+                        </a:rPr>
+                        <a:t>217 cells with a majority single-substrate label and ≥ 3 roughness frames</a:t>
+                      </a:r>
+                    </a:p>
+                  </a:txBody>
+                  <a:tcPr marL="54864" marR="54864" marT="18288" marB="18288" anchor="ctr">
+                    <a:solidFill>
+                      <a:srgbClr val="EAF6FF"/>
+                    </a:solidFill>
+                  </a:tcPr>
+                </a:tc>
+              </a:tr>
+            </a:tbl>
+          </a:graphicData>
+        </a:graphic>
+      </p:graphicFrame>
+      <p:sp>
+        <p:nvSpPr>
+          <p:cNvPr id="5" name="TextBox 4"/>
+          <p:cNvSpPr txBox="1"/>
+          <p:nvPr/>
+        </p:nvSpPr>
+        <p:spPr>
+          <a:xfrm>
+            <a:off x="640080" y="3794760"/>
+            <a:ext cx="10972800" cy="2697480"/>
+          </a:xfrm>
+          <a:prstGeom prst="rect">
+            <a:avLst/>
+          </a:prstGeom>
+          <a:noFill/>
+        </p:spPr>
+        <p:txBody>
+          <a:bodyPr wrap="square">
+            <a:spAutoFit/>
+          </a:bodyPr>
+          <a:lstStyle/>
+          <a:p>
+            <a:pPr algn="l">
+              <a:spcAft>
+                <a:spcPts val="600"/>
+              </a:spcAft>
+            </a:pPr>
+            <a:r>
+              <a:rPr sz="1400" b="0" i="0">
+                <a:solidFill>
+                  <a:srgbClr val="14303D"/>
+                </a:solidFill>
+              </a:rPr>
+              <a:t>•  7 ARA descriptors (6 × 10° angle bins + slope), per-line normalised so the</a:t>
+            </a:r>
+          </a:p>
+          <a:p>
+            <a:pPr algn="l" lvl="1">
+              <a:spcAft>
+                <a:spcPts val="600"/>
+              </a:spcAft>
+            </a:pPr>
+            <a:r>
+              <a:rPr sz="1200" b="0" i="0">
+                <a:solidFill>
+                  <a:srgbClr val="5B6B76"/>
+                </a:solidFill>
+              </a:rPr>
+              <a:t>–  unknown source level cancels, plus 3 roughness features</a:t>
+            </a:r>
+          </a:p>
+          <a:p>
+            <a:pPr algn="l">
+              <a:spcAft>
+                <a:spcPts val="600"/>
+              </a:spcAft>
+            </a:pPr>
+            <a:r>
+              <a:rPr sz="1400" b="0" i="0">
+                <a:solidFill>
+                  <a:srgbClr val="14303D"/>
+                </a:solidFill>
+              </a:rPr>
+              <a:t>•  Random forest, 5-fold spatially blocked CV on 200 m blocks (33 blocks); folds</a:t>
+            </a:r>
+          </a:p>
+          <a:p>
+            <a:pPr algn="l" lvl="1">
+              <a:spcAft>
+                <a:spcPts val="600"/>
+              </a:spcAft>
+            </a:pPr>
+            <a:r>
+              <a:rPr sz="1200" b="0" i="0">
+                <a:solidFill>
+                  <a:srgbClr val="5B6B76"/>
+                </a:solidFill>
+              </a:rPr>
+              <a:t>–  frozen once and reused, so every comparison is genuinely paired</a:t>
+            </a:r>
+          </a:p>
+        </p:txBody>
+      </p:sp>
+    </p:spTree>
+  </p:cSld>
+  <p:clrMapOvr>
+    <a:masterClrMapping/>
+  </p:clrMapOvr>
+</p:sld>
+</file>
+
+<file path=ppt/slides/slide25.xml><?xml version="1.0" encoding="utf-8"?>
+<p:sld xmlns:a="http://schemas.openxmlformats.org/drawingml/2006/main" xmlns:p="http://schemas.openxmlformats.org/presentationml/2006/main" xmlns:r="http://schemas.openxmlformats.org/officeDocument/2006/relationships">
+  <p:cSld>
+    <p:spTree>
+      <p:nvGrpSpPr>
+        <p:cNvPr id="1" name=""/>
+        <p:cNvGrpSpPr/>
+        <p:nvPr/>
+      </p:nvGrpSpPr>
+      <p:grpSpPr/>
+      <p:sp>
+        <p:nvSpPr>
+          <p:cNvPr id="2" name="TextBox 1"/>
+          <p:cNvSpPr txBox="1"/>
+          <p:nvPr/>
+        </p:nvSpPr>
+        <p:spPr>
+          <a:xfrm>
+            <a:off x="502920" y="320040"/>
+            <a:ext cx="11155680" cy="914400"/>
+          </a:xfrm>
+          <a:prstGeom prst="rect">
+            <a:avLst/>
+          </a:prstGeom>
+          <a:noFill/>
+        </p:spPr>
+        <p:txBody>
+          <a:bodyPr wrap="square">
+            <a:spAutoFit/>
+          </a:bodyPr>
+          <a:lstStyle/>
+          <a:p>
+            <a:pPr algn="l"/>
+            <a:r>
+              <a:rPr sz="3000" b="1" i="0">
+                <a:solidFill>
+                  <a:srgbClr val="1A5276"/>
+                </a:solidFill>
+              </a:rPr>
+              <a:t>The result</a:t>
+            </a:r>
+          </a:p>
+        </p:txBody>
+      </p:sp>
+      <p:sp>
+        <p:nvSpPr>
+          <p:cNvPr id="3" name="TextBox 2"/>
+          <p:cNvSpPr txBox="1"/>
+          <p:nvPr/>
+        </p:nvSpPr>
+        <p:spPr>
+          <a:xfrm>
+            <a:off x="10058400" y="457200"/>
+            <a:ext cx="1737360" cy="457200"/>
+          </a:xfrm>
+          <a:prstGeom prst="rect">
+            <a:avLst/>
+          </a:prstGeom>
+          <a:noFill/>
+        </p:spPr>
+        <p:txBody>
+          <a:bodyPr wrap="none">
+            <a:spAutoFit/>
+          </a:bodyPr>
+          <a:lstStyle/>
+          <a:p>
+            <a:pPr algn="r"/>
+            <a:r>
+              <a:rPr sz="1100" b="1" i="0">
+                <a:solidFill>
+                  <a:srgbClr val="2E86C1"/>
+                </a:solidFill>
+              </a:rPr>
+              <a:t>HEADLINE</a:t>
+            </a:r>
+          </a:p>
+        </p:txBody>
+      </p:sp>
+      <p:graphicFrame>
+        <p:nvGraphicFramePr>
+          <p:cNvPr id="4" name="Table 3"/>
+          <p:cNvGraphicFramePr>
+            <a:graphicFrameLocks noGrp="1"/>
+          </p:cNvGraphicFramePr>
+          <p:nvPr/>
+        </p:nvGraphicFramePr>
+        <p:xfrm>
+          <a:off x="640080" y="1371600"/>
+          <a:ext cx="10881360" cy="1536192"/>
+        </p:xfrm>
+        <a:graphic>
+          <a:graphicData uri="http://schemas.openxmlformats.org/drawingml/2006/table">
+            <a:tbl>
+              <a:tblPr firstRow="1" bandRow="1">
+                <a:tableStyleId>{5C22544A-7EE6-4342-B048-85BDC9FD1C3A}</a:tableStyleId>
+              </a:tblPr>
+              <a:tblGrid>
+                <a:gridCol w="4663440"/>
+                <a:gridCol w="1554480"/>
+                <a:gridCol w="1554480"/>
+                <a:gridCol w="3108960"/>
+              </a:tblGrid>
+              <a:tr h="256032">
+                <a:tc>
+                  <a:txBody>
+                    <a:bodyPr wrap="square"/>
+                    <a:lstStyle/>
+                    <a:p>
+                      <a:pPr algn="l"/>
+                      <a:r>
+                        <a:rPr sz="1100" b="1" i="0">
+                          <a:solidFill>
+                            <a:srgbClr val="FFFFFF"/>
+                          </a:solidFill>
+                        </a:rPr>
+                        <a:t>model</a:t>
+                      </a:r>
+                    </a:p>
+                  </a:txBody>
+                  <a:tcPr marL="54864" marR="54864" marT="18288" marB="18288" anchor="ctr">
+                    <a:solidFill>
+                      <a:srgbClr val="1A5276"/>
+                    </a:solidFill>
+                  </a:tcPr>
+                </a:tc>
+                <a:tc>
+                  <a:txBody>
+                    <a:bodyPr wrap="square"/>
+                    <a:lstStyle/>
+                    <a:p>
+                      <a:pPr algn="l"/>
+                      <a:r>
+                        <a:rPr sz="1100" b="1" i="0">
+                          <a:solidFill>
+                            <a:srgbClr val="FFFFFF"/>
+                          </a:solidFill>
+                        </a:rPr>
+                        <a:t>accuracy</a:t>
+                      </a:r>
+                    </a:p>
+                  </a:txBody>
+                  <a:tcPr marL="54864" marR="54864" marT="18288" marB="18288" anchor="ctr">
+                    <a:solidFill>
+                      <a:srgbClr val="1A5276"/>
+                    </a:solidFill>
+                  </a:tcPr>
+                </a:tc>
+                <a:tc>
+                  <a:txBody>
+                    <a:bodyPr wrap="square"/>
+                    <a:lstStyle/>
+                    <a:p>
+                      <a:pPr algn="l"/>
+                      <a:r>
+                        <a:rPr sz="1100" b="1" i="0">
+                          <a:solidFill>
+                            <a:srgbClr val="FFFFFF"/>
+                          </a:solidFill>
+                        </a:rPr>
+                        <a:t>gain vs ARA</a:t>
+                      </a:r>
+                    </a:p>
+                  </a:txBody>
+                  <a:tcPr marL="54864" marR="54864" marT="18288" marB="18288" anchor="ctr">
+                    <a:solidFill>
+                      <a:srgbClr val="1A5276"/>
+                    </a:solidFill>
+                  </a:tcPr>
+                </a:tc>
+                <a:tc>
+                  <a:txBody>
+                    <a:bodyPr wrap="square"/>
+                    <a:lstStyle/>
+                    <a:p>
+                      <a:pPr algn="l"/>
+                      <a:r>
+                        <a:rPr sz="1100" b="1" i="0">
+                          <a:solidFill>
+                            <a:srgbClr val="FFFFFF"/>
+                          </a:solidFill>
+                        </a:rPr>
+                        <a:t>95 % CI</a:t>
+                      </a:r>
+                    </a:p>
+                  </a:txBody>
+                  <a:tcPr marL="54864" marR="54864" marT="18288" marB="18288" anchor="ctr">
+                    <a:solidFill>
+                      <a:srgbClr val="1A5276"/>
+                    </a:solidFill>
+                  </a:tcPr>
+                </a:tc>
+              </a:tr>
+              <a:tr h="256032">
+                <a:tc>
+                  <a:txBody>
+                    <a:bodyPr wrap="square"/>
+                    <a:lstStyle/>
+                    <a:p>
+                      <a:pPr algn="l"/>
+                      <a:r>
+                        <a:rPr sz="1100" b="0" i="0">
+                          <a:solidFill>
+                            <a:srgbClr val="14303D"/>
+                          </a:solidFill>
+                        </a:rPr>
+                        <a:t>ARA only (baseline)</a:t>
+                      </a:r>
+                    </a:p>
+                  </a:txBody>
+                  <a:tcPr marL="54864" marR="54864" marT="18288" marB="18288" anchor="ctr">
+                    <a:solidFill>
+                      <a:srgbClr val="FFFFFF"/>
+                    </a:solidFill>
+                  </a:tcPr>
+                </a:tc>
+                <a:tc>
+                  <a:txBody>
+                    <a:bodyPr wrap="square"/>
+                    <a:lstStyle/>
+                    <a:p>
+                      <a:pPr algn="l"/>
+                      <a:r>
+                        <a:rPr sz="1100" b="0" i="0">
+                          <a:solidFill>
+                            <a:srgbClr val="14303D"/>
+                          </a:solidFill>
+                        </a:rPr>
+                        <a:t>0.659</a:t>
+                      </a:r>
+                    </a:p>
+                  </a:txBody>
+                  <a:tcPr marL="54864" marR="54864" marT="18288" marB="18288" anchor="ctr">
+                    <a:solidFill>
+                      <a:srgbClr val="FFFFFF"/>
+                    </a:solidFill>
+                  </a:tcPr>
+                </a:tc>
+                <a:tc>
+                  <a:txBody>
+                    <a:bodyPr wrap="square"/>
+                    <a:lstStyle/>
+                    <a:p>
+                      <a:pPr algn="l"/>
+                      <a:r>
+                        <a:rPr sz="1100" b="0" i="0">
+                          <a:solidFill>
+                            <a:srgbClr val="14303D"/>
+                          </a:solidFill>
+                        </a:rPr>
+                        <a:t>—</a:t>
+                      </a:r>
+                    </a:p>
+                  </a:txBody>
+                  <a:tcPr marL="54864" marR="54864" marT="18288" marB="18288" anchor="ctr">
+                    <a:solidFill>
+                      <a:srgbClr val="FFFFFF"/>
+                    </a:solidFill>
+                  </a:tcPr>
+                </a:tc>
+                <a:tc>
+                  <a:txBody>
+                    <a:bodyPr wrap="square"/>
+                    <a:lstStyle/>
+                    <a:p>
+                      <a:pPr algn="l"/>
+                      <a:r>
+                        <a:rPr sz="1100" b="0" i="0">
+                          <a:solidFill>
+                            <a:srgbClr val="14303D"/>
+                          </a:solidFill>
+                        </a:rPr>
+                        <a:t>—</a:t>
+                      </a:r>
+                    </a:p>
+                  </a:txBody>
+                  <a:tcPr marL="54864" marR="54864" marT="18288" marB="18288" anchor="ctr">
+                    <a:solidFill>
+                      <a:srgbClr val="FFFFFF"/>
+                    </a:solidFill>
+                  </a:tcPr>
+                </a:tc>
+              </a:tr>
+              <a:tr h="256032">
+                <a:tc>
+                  <a:txBody>
+                    <a:bodyPr wrap="square"/>
+                    <a:lstStyle/>
+                    <a:p>
+                      <a:pPr algn="l"/>
+                      <a:r>
+                        <a:rPr sz="1100" b="0" i="0">
+                          <a:solidFill>
+                            <a:srgbClr val="14303D"/>
+                          </a:solidFill>
+                        </a:rPr>
+                        <a:t>ARA + γ₂</a:t>
+                      </a:r>
+                    </a:p>
+                  </a:txBody>
+                  <a:tcPr marL="54864" marR="54864" marT="18288" marB="18288" anchor="ctr">
+                    <a:solidFill>
+                      <a:srgbClr val="FFFFFF"/>
+                    </a:solidFill>
+                  </a:tcPr>
+                </a:tc>
+                <a:tc>
+                  <a:txBody>
+                    <a:bodyPr wrap="square"/>
+                    <a:lstStyle/>
+                    <a:p>
+                      <a:pPr algn="l"/>
+                      <a:r>
+                        <a:rPr sz="1100" b="0" i="0">
+                          <a:solidFill>
+                            <a:srgbClr val="14303D"/>
+                          </a:solidFill>
+                        </a:rPr>
+                        <a:t>0.691</a:t>
+                      </a:r>
+                    </a:p>
+                  </a:txBody>
+                  <a:tcPr marL="54864" marR="54864" marT="18288" marB="18288" anchor="ctr">
+                    <a:solidFill>
+                      <a:srgbClr val="FFFFFF"/>
+                    </a:solidFill>
+                  </a:tcPr>
+                </a:tc>
+                <a:tc>
+                  <a:txBody>
+                    <a:bodyPr wrap="square"/>
+                    <a:lstStyle/>
+                    <a:p>
+                      <a:pPr algn="l"/>
+                      <a:r>
+                        <a:rPr sz="1100" b="0" i="0">
+                          <a:solidFill>
+                            <a:srgbClr val="14303D"/>
+                          </a:solidFill>
+                        </a:rPr>
+                        <a:t>+0.032</a:t>
+                      </a:r>
+                    </a:p>
+                  </a:txBody>
+                  <a:tcPr marL="54864" marR="54864" marT="18288" marB="18288" anchor="ctr">
+                    <a:solidFill>
+                      <a:srgbClr val="FFFFFF"/>
+                    </a:solidFill>
+                  </a:tcPr>
+                </a:tc>
+                <a:tc>
+                  <a:txBody>
+                    <a:bodyPr wrap="square"/>
+                    <a:lstStyle/>
+                    <a:p>
+                      <a:pPr algn="l"/>
+                      <a:r>
+                        <a:rPr sz="1100" b="0" i="0">
+                          <a:solidFill>
+                            <a:srgbClr val="14303D"/>
+                          </a:solidFill>
+                        </a:rPr>
+                        <a:t>−0.005 … 0.072</a:t>
+                      </a:r>
+                    </a:p>
+                  </a:txBody>
+                  <a:tcPr marL="54864" marR="54864" marT="18288" marB="18288" anchor="ctr">
+                    <a:solidFill>
+                      <a:srgbClr val="FFFFFF"/>
+                    </a:solidFill>
+                  </a:tcPr>
+                </a:tc>
+              </a:tr>
+              <a:tr h="256032">
+                <a:tc>
+                  <a:txBody>
+                    <a:bodyPr wrap="square"/>
+                    <a:lstStyle/>
+                    <a:p>
+                      <a:pPr algn="l"/>
+                      <a:r>
+                        <a:rPr sz="1100" b="0" i="0">
+                          <a:solidFill>
+                            <a:srgbClr val="14303D"/>
+                          </a:solidFill>
+                        </a:rPr>
+                        <a:t>ARA + γ₂ + rugosity</a:t>
+                      </a:r>
+                    </a:p>
+                  </a:txBody>
+                  <a:tcPr marL="54864" marR="54864" marT="18288" marB="18288" anchor="ctr">
+                    <a:solidFill>
+                      <a:srgbClr val="FFFFFF"/>
+                    </a:solidFill>
+                  </a:tcPr>
+                </a:tc>
+                <a:tc>
+                  <a:txBody>
+                    <a:bodyPr wrap="square"/>
+                    <a:lstStyle/>
+                    <a:p>
+                      <a:pPr algn="l"/>
+                      <a:r>
+                        <a:rPr sz="1100" b="0" i="0">
+                          <a:solidFill>
+                            <a:srgbClr val="14303D"/>
+                          </a:solidFill>
+                        </a:rPr>
+                        <a:t>0.714</a:t>
+                      </a:r>
+                    </a:p>
+                  </a:txBody>
+                  <a:tcPr marL="54864" marR="54864" marT="18288" marB="18288" anchor="ctr">
+                    <a:solidFill>
+                      <a:srgbClr val="FFFFFF"/>
+                    </a:solidFill>
+                  </a:tcPr>
+                </a:tc>
+                <a:tc>
+                  <a:txBody>
+                    <a:bodyPr wrap="square"/>
+                    <a:lstStyle/>
+                    <a:p>
+                      <a:pPr algn="l"/>
+                      <a:r>
+                        <a:rPr sz="1100" b="0" i="0">
+                          <a:solidFill>
+                            <a:srgbClr val="14303D"/>
+                          </a:solidFill>
+                        </a:rPr>
+                        <a:t>+0.055</a:t>
+                      </a:r>
+                    </a:p>
+                  </a:txBody>
+                  <a:tcPr marL="54864" marR="54864" marT="18288" marB="18288" anchor="ctr">
+                    <a:solidFill>
+                      <a:srgbClr val="FFFFFF"/>
+                    </a:solidFill>
+                  </a:tcPr>
+                </a:tc>
+                <a:tc>
+                  <a:txBody>
+                    <a:bodyPr wrap="square"/>
+                    <a:lstStyle/>
+                    <a:p>
+                      <a:pPr algn="l"/>
+                      <a:r>
+                        <a:rPr sz="1100" b="0" i="0">
+                          <a:solidFill>
+                            <a:srgbClr val="14303D"/>
+                          </a:solidFill>
+                        </a:rPr>
+                        <a:t>0.005 … 0.108</a:t>
+                      </a:r>
+                    </a:p>
+                  </a:txBody>
+                  <a:tcPr marL="54864" marR="54864" marT="18288" marB="18288" anchor="ctr">
+                    <a:solidFill>
+                      <a:srgbClr val="FFFFFF"/>
+                    </a:solidFill>
+                  </a:tcPr>
+                </a:tc>
+              </a:tr>
+              <a:tr h="256032">
+                <a:tc>
+                  <a:txBody>
+                    <a:bodyPr wrap="square"/>
+                    <a:lstStyle/>
+                    <a:p>
+                      <a:pPr algn="l"/>
+                      <a:r>
+                        <a:rPr sz="1100" b="1" i="0">
+                          <a:solidFill>
+                            <a:srgbClr val="14303D"/>
+                          </a:solidFill>
+                        </a:rPr>
+                        <a:t>ARA + all roughness</a:t>
+                      </a:r>
+                    </a:p>
+                  </a:txBody>
+                  <a:tcPr marL="54864" marR="54864" marT="18288" marB="18288" anchor="ctr">
+                    <a:solidFill>
+                      <a:srgbClr val="EAF6FF"/>
+                    </a:solidFill>
+                  </a:tcPr>
+                </a:tc>
+                <a:tc>
+                  <a:txBody>
+                    <a:bodyPr wrap="square"/>
+                    <a:lstStyle/>
+                    <a:p>
+                      <a:pPr algn="l"/>
+                      <a:r>
+                        <a:rPr sz="1100" b="1" i="0">
+                          <a:solidFill>
+                            <a:srgbClr val="14303D"/>
+                          </a:solidFill>
+                        </a:rPr>
+                        <a:t>0.756</a:t>
+                      </a:r>
+                    </a:p>
+                  </a:txBody>
+                  <a:tcPr marL="54864" marR="54864" marT="18288" marB="18288" anchor="ctr">
+                    <a:solidFill>
+                      <a:srgbClr val="EAF6FF"/>
+                    </a:solidFill>
+                  </a:tcPr>
+                </a:tc>
+                <a:tc>
+                  <a:txBody>
+                    <a:bodyPr wrap="square"/>
+                    <a:lstStyle/>
+                    <a:p>
+                      <a:pPr algn="l"/>
+                      <a:r>
+                        <a:rPr sz="1100" b="1" i="0">
+                          <a:solidFill>
+                            <a:srgbClr val="14303D"/>
+                          </a:solidFill>
+                        </a:rPr>
+                        <a:t>+0.097</a:t>
+                      </a:r>
+                    </a:p>
+                  </a:txBody>
+                  <a:tcPr marL="54864" marR="54864" marT="18288" marB="18288" anchor="ctr">
+                    <a:solidFill>
+                      <a:srgbClr val="EAF6FF"/>
+                    </a:solidFill>
+                  </a:tcPr>
+                </a:tc>
+                <a:tc>
+                  <a:txBody>
+                    <a:bodyPr wrap="square"/>
+                    <a:lstStyle/>
+                    <a:p>
+                      <a:pPr algn="l"/>
+                      <a:r>
+                        <a:rPr sz="1100" b="1" i="0">
+                          <a:solidFill>
+                            <a:srgbClr val="14303D"/>
+                          </a:solidFill>
+                        </a:rPr>
+                        <a:t>0.039 … 0.155</a:t>
+                      </a:r>
+                    </a:p>
+                  </a:txBody>
+                  <a:tcPr marL="54864" marR="54864" marT="18288" marB="18288" anchor="ctr">
+                    <a:solidFill>
+                      <a:srgbClr val="EAF6FF"/>
+                    </a:solidFill>
+                  </a:tcPr>
+                </a:tc>
+              </a:tr>
+              <a:tr h="256032">
+                <a:tc>
+                  <a:txBody>
+                    <a:bodyPr wrap="square"/>
+                    <a:lstStyle/>
+                    <a:p>
+                      <a:pPr algn="l"/>
+                      <a:r>
+                        <a:rPr sz="1100" b="0" i="0">
+                          <a:solidFill>
+                            <a:srgbClr val="14303D"/>
+                          </a:solidFill>
+                        </a:rPr>
+                        <a:t>roughness only</a:t>
+                      </a:r>
+                    </a:p>
+                  </a:txBody>
+                  <a:tcPr marL="54864" marR="54864" marT="18288" marB="18288" anchor="ctr">
+                    <a:solidFill>
+                      <a:srgbClr val="FFFFFF"/>
+                    </a:solidFill>
+                  </a:tcPr>
+                </a:tc>
+                <a:tc>
+                  <a:txBody>
+                    <a:bodyPr wrap="square"/>
+                    <a:lstStyle/>
+                    <a:p>
+                      <a:pPr algn="l"/>
+                      <a:r>
+                        <a:rPr sz="1100" b="0" i="0">
+                          <a:solidFill>
+                            <a:srgbClr val="14303D"/>
+                          </a:solidFill>
+                        </a:rPr>
+                        <a:t>0.756</a:t>
+                      </a:r>
+                    </a:p>
+                  </a:txBody>
+                  <a:tcPr marL="54864" marR="54864" marT="18288" marB="18288" anchor="ctr">
+                    <a:solidFill>
+                      <a:srgbClr val="FFFFFF"/>
+                    </a:solidFill>
+                  </a:tcPr>
+                </a:tc>
+                <a:tc>
+                  <a:txBody>
+                    <a:bodyPr wrap="square"/>
+                    <a:lstStyle/>
+                    <a:p>
+                      <a:pPr algn="l"/>
+                      <a:r>
+                        <a:rPr sz="1100" b="0" i="0">
+                          <a:solidFill>
+                            <a:srgbClr val="14303D"/>
+                          </a:solidFill>
+                        </a:rPr>
+                        <a:t>+0.097</a:t>
+                      </a:r>
+                    </a:p>
+                  </a:txBody>
+                  <a:tcPr marL="54864" marR="54864" marT="18288" marB="18288" anchor="ctr">
+                    <a:solidFill>
+                      <a:srgbClr val="FFFFFF"/>
+                    </a:solidFill>
+                  </a:tcPr>
+                </a:tc>
+                <a:tc>
+                  <a:txBody>
+                    <a:bodyPr wrap="square"/>
+                    <a:lstStyle/>
+                    <a:p>
+                      <a:pPr algn="l"/>
+                      <a:r>
+                        <a:rPr sz="1100" b="0" i="0">
+                          <a:solidFill>
+                            <a:srgbClr val="14303D"/>
+                          </a:solidFill>
+                        </a:rPr>
+                        <a:t>0.014 … 0.183</a:t>
+                      </a:r>
+                    </a:p>
+                  </a:txBody>
+                  <a:tcPr marL="54864" marR="54864" marT="18288" marB="18288" anchor="ctr">
+                    <a:solidFill>
+                      <a:srgbClr val="FFFFFF"/>
+                    </a:solidFill>
+                  </a:tcPr>
+                </a:tc>
+              </a:tr>
+            </a:tbl>
+          </a:graphicData>
+        </a:graphic>
+      </p:graphicFrame>
+      <p:sp>
+        <p:nvSpPr>
+          <p:cNvPr id="5" name="TextBox 4"/>
+          <p:cNvSpPr txBox="1"/>
+          <p:nvPr/>
+        </p:nvSpPr>
+        <p:spPr>
+          <a:xfrm>
+            <a:off x="640080" y="3108960"/>
+            <a:ext cx="10972800" cy="3383280"/>
+          </a:xfrm>
+          <a:prstGeom prst="rect">
+            <a:avLst/>
+          </a:prstGeom>
+          <a:noFill/>
+        </p:spPr>
+        <p:txBody>
+          <a:bodyPr wrap="square">
+            <a:spAutoFit/>
+          </a:bodyPr>
+          <a:lstStyle/>
+          <a:p>
+            <a:pPr algn="l">
+              <a:spcAft>
+                <a:spcPts val="600"/>
+              </a:spcAft>
+            </a:pPr>
+            <a:r>
+              <a:rPr sz="1400" b="0" i="0">
+                <a:solidFill>
+                  <a:srgbClr val="14303D"/>
+                </a:solidFill>
+              </a:rPr>
+              <a:t>•  Block-permutation p &lt; 0.001; macro-F₁ 0.597 → 0.715; minority-class (Substrate E)</a:t>
+            </a:r>
+          </a:p>
+          <a:p>
+            <a:pPr algn="l" lvl="1">
+              <a:spcAft>
+                <a:spcPts val="600"/>
+              </a:spcAft>
+            </a:pPr>
+            <a:r>
+              <a:rPr sz="1200" b="0" i="0">
+                <a:solidFill>
+                  <a:srgbClr val="5B6B76"/>
+                </a:solidFill>
+              </a:rPr>
+              <a:t>–  recall 0.43 → 0.60 — the gain is where it matters</a:t>
+            </a:r>
+          </a:p>
+          <a:p>
+            <a:pPr algn="l">
+              <a:spcAft>
+                <a:spcPts val="600"/>
+              </a:spcAft>
+            </a:pPr>
+            <a:r>
+              <a:rPr sz="1400" b="0" i="0">
+                <a:solidFill>
+                  <a:srgbClr val="14303D"/>
+                </a:solidFill>
+              </a:rPr>
+              <a:t>•  γ₂ ranks FIRST of all ten features (importance 0.215, above every backscatter</a:t>
+            </a:r>
+          </a:p>
+          <a:p>
+            <a:pPr algn="l" lvl="1">
+              <a:spcAft>
+                <a:spcPts val="600"/>
+              </a:spcAft>
+            </a:pPr>
+            <a:r>
+              <a:rPr sz="1200" b="0" i="0">
+                <a:solidFill>
+                  <a:srgbClr val="5B6B76"/>
+                </a:solidFill>
+              </a:rPr>
+              <a:t>–  bin — the best of those is 0.175)</a:t>
+            </a:r>
+          </a:p>
+          <a:p>
+            <a:pPr algn="l">
+              <a:spcAft>
+                <a:spcPts val="600"/>
+              </a:spcAft>
+            </a:pPr>
+            <a:r>
+              <a:rPr sz="1400" b="0" i="0">
+                <a:solidFill>
+                  <a:srgbClr val="14303D"/>
+                </a:solidFill>
+              </a:rPr>
+              <a:t>•  Modality ladder: backscatter alone 0.70 · + bathymetric slope correction 0.66 ·</a:t>
+            </a:r>
+          </a:p>
+          <a:p>
+            <a:pPr algn="l" lvl="1">
+              <a:spcAft>
+                <a:spcPts val="600"/>
+              </a:spcAft>
+            </a:pPr>
+            <a:r>
+              <a:rPr sz="1200" b="0" i="0">
+                <a:solidFill>
+                  <a:srgbClr val="5B6B76"/>
+                </a:solidFill>
+              </a:rPr>
+              <a:t>–  + γ₂ 0.69 · + all roughness 0.76</a:t>
+            </a:r>
+          </a:p>
+          <a:p>
+            <a:pPr algn="l">
+              <a:spcAft>
+                <a:spcPts val="600"/>
+              </a:spcAft>
+            </a:pPr>
+            <a:r>
+              <a:rPr sz="1400" b="0" i="0">
+                <a:solidFill>
+                  <a:srgbClr val="14303D"/>
+                </a:solidFill>
+              </a:rPr>
+              <a:t>•  Holds across scale: at a 15 m cell the same ladder runs 0.74 → 0.83</a:t>
+            </a:r>
+          </a:p>
+          <a:p>
+            <a:pPr algn="l">
+              <a:spcAft>
+                <a:spcPts val="600"/>
+              </a:spcAft>
+            </a:pPr>
+            <a:r>
+              <a:rPr sz="1400" b="0" i="0">
+                <a:solidFill>
+                  <a:srgbClr val="14303D"/>
+                </a:solidFill>
+              </a:rPr>
+              <a:t>•  Two-tier map: 881 of 2318 cells (38 %) have both modalities; adding roughness</a:t>
+            </a:r>
+          </a:p>
+          <a:p>
+            <a:pPr algn="l" lvl="1">
+              <a:spcAft>
+                <a:spcPts val="600"/>
+              </a:spcAft>
+            </a:pPr>
+            <a:r>
+              <a:rPr sz="1200" b="0" i="0">
+                <a:solidFill>
+                  <a:srgbClr val="5B6B76"/>
+                </a:solidFill>
+              </a:rPr>
+              <a:t>–  flips 14.5 % of the classified swath</a:t>
+            </a:r>
+          </a:p>
+        </p:txBody>
+      </p:sp>
+    </p:spTree>
+  </p:cSld>
+  <p:clrMapOvr>
+    <a:masterClrMapping/>
+  </p:clrMapOvr>
+</p:sld>
+</file>
+
+<file path=ppt/slides/slide26.xml><?xml version="1.0" encoding="utf-8"?>
+<p:sld xmlns:a="http://schemas.openxmlformats.org/drawingml/2006/main" xmlns:p="http://schemas.openxmlformats.org/presentationml/2006/main" xmlns:r="http://schemas.openxmlformats.org/officeDocument/2006/relationships">
+  <p:cSld>
+    <p:spTree>
+      <p:nvGrpSpPr>
+        <p:cNvPr id="1" name=""/>
+        <p:cNvGrpSpPr/>
+        <p:nvPr/>
+      </p:nvGrpSpPr>
+      <p:grpSpPr/>
+      <p:sp>
+        <p:nvSpPr>
+          <p:cNvPr id="2" name="TextBox 1"/>
+          <p:cNvSpPr txBox="1"/>
+          <p:nvPr/>
+        </p:nvSpPr>
+        <p:spPr>
+          <a:xfrm>
+            <a:off x="502920" y="320040"/>
+            <a:ext cx="11155680" cy="914400"/>
+          </a:xfrm>
+          <a:prstGeom prst="rect">
+            <a:avLst/>
+          </a:prstGeom>
+          <a:noFill/>
+        </p:spPr>
+        <p:txBody>
+          <a:bodyPr wrap="square">
+            <a:spAutoFit/>
+          </a:bodyPr>
+          <a:lstStyle/>
+          <a:p>
+            <a:pPr algn="l"/>
+            <a:r>
+              <a:rPr sz="3000" b="1" i="0">
+                <a:solidFill>
+                  <a:srgbClr val="1A5276"/>
+                </a:solidFill>
+              </a:rPr>
+              <a:t>Why you can believe it — and what it does not say</a:t>
+            </a:r>
+          </a:p>
+        </p:txBody>
+      </p:sp>
+      <p:sp>
+        <p:nvSpPr>
+          <p:cNvPr id="3" name="TextBox 2"/>
+          <p:cNvSpPr txBox="1"/>
+          <p:nvPr/>
+        </p:nvSpPr>
+        <p:spPr>
+          <a:xfrm>
+            <a:off x="640080" y="1463040"/>
+            <a:ext cx="10972800" cy="4937760"/>
+          </a:xfrm>
+          <a:prstGeom prst="rect">
+            <a:avLst/>
+          </a:prstGeom>
+          <a:noFill/>
+        </p:spPr>
+        <p:txBody>
+          <a:bodyPr wrap="square">
+            <a:spAutoFit/>
+          </a:bodyPr>
+          <a:lstStyle/>
+          <a:p>
+            <a:pPr algn="l">
+              <a:spcAft>
+                <a:spcPts val="600"/>
+              </a:spcAft>
+            </a:pPr>
+            <a:r>
+              <a:rPr sz="1300" b="0" i="0">
+                <a:solidFill>
+                  <a:srgbClr val="14303D"/>
+                </a:solidFill>
+              </a:rPr>
+              <a:t>•  One run, one manifest. Two earlier fusion results (0.769→0.864 on 221 cells,</a:t>
+            </a:r>
+          </a:p>
+          <a:p>
+            <a:pPr algn="l" lvl="1">
+              <a:spcAft>
+                <a:spcPts val="600"/>
+              </a:spcAft>
+            </a:pPr>
+            <a:r>
+              <a:rPr sz="1150" b="0" i="0">
+                <a:solidFill>
+                  <a:srgbClr val="5B6B76"/>
+                </a:solidFill>
+              </a:rPr>
+              <a:t>–  0.761→0.820 on 987 cells) differed in BOTH the beam table and the cell subset —</a:t>
+            </a:r>
+          </a:p>
+          <a:p>
+            <a:pPr algn="l" lvl="1">
+              <a:spcAft>
+                <a:spcPts val="600"/>
+              </a:spcAft>
+            </a:pPr>
+            <a:r>
+              <a:rPr sz="1150" b="0" i="0">
+                <a:solidFill>
+                  <a:srgbClr val="5B6B76"/>
+                </a:solidFill>
+              </a:rPr>
+              <a:t>–  invisible to the author, obvious to a referee. The fix was not to pick a number,</a:t>
+            </a:r>
+          </a:p>
+          <a:p>
+            <a:pPr algn="l" lvl="1">
+              <a:spcAft>
+                <a:spcPts val="600"/>
+              </a:spcAft>
+            </a:pPr>
+            <a:r>
+              <a:rPr sz="1150" b="0" i="0">
+                <a:solidFill>
+                  <a:srgbClr val="5B6B76"/>
+                </a:solidFill>
+              </a:rPr>
+              <a:t>–  it was to make two impossible: one frozen manifest.yml, one library, one beam</a:t>
+            </a:r>
+          </a:p>
+          <a:p>
+            <a:pPr algn="l" lvl="1">
+              <a:spcAft>
+                <a:spcPts val="600"/>
+              </a:spcAft>
+            </a:pPr>
+            <a:r>
+              <a:rPr sz="1150" b="0" i="0">
+                <a:solidFill>
+                  <a:srgbClr val="5B6B76"/>
+                </a:solidFill>
+              </a:rPr>
+              <a:t>–  table, one fold assignment, every input hashed into a lock file</a:t>
+            </a:r>
+          </a:p>
+          <a:p>
+            <a:pPr algn="l">
+              <a:spcAft>
+                <a:spcPts val="600"/>
+              </a:spcAft>
+            </a:pPr>
+            <a:r>
+              <a:rPr sz="1300" b="0" i="0">
+                <a:solidFill>
+                  <a:srgbClr val="14303D"/>
+                </a:solidFill>
+              </a:rPr>
+              <a:t>•  Calibration stress test: inject per-line source-level error up to 5 dB (against a</a:t>
+            </a:r>
+          </a:p>
+          <a:p>
+            <a:pPr algn="l" lvl="1">
+              <a:spcAft>
+                <a:spcPts val="600"/>
+              </a:spcAft>
+            </a:pPr>
+            <a:r>
+              <a:rPr sz="1150" b="0" i="0">
+                <a:solidFill>
+                  <a:srgbClr val="5B6B76"/>
+                </a:solidFill>
+              </a:rPr>
+              <a:t>–  MEASURED per-line spread of 4.59 dB over 17 lines). The normalised pipeline moves</a:t>
+            </a:r>
+          </a:p>
+          <a:p>
+            <a:pPr algn="l" lvl="1">
+              <a:spcAft>
+                <a:spcPts val="600"/>
+              </a:spcAft>
+            </a:pPr>
+            <a:r>
+              <a:rPr sz="1150" b="0" i="0">
+                <a:solidFill>
+                  <a:srgbClr val="5B6B76"/>
+                </a:solidFill>
+              </a:rPr>
+              <a:t>–  0.000; without per-line normalisation it drifts 0.018; strip the shape too and the</a:t>
+            </a:r>
+          </a:p>
+          <a:p>
+            <a:pPr algn="l" lvl="1">
+              <a:spcAft>
+                <a:spcPts val="600"/>
+              </a:spcAft>
+            </a:pPr>
+            <a:r>
+              <a:rPr sz="1150" b="0" i="0">
+                <a:solidFill>
+                  <a:srgbClr val="5B6B76"/>
+                </a:solidFill>
+              </a:rPr>
+              <a:t>–  level-only classifier falls to 0.58 and drifts 0.028. The result does not depend</a:t>
+            </a:r>
+          </a:p>
+          <a:p>
+            <a:pPr algn="l" lvl="1">
+              <a:spcAft>
+                <a:spcPts val="600"/>
+              </a:spcAft>
+            </a:pPr>
+            <a:r>
+              <a:rPr sz="1150" b="0" i="0">
+                <a:solidFill>
+                  <a:srgbClr val="5B6B76"/>
+                </a:solidFill>
+              </a:rPr>
+              <a:t>–  on absolute calibration</a:t>
+            </a:r>
+          </a:p>
+          <a:p>
+            <a:pPr algn="l">
+              <a:spcAft>
+                <a:spcPts val="600"/>
+              </a:spcAft>
+            </a:pPr>
+            <a:r>
+              <a:rPr sz="1300" b="0" i="0">
+                <a:solidFill>
+                  <a:srgbClr val="14303D"/>
+                </a:solidFill>
+              </a:rPr>
+              <a:t>•  The image classifier survives honest CV: 0.942 stratified → 0.939 on 200 m</a:t>
+            </a:r>
+          </a:p>
+          <a:p>
+            <a:pPr algn="l" lvl="1">
+              <a:spcAft>
+                <a:spcPts val="600"/>
+              </a:spcAft>
+            </a:pPr>
+            <a:r>
+              <a:rPr sz="1150" b="0" i="0">
+                <a:solidFill>
+                  <a:srgbClr val="5B6B76"/>
+                </a:solidFill>
+              </a:rPr>
+              <a:t>–  spatial blocks. Optimism 0.002 — it was not leaking geography</a:t>
+            </a:r>
+          </a:p>
+          <a:p>
+            <a:pPr algn="l">
+              <a:spcAft>
+                <a:spcPts val="600"/>
+              </a:spcAft>
+            </a:pPr>
+            <a:r>
+              <a:rPr sz="1300" b="0" i="0">
+                <a:solidFill>
+                  <a:srgbClr val="14303D"/>
+                </a:solidFill>
+              </a:rPr>
+              <a:t>•  LIMITS, stated not buried — the stereo coverage gate is NOT label-neutral:</a:t>
+            </a:r>
+          </a:p>
+          <a:p>
+            <a:pPr algn="l" lvl="1">
+              <a:spcAft>
+                <a:spcPts val="600"/>
+              </a:spcAft>
+            </a:pPr>
+            <a:r>
+              <a:rPr sz="1150" b="0" i="0">
+                <a:solidFill>
+                  <a:srgbClr val="5B6B76"/>
+                </a:solidFill>
+              </a:rPr>
+              <a:t>–  2.7 % of Substrate A cells rejected against 12.9 % of Substrate E (Fisher OR 5.3,</a:t>
+            </a:r>
+          </a:p>
+          <a:p>
+            <a:pPr algn="l" lvl="1">
+              <a:spcAft>
+                <a:spcPts val="600"/>
+              </a:spcAft>
+            </a:pPr>
+            <a:r>
+              <a:rPr sz="1150" b="0" i="0">
+                <a:solidFill>
+                  <a:srgbClr val="5B6B76"/>
+                </a:solidFill>
+              </a:rPr>
+              <a:t>–  p ≈ 2×10⁻²⁵). That is a result about turbidity over fine sediment</a:t>
+            </a:r>
+          </a:p>
+          <a:p>
+            <a:pPr algn="l">
+              <a:spcAft>
+                <a:spcPts val="600"/>
+              </a:spcAft>
+            </a:pPr>
+            <a:r>
+              <a:rPr sz="1300" b="0" i="0">
+                <a:solidFill>
+                  <a:srgbClr val="14303D"/>
+                </a:solidFill>
+              </a:rPr>
+              <a:t>•  w₂ and rms height are never model inputs — amplitude is not recoverable from</a:t>
+            </a:r>
+          </a:p>
+          <a:p>
+            <a:pPr algn="l" lvl="1">
+              <a:spcAft>
+                <a:spcPts val="600"/>
+              </a:spcAft>
+            </a:pPr>
+            <a:r>
+              <a:rPr sz="1150" b="0" i="0">
+                <a:solidFill>
+                  <a:srgbClr val="5B6B76"/>
+                </a:solidFill>
+              </a:rPr>
+              <a:t>–  this stereo; and fit_r2 / valid_fraction / altitude_mm / matcher are absent from</a:t>
+            </a:r>
+          </a:p>
+          <a:p>
+            <a:pPr algn="l" lvl="1">
+              <a:spcAft>
+                <a:spcPts val="600"/>
+              </a:spcAft>
+            </a:pPr>
+            <a:r>
+              <a:rPr sz="1150" b="0" i="0">
+                <a:solidFill>
+                  <a:srgbClr val="5B6B76"/>
+                </a:solidFill>
+              </a:rPr>
+              <a:t>–  the committed CSVs, so spectrum quality cannot yet be filtered on</a:t>
+            </a:r>
+          </a:p>
+        </p:txBody>
+      </p:sp>
+    </p:spTree>
+  </p:cSld>
+  <p:clrMapOvr>
+    <a:masterClrMapping/>
+  </p:clrMapOvr>
+</p:sld>
+</file>
+
+<file path=ppt/slides/slide27.xml><?xml version="1.0" encoding="utf-8"?>
+<p:sld xmlns:a="http://schemas.openxmlformats.org/drawingml/2006/main" xmlns:p="http://schemas.openxmlformats.org/presentationml/2006/main" xmlns:r="http://schemas.openxmlformats.org/officeDocument/2006/relationships">
+  <p:cSld>
+    <p:spTree>
+      <p:nvGrpSpPr>
+        <p:cNvPr id="1" name=""/>
+        <p:cNvGrpSpPr/>
+        <p:nvPr/>
+      </p:nvGrpSpPr>
+      <p:grpSpPr/>
+      <p:sp>
+        <p:nvSpPr>
+          <p:cNvPr id="2" name="TextBox 1"/>
+          <p:cNvSpPr txBox="1"/>
+          <p:nvPr/>
+        </p:nvSpPr>
+        <p:spPr>
+          <a:xfrm>
+            <a:off x="502920" y="320040"/>
+            <a:ext cx="11155680" cy="914400"/>
+          </a:xfrm>
+          <a:prstGeom prst="rect">
+            <a:avLst/>
+          </a:prstGeom>
+          <a:noFill/>
+        </p:spPr>
+        <p:txBody>
+          <a:bodyPr wrap="square">
+            <a:spAutoFit/>
+          </a:bodyPr>
+          <a:lstStyle/>
+          <a:p>
+            <a:pPr algn="l"/>
+            <a:r>
+              <a:rPr sz="3000" b="1" i="0">
+                <a:solidFill>
+                  <a:srgbClr val="1A5276"/>
+                </a:solidFill>
+              </a:rPr>
+              <a:t>Is this a unique tool?</a:t>
+            </a:r>
+          </a:p>
+        </p:txBody>
+      </p:sp>
+      <p:sp>
+        <p:nvSpPr>
+          <p:cNvPr id="3" name="TextBox 2"/>
+          <p:cNvSpPr txBox="1"/>
+          <p:nvPr/>
+        </p:nvSpPr>
+        <p:spPr>
+          <a:xfrm>
+            <a:off x="640080" y="1463040"/>
+            <a:ext cx="10972800" cy="4937760"/>
+          </a:xfrm>
+          <a:prstGeom prst="rect">
+            <a:avLst/>
+          </a:prstGeom>
+          <a:noFill/>
+        </p:spPr>
+        <p:txBody>
+          <a:bodyPr wrap="square">
+            <a:spAutoFit/>
+          </a:bodyPr>
+          <a:lstStyle/>
+          <a:p>
+            <a:pPr algn="l">
+              <a:spcAft>
+                <a:spcPts val="600"/>
+              </a:spcAft>
+            </a:pPr>
+            <a:r>
+              <a:rPr sz="1500" b="0" i="0">
+                <a:solidFill>
+                  <a:srgbClr val="14303D"/>
+                </a:solidFill>
+              </a:rPr>
+              <a:t>•  Yes — and the differentiator has shifted</a:t>
+            </a:r>
+          </a:p>
+          <a:p>
+            <a:pPr algn="l">
+              <a:spcAft>
+                <a:spcPts val="600"/>
+              </a:spcAft>
+            </a:pPr>
+            <a:r>
+              <a:rPr sz="1500" b="0" i="0">
+                <a:solidFill>
+                  <a:srgbClr val="14303D"/>
+                </a:solidFill>
+              </a:rPr>
+              <a:t>•  It started as an INTEGRATION argument: most workflows are siloed — acoustics in</a:t>
+            </a:r>
+          </a:p>
+          <a:p>
+            <a:pPr algn="l" lvl="1">
+              <a:spcAft>
+                <a:spcPts val="600"/>
+              </a:spcAft>
+            </a:pPr>
+            <a:r>
+              <a:rPr sz="1300" b="0" i="0">
+                <a:solidFill>
+                  <a:srgbClr val="5B6B76"/>
+                </a:solidFill>
+              </a:rPr>
+              <a:t>–  one suite, image annotation in another, video review in a third, GIS somewhere</a:t>
+            </a:r>
+          </a:p>
+          <a:p>
+            <a:pPr algn="l" lvl="1">
+              <a:spcAft>
+                <a:spcPts val="600"/>
+              </a:spcAft>
+            </a:pPr>
+            <a:r>
+              <a:rPr sz="1300" b="0" i="0">
+                <a:solidFill>
+                  <a:srgbClr val="5B6B76"/>
+                </a:solidFill>
+              </a:rPr>
+              <a:t>–  else. GroundTruther puts them on one QGIS map, free and open source</a:t>
+            </a:r>
+          </a:p>
+          <a:p>
+            <a:pPr algn="l">
+              <a:spcAft>
+                <a:spcPts val="600"/>
+              </a:spcAft>
+            </a:pPr>
+            <a:r>
+              <a:rPr sz="1500" b="0" i="0">
+                <a:solidFill>
+                  <a:srgbClr val="14303D"/>
+                </a:solidFill>
+              </a:rPr>
+              <a:t>•  It is now also a MEASUREMENT argument: no other GIS-native tool turns the</a:t>
+            </a:r>
+          </a:p>
+          <a:p>
+            <a:pPr algn="l" lvl="1">
+              <a:spcAft>
+                <a:spcPts val="600"/>
+              </a:spcAft>
+            </a:pPr>
+            <a:r>
+              <a:rPr sz="1300" b="0" i="0">
+                <a:solidFill>
+                  <a:srgbClr val="5B6B76"/>
+                </a:solidFill>
+              </a:rPr>
+              <a:t>–  survey's own stereo imagery into metric seabed geometry — micro-DEMs, spectral</a:t>
+            </a:r>
+          </a:p>
+          <a:p>
+            <a:pPr algn="l" lvl="1">
+              <a:spcAft>
+                <a:spcPts val="600"/>
+              </a:spcAft>
+            </a:pPr>
+            <a:r>
+              <a:rPr sz="1300" b="0" i="0">
+                <a:solidFill>
+                  <a:srgbClr val="5B6B76"/>
+                </a:solidFill>
+              </a:rPr>
+              <a:t>–  roughness, georeferenced mosaics, a millimetre ribbon — and puts it beside the</a:t>
+            </a:r>
+          </a:p>
+          <a:p>
+            <a:pPr algn="l" lvl="1">
+              <a:spcAft>
+                <a:spcPts val="600"/>
+              </a:spcAft>
+            </a:pPr>
+            <a:r>
+              <a:rPr sz="1300" b="0" i="0">
+                <a:solidFill>
+                  <a:srgbClr val="5B6B76"/>
+                </a:solidFill>
+              </a:rPr>
+              <a:t>–  acoustics in the same project</a:t>
+            </a:r>
+          </a:p>
+          <a:p>
+            <a:pPr algn="l">
+              <a:spcAft>
+                <a:spcPts val="600"/>
+              </a:spcAft>
+            </a:pPr>
+            <a:r>
+              <a:rPr sz="1500" b="0" i="0">
+                <a:solidFill>
+                  <a:srgbClr val="14303D"/>
+                </a:solidFill>
+              </a:rPr>
+              <a:t>•  Heavy work stays server-side (FastGIS for GRASS, a GPU service for stereo);</a:t>
+            </a:r>
+          </a:p>
+          <a:p>
+            <a:pPr algn="l" lvl="1">
+              <a:spcAft>
+                <a:spcPts val="600"/>
+              </a:spcAft>
+            </a:pPr>
+            <a:r>
+              <a:rPr sz="1300" b="0" i="0">
+                <a:solidFill>
+                  <a:srgbClr val="5B6B76"/>
+                </a:solidFill>
+              </a:rPr>
+              <a:t>–  the plugin stays a thin, scriptable client</a:t>
+            </a:r>
+          </a:p>
+          <a:p>
+            <a:pPr algn="l">
+              <a:spcAft>
+                <a:spcPts val="600"/>
+              </a:spcAft>
+            </a:pPr>
+            <a:r>
+              <a:rPr sz="1500" b="0" i="0">
+                <a:solidFill>
+                  <a:srgbClr val="14303D"/>
+                </a:solidFill>
+              </a:rPr>
+              <a:t>•  Open formats throughout (Parquet, GeoJSON, GeoTIFF, KMZ, CSV/.log)</a:t>
+            </a:r>
+          </a:p>
+          <a:p>
+            <a:pPr algn="l">
+              <a:spcAft>
+                <a:spcPts val="600"/>
+              </a:spcAft>
+            </a:pPr>
+            <a:r>
+              <a:rPr sz="1500" b="0" i="0">
+                <a:solidFill>
+                  <a:srgbClr val="14303D"/>
+                </a:solidFill>
+              </a:rPr>
+              <a:t>•  Not a replacement for specialist acoustic suites — a connective, ground-truthing</a:t>
+            </a:r>
+          </a:p>
+          <a:p>
+            <a:pPr algn="l" lvl="1">
+              <a:spcAft>
+                <a:spcPts val="600"/>
+              </a:spcAft>
+            </a:pPr>
+            <a:r>
+              <a:rPr sz="1300" b="0" i="0">
+                <a:solidFill>
+                  <a:srgbClr val="5B6B76"/>
+                </a:solidFill>
+              </a:rPr>
+              <a:t>–  layer, which now measures something of its own</a:t>
+            </a:r>
+          </a:p>
+        </p:txBody>
+      </p:sp>
+    </p:spTree>
+  </p:cSld>
+  <p:clrMapOvr>
+    <a:masterClrMapping/>
+  </p:clrMapOvr>
+</p:sld>
+</file>
+
+<file path=ppt/slides/slide28.xml><?xml version="1.0" encoding="utf-8"?>
+<p:sld xmlns:a="http://schemas.openxmlformats.org/drawingml/2006/main" xmlns:p="http://schemas.openxmlformats.org/presentationml/2006/main" xmlns:r="http://schemas.openxmlformats.org/officeDocument/2006/relationships">
+  <p:cSld>
+    <p:spTree>
+      <p:nvGrpSpPr>
+        <p:cNvPr id="1" name=""/>
+        <p:cNvGrpSpPr/>
+        <p:nvPr/>
+      </p:nvGrpSpPr>
+      <p:grpSpPr/>
+      <p:sp>
+        <p:nvSpPr>
+          <p:cNvPr id="2" name="TextBox 1"/>
+          <p:cNvSpPr txBox="1"/>
+          <p:nvPr/>
+        </p:nvSpPr>
+        <p:spPr>
+          <a:xfrm>
+            <a:off x="502920" y="320040"/>
+            <a:ext cx="11155680" cy="914400"/>
+          </a:xfrm>
+          <a:prstGeom prst="rect">
+            <a:avLst/>
+          </a:prstGeom>
+          <a:noFill/>
+        </p:spPr>
+        <p:txBody>
+          <a:bodyPr wrap="square">
+            <a:spAutoFit/>
+          </a:bodyPr>
+          <a:lstStyle/>
+          <a:p>
+            <a:pPr algn="l"/>
+            <a:r>
+              <a:rPr sz="3000" b="1" i="0">
+                <a:solidFill>
+                  <a:srgbClr val="1A5276"/>
+                </a:solidFill>
+              </a:rPr>
+              <a:t>What's next?</a:t>
             </a:r>
           </a:p>
         </p:txBody>
@@ -5286,7 +9813,7 @@
                   <a:srgbClr val="0E6E6E"/>
                 </a:solidFill>
               </a:rPr>
-              <a:t>Who it's for</a:t>
+              <a:t>Committed, with a number attached</a:t>
             </a:r>
           </a:p>
           <a:p>
@@ -5296,12 +9823,12 @@
               </a:spcAft>
             </a:pPr>
             <a:r>
-              <a:rPr sz="1500" b="0" i="0">
+              <a:rPr sz="1400" b="0" i="0">
                 <a:solidFill>
                   <a:srgbClr val="14303D"/>
                 </a:solidFill>
               </a:rPr>
-              <a:t>•  Benthic ecologists &amp; seabed-mapping teams doing ground-truthing</a:t>
+              <a:t>•  Vertical bundle adjustment for the ribbon: per-frame placement 60 mm → ≈ 6 mm. That single factor of ten converts the scale-gap result from suggestive to publishable</a:t>
             </a:r>
           </a:p>
           <a:p>
@@ -5311,12 +9838,27 @@
               </a:spcAft>
             </a:pPr>
             <a:r>
-              <a:rPr sz="1500" b="0" i="0">
+              <a:rPr sz="1400" b="0" i="0">
                 <a:solidFill>
                   <a:srgbClr val="14303D"/>
                 </a:solidFill>
               </a:rPr>
-              <a:t>•  Anyone who wants acoustics, imagery &amp; video on the same map</a:t>
+              <a:t>•  Persist the roughness QC fields (fit_r2, valid_fraction, altitude_mm, matcher) so spectrum quality can be reported and filtered on</a:t>
+            </a:r>
+          </a:p>
+          <a:p>
+            <a:pPr algn="l">
+              <a:spcAft>
+                <a:spcPts val="600"/>
+              </a:spcAft>
+            </a:pPr>
+            <a:r>
+              <a:rPr sz="1400" b="0" i="0">
+                <a:solidFill>
+                  <a:srgbClr val="14303D"/>
+                </a:solidFill>
+              </a:rPr>
+              <a:t>•  Resolve mount handedness against a target of known handedness — the one link in the geometry chain still untested</a:t>
             </a:r>
           </a:p>
         </p:txBody>
@@ -5350,7 +9892,7 @@
                   <a:srgbClr val="0E6E6E"/>
                 </a:solidFill>
               </a:rPr>
-              <a:t>Honest take</a:t>
+              <a:t>Open</a:t>
             </a:r>
           </a:p>
           <a:p>
@@ -5360,12 +9902,12 @@
               </a:spcAft>
             </a:pPr>
             <a:r>
-              <a:rPr sz="1500" b="0" i="0">
+              <a:rPr sz="1400" b="0" i="0">
                 <a:solidFill>
                   <a:srgbClr val="14303D"/>
                 </a:solidFill>
               </a:rPr>
-              <a:t>•  Purely acoustic processing → keep your specialist suite</a:t>
+              <a:t>•  ML-assisted annotation (review instead of draw)</a:t>
             </a:r>
           </a:p>
           <a:p>
@@ -5375,12 +9917,72 @@
               </a:spcAft>
             </a:pPr>
             <a:r>
-              <a:rPr sz="1500" b="0" i="0">
+              <a:rPr sz="1400" b="0" i="0">
                 <a:solidFill>
                   <a:srgbClr val="14303D"/>
                 </a:solidFill>
               </a:rPr>
-              <a:t>•  Interpretation + ground-truth + reporting across data types, in GIS, open &amp; scriptable → strong fit</a:t>
+              <a:t>•  A ribbon dock in QGIS, once people have used a ribbon in anger</a:t>
+            </a:r>
+          </a:p>
+          <a:p>
+            <a:pPr algn="l">
+              <a:spcAft>
+                <a:spcPts val="600"/>
+              </a:spcAft>
+            </a:pPr>
+            <a:r>
+              <a:rPr sz="1400" b="0" i="0">
+                <a:solidFill>
+                  <a:srgbClr val="14303D"/>
+                </a:solidFill>
+              </a:rPr>
+              <a:t>•  Multi-line ribbons and cross-line closure</a:t>
+            </a:r>
+          </a:p>
+          <a:p>
+            <a:pPr algn="l">
+              <a:spcAft>
+                <a:spcPts val="600"/>
+              </a:spcAft>
+            </a:pPr>
+            <a:r>
+              <a:rPr sz="1400" b="0" i="0">
+                <a:solidFill>
+                  <a:srgbClr val="14303D"/>
+                </a:solidFill>
+              </a:rPr>
+              <a:t>•  Reproducible 'analysis as a saved session'</a:t>
+            </a:r>
+          </a:p>
+          <a:p>
+            <a:pPr algn="l">
+              <a:spcAft>
+                <a:spcPts val="600"/>
+              </a:spcAft>
+            </a:pPr>
+            <a:r>
+              <a:rPr sz="1400" b="0" i="0">
+                <a:solidFill>
+                  <a:srgbClr val="14303D"/>
+                </a:solidFill>
+              </a:rPr>
+              <a:t>•  Multi-user / shared cloud sessions; signed report bundles</a:t>
+            </a:r>
+          </a:p>
+          <a:p>
+            <a:pPr algn="l">
+              <a:spcAft>
+                <a:spcPts val="600"/>
+              </a:spcAft>
+            </a:pPr>
+            <a:r>
+              <a:rPr sz="1400" b="0" i="0">
+                <a:solidFill>
+                  <a:srgbClr val="14303D"/>
+                </a:solidFill>
+              </a:rPr>
+              <a:t>•  More survey-log adapters; CI toward a turnkey installer</a:t>
             </a:r>
           </a:p>
         </p:txBody>
@@ -5393,7 +9995,7 @@
 </p:sld>
 </file>
 
-<file path=ppt/slides/slide2.xml><?xml version="1.0" encoding="utf-8"?>
+<file path=ppt/slides/slide29.xml><?xml version="1.0" encoding="utf-8"?>
 <p:sld xmlns:a="http://schemas.openxmlformats.org/drawingml/2006/main" xmlns:p="http://schemas.openxmlformats.org/presentationml/2006/main" xmlns:r="http://schemas.openxmlformats.org/officeDocument/2006/relationships">
   <p:cSld>
     <p:spTree>
@@ -5432,7 +10034,7 @@
                   <a:srgbClr val="1A5276"/>
                 </a:solidFill>
               </a:rPr>
-              <a:t>Recap — what it is</a:t>
+              <a:t>Would you use it?</a:t>
             </a:r>
           </a:p>
         </p:txBody>
@@ -5440,6 +10042,995 @@
       <p:sp>
         <p:nvSpPr>
           <p:cNvPr id="3" name="TextBox 2"/>
+          <p:cNvSpPr txBox="1"/>
+          <p:nvPr/>
+        </p:nvSpPr>
+        <p:spPr>
+          <a:xfrm>
+            <a:off x="548640" y="1554480"/>
+            <a:ext cx="5394960" cy="4572000"/>
+          </a:xfrm>
+          <a:prstGeom prst="rect">
+            <a:avLst/>
+          </a:prstGeom>
+          <a:noFill/>
+        </p:spPr>
+        <p:txBody>
+          <a:bodyPr wrap="square">
+            <a:spAutoFit/>
+          </a:bodyPr>
+          <a:lstStyle/>
+          <a:p>
+            <a:pPr algn="l"/>
+            <a:r>
+              <a:rPr sz="1800" b="1" i="0">
+                <a:solidFill>
+                  <a:srgbClr val="0E6E6E"/>
+                </a:solidFill>
+              </a:rPr>
+              <a:t>Who it's for</a:t>
+            </a:r>
+          </a:p>
+          <a:p>
+            <a:pPr algn="l">
+              <a:spcAft>
+                <a:spcPts val="600"/>
+              </a:spcAft>
+            </a:pPr>
+            <a:r>
+              <a:rPr sz="1400" b="0" i="0">
+                <a:solidFill>
+                  <a:srgbClr val="14303D"/>
+                </a:solidFill>
+              </a:rPr>
+              <a:t>•  Benthic ecologists &amp; seabed-mapping teams doing ground-truthing</a:t>
+            </a:r>
+          </a:p>
+          <a:p>
+            <a:pPr algn="l">
+              <a:spcAft>
+                <a:spcPts val="600"/>
+              </a:spcAft>
+            </a:pPr>
+            <a:r>
+              <a:rPr sz="1400" b="0" i="0">
+                <a:solidFill>
+                  <a:srgbClr val="14303D"/>
+                </a:solidFill>
+              </a:rPr>
+              <a:t>•  Anyone who wants acoustics, imagery and video on the same map without stitching five tools together</a:t>
+            </a:r>
+          </a:p>
+          <a:p>
+            <a:pPr algn="l">
+              <a:spcAft>
+                <a:spcPts val="600"/>
+              </a:spcAft>
+            </a:pPr>
+            <a:r>
+              <a:rPr sz="1400" b="0" i="0">
+                <a:solidFill>
+                  <a:srgbClr val="14303D"/>
+                </a:solidFill>
+              </a:rPr>
+              <a:t>•  New: anyone who needs quantitative seabed geometry from imagery they already have — without building a photogrammetry pipeline</a:t>
+            </a:r>
+          </a:p>
+        </p:txBody>
+      </p:sp>
+      <p:sp>
+        <p:nvSpPr>
+          <p:cNvPr id="4" name="TextBox 3"/>
+          <p:cNvSpPr txBox="1"/>
+          <p:nvPr/>
+        </p:nvSpPr>
+        <p:spPr>
+          <a:xfrm>
+            <a:off x="6309360" y="1554480"/>
+            <a:ext cx="5394960" cy="4572000"/>
+          </a:xfrm>
+          <a:prstGeom prst="rect">
+            <a:avLst/>
+          </a:prstGeom>
+          <a:noFill/>
+        </p:spPr>
+        <p:txBody>
+          <a:bodyPr wrap="square">
+            <a:spAutoFit/>
+          </a:bodyPr>
+          <a:lstStyle/>
+          <a:p>
+            <a:pPr algn="l"/>
+            <a:r>
+              <a:rPr sz="1800" b="1" i="0">
+                <a:solidFill>
+                  <a:srgbClr val="0E6E6E"/>
+                </a:solidFill>
+              </a:rPr>
+              <a:t>Honest take</a:t>
+            </a:r>
+          </a:p>
+          <a:p>
+            <a:pPr algn="l">
+              <a:spcAft>
+                <a:spcPts val="600"/>
+              </a:spcAft>
+            </a:pPr>
+            <a:r>
+              <a:rPr sz="1400" b="0" i="0">
+                <a:solidFill>
+                  <a:srgbClr val="14303D"/>
+                </a:solidFill>
+              </a:rPr>
+              <a:t>•  Purely acoustic processing → keep your specialist suite</a:t>
+            </a:r>
+          </a:p>
+          <a:p>
+            <a:pPr algn="l">
+              <a:spcAft>
+                <a:spcPts val="600"/>
+              </a:spcAft>
+            </a:pPr>
+            <a:r>
+              <a:rPr sz="1400" b="0" i="0">
+                <a:solidFill>
+                  <a:srgbClr val="14303D"/>
+                </a:solidFill>
+              </a:rPr>
+              <a:t>•  Sub-metre optical geometry at survey scale with full bundle adjustment → this is not a photogrammetry suite (yet)</a:t>
+            </a:r>
+          </a:p>
+          <a:p>
+            <a:pPr algn="l">
+              <a:spcAft>
+                <a:spcPts val="600"/>
+              </a:spcAft>
+            </a:pPr>
+            <a:r>
+              <a:rPr sz="1400" b="0" i="0">
+                <a:solidFill>
+                  <a:srgbClr val="14303D"/>
+                </a:solidFill>
+              </a:rPr>
+              <a:t>•  Interpretation + ground-truth + reporting across data types, inside GIS, open and scriptable → yes, and the optical side now measures as well as displays</a:t>
+            </a:r>
+          </a:p>
+        </p:txBody>
+      </p:sp>
+    </p:spTree>
+  </p:cSld>
+  <p:clrMapOvr>
+    <a:masterClrMapping/>
+  </p:clrMapOvr>
+</p:sld>
+</file>
+
+<file path=ppt/slides/slide3.xml><?xml version="1.0" encoding="utf-8"?>
+<p:sld xmlns:a="http://schemas.openxmlformats.org/drawingml/2006/main" xmlns:p="http://schemas.openxmlformats.org/presentationml/2006/main" xmlns:r="http://schemas.openxmlformats.org/officeDocument/2006/relationships">
+  <p:cSld>
+    <p:spTree>
+      <p:nvGrpSpPr>
+        <p:cNvPr id="1" name=""/>
+        <p:cNvGrpSpPr/>
+        <p:nvPr/>
+      </p:nvGrpSpPr>
+      <p:grpSpPr/>
+      <p:sp>
+        <p:nvSpPr>
+          <p:cNvPr id="2" name="TextBox 1"/>
+          <p:cNvSpPr txBox="1"/>
+          <p:nvPr/>
+        </p:nvSpPr>
+        <p:spPr>
+          <a:xfrm>
+            <a:off x="502920" y="320040"/>
+            <a:ext cx="11155680" cy="914400"/>
+          </a:xfrm>
+          <a:prstGeom prst="rect">
+            <a:avLst/>
+          </a:prstGeom>
+          <a:noFill/>
+        </p:spPr>
+        <p:txBody>
+          <a:bodyPr wrap="square">
+            <a:spAutoFit/>
+          </a:bodyPr>
+          <a:lstStyle/>
+          <a:p>
+            <a:pPr algn="l"/>
+            <a:r>
+              <a:rPr sz="3000" b="1" i="0">
+                <a:solidFill>
+                  <a:srgbClr val="1A5276"/>
+                </a:solidFill>
+              </a:rPr>
+              <a:t>Where it stands today</a:t>
+            </a:r>
+          </a:p>
+        </p:txBody>
+      </p:sp>
+      <p:graphicFrame>
+        <p:nvGraphicFramePr>
+          <p:cNvPr id="3" name="Table 2"/>
+          <p:cNvGraphicFramePr>
+            <a:graphicFrameLocks noGrp="1"/>
+          </p:cNvGraphicFramePr>
+          <p:nvPr/>
+        </p:nvGraphicFramePr>
+        <p:xfrm>
+          <a:off x="640080" y="1371600"/>
+          <a:ext cx="10881360" cy="1280160"/>
+        </p:xfrm>
+        <a:graphic>
+          <a:graphicData uri="http://schemas.openxmlformats.org/drawingml/2006/table">
+            <a:tbl>
+              <a:tblPr firstRow="1" bandRow="1">
+                <a:tableStyleId>{5C22544A-7EE6-4342-B048-85BDC9FD1C3A}</a:tableStyleId>
+              </a:tblPr>
+              <a:tblGrid>
+                <a:gridCol w="1813560"/>
+                <a:gridCol w="9067800"/>
+              </a:tblGrid>
+              <a:tr h="256032">
+                <a:tc>
+                  <a:txBody>
+                    <a:bodyPr wrap="square"/>
+                    <a:lstStyle/>
+                    <a:p>
+                      <a:pPr algn="l"/>
+                      <a:r>
+                        <a:rPr sz="1100" b="1" i="0">
+                          <a:solidFill>
+                            <a:srgbClr val="FFFFFF"/>
+                          </a:solidFill>
+                        </a:rPr>
+                        <a:t>when</a:t>
+                      </a:r>
+                    </a:p>
+                  </a:txBody>
+                  <a:tcPr marL="54864" marR="54864" marT="18288" marB="18288" anchor="ctr">
+                    <a:solidFill>
+                      <a:srgbClr val="1A5276"/>
+                    </a:solidFill>
+                  </a:tcPr>
+                </a:tc>
+                <a:tc>
+                  <a:txBody>
+                    <a:bodyPr wrap="square"/>
+                    <a:lstStyle/>
+                    <a:p>
+                      <a:pPr algn="l"/>
+                      <a:r>
+                        <a:rPr sz="1100" b="1" i="0">
+                          <a:solidFill>
+                            <a:srgbClr val="FFFFFF"/>
+                          </a:solidFill>
+                        </a:rPr>
+                        <a:t>what landed</a:t>
+                      </a:r>
+                    </a:p>
+                  </a:txBody>
+                  <a:tcPr marL="54864" marR="54864" marT="18288" marB="18288" anchor="ctr">
+                    <a:solidFill>
+                      <a:srgbClr val="1A5276"/>
+                    </a:solidFill>
+                  </a:tcPr>
+                </a:tc>
+              </a:tr>
+              <a:tr h="256032">
+                <a:tc>
+                  <a:txBody>
+                    <a:bodyPr wrap="square"/>
+                    <a:lstStyle/>
+                    <a:p>
+                      <a:pPr algn="l"/>
+                      <a:r>
+                        <a:rPr sz="1100" b="0" i="0">
+                          <a:solidFill>
+                            <a:srgbClr val="14303D"/>
+                          </a:solidFill>
+                        </a:rPr>
+                        <a:t>Apr 2026</a:t>
+                      </a:r>
+                    </a:p>
+                  </a:txBody>
+                  <a:tcPr marL="54864" marR="54864" marT="18288" marB="18288" anchor="ctr">
+                    <a:solidFill>
+                      <a:srgbClr val="FFFFFF"/>
+                    </a:solidFill>
+                  </a:tcPr>
+                </a:tc>
+                <a:tc>
+                  <a:txBody>
+                    <a:bodyPr wrap="square"/>
+                    <a:lstStyle/>
+                    <a:p>
+                      <a:pPr algn="l"/>
+                      <a:r>
+                        <a:rPr sz="1100" b="0" i="0">
+                          <a:solidFill>
+                            <a:srgbClr val="14303D"/>
+                          </a:solidFill>
+                        </a:rPr>
+                        <a:t>Port to QGIS 4 / Qt 6, Python 3.14, dock UI, video player</a:t>
+                      </a:r>
+                    </a:p>
+                  </a:txBody>
+                  <a:tcPr marL="54864" marR="54864" marT="18288" marB="18288" anchor="ctr">
+                    <a:solidFill>
+                      <a:srgbClr val="FFFFFF"/>
+                    </a:solidFill>
+                  </a:tcPr>
+                </a:tc>
+              </a:tr>
+              <a:tr h="256032">
+                <a:tc>
+                  <a:txBody>
+                    <a:bodyPr wrap="square"/>
+                    <a:lstStyle/>
+                    <a:p>
+                      <a:pPr algn="l"/>
+                      <a:r>
+                        <a:rPr sz="1100" b="0" i="0">
+                          <a:solidFill>
+                            <a:srgbClr val="14303D"/>
+                          </a:solidFill>
+                        </a:rPr>
+                        <a:t>Jun 2026</a:t>
+                      </a:r>
+                    </a:p>
+                  </a:txBody>
+                  <a:tcPr marL="54864" marR="54864" marT="18288" marB="18288" anchor="ctr">
+                    <a:solidFill>
+                      <a:srgbClr val="FFFFFF"/>
+                    </a:solidFill>
+                  </a:tcPr>
+                </a:tc>
+                <a:tc>
+                  <a:txBody>
+                    <a:bodyPr wrap="square"/>
+                    <a:lstStyle/>
+                    <a:p>
+                      <a:pPr algn="l"/>
+                      <a:r>
+                        <a:rPr sz="1100" b="0" i="0">
+                          <a:solidFill>
+                            <a:srgbClr val="14303D"/>
+                          </a:solidFill>
+                        </a:rPr>
+                        <a:t>FastGIS authenticated GRASS API · session persistence · stereo roughness, micro-DEM 3-D and georeferenced mosaics</a:t>
+                      </a:r>
+                    </a:p>
+                  </a:txBody>
+                  <a:tcPr marL="54864" marR="54864" marT="18288" marB="18288" anchor="ctr">
+                    <a:solidFill>
+                      <a:srgbClr val="FFFFFF"/>
+                    </a:solidFill>
+                  </a:tcPr>
+                </a:tc>
+              </a:tr>
+              <a:tr h="256032">
+                <a:tc>
+                  <a:txBody>
+                    <a:bodyPr wrap="square"/>
+                    <a:lstStyle/>
+                    <a:p>
+                      <a:pPr algn="l"/>
+                      <a:r>
+                        <a:rPr sz="1100" b="0" i="0">
+                          <a:solidFill>
+                            <a:srgbClr val="14303D"/>
+                          </a:solidFill>
+                        </a:rPr>
+                        <a:t>Sep 2026</a:t>
+                      </a:r>
+                    </a:p>
+                  </a:txBody>
+                  <a:tcPr marL="54864" marR="54864" marT="18288" marB="18288" anchor="ctr">
+                    <a:solidFill>
+                      <a:srgbClr val="FFFFFF"/>
+                    </a:solidFill>
+                  </a:tcPr>
+                </a:tc>
+                <a:tc>
+                  <a:txBody>
+                    <a:bodyPr wrap="square"/>
+                    <a:lstStyle/>
+                    <a:p>
+                      <a:pPr algn="l"/>
+                      <a:r>
+                        <a:rPr sz="1100" b="0" i="0">
+                          <a:solidFill>
+                            <a:srgbClr val="14303D"/>
+                          </a:solidFill>
+                        </a:rPr>
+                        <a:t>Config hardening · full docs site · the 180° georeference fix · the photogrammetric seabed ribbon</a:t>
+                      </a:r>
+                    </a:p>
+                  </a:txBody>
+                  <a:tcPr marL="54864" marR="54864" marT="18288" marB="18288" anchor="ctr">
+                    <a:solidFill>
+                      <a:srgbClr val="FFFFFF"/>
+                    </a:solidFill>
+                  </a:tcPr>
+                </a:tc>
+              </a:tr>
+              <a:tr h="256032">
+                <a:tc>
+                  <a:txBody>
+                    <a:bodyPr wrap="square"/>
+                    <a:lstStyle/>
+                    <a:p>
+                      <a:pPr algn="l"/>
+                      <a:r>
+                        <a:rPr sz="1100" b="0" i="0">
+                          <a:solidFill>
+                            <a:srgbClr val="14303D"/>
+                          </a:solidFill>
+                        </a:rPr>
+                        <a:t>in parallel</a:t>
+                      </a:r>
+                    </a:p>
+                  </a:txBody>
+                  <a:tcPr marL="54864" marR="54864" marT="18288" marB="18288" anchor="ctr">
+                    <a:solidFill>
+                      <a:srgbClr val="FFFFFF"/>
+                    </a:solidFill>
+                  </a:tcPr>
+                </a:tc>
+                <a:tc>
+                  <a:txBody>
+                    <a:bodyPr wrap="square"/>
+                    <a:lstStyle/>
+                    <a:p>
+                      <a:pPr algn="l"/>
+                      <a:r>
+                        <a:rPr sz="1100" b="0" i="0">
+                          <a:solidFill>
+                            <a:srgbClr val="14303D"/>
+                          </a:solidFill>
+                        </a:rPr>
+                        <a:t>HRS1508 — a frozen-manifest analysis asking whether stereo roughness actually adds to acoustics</a:t>
+                      </a:r>
+                    </a:p>
+                  </a:txBody>
+                  <a:tcPr marL="54864" marR="54864" marT="18288" marB="18288" anchor="ctr">
+                    <a:solidFill>
+                      <a:srgbClr val="FFFFFF"/>
+                    </a:solidFill>
+                  </a:tcPr>
+                </a:tc>
+              </a:tr>
+            </a:tbl>
+          </a:graphicData>
+        </a:graphic>
+      </p:graphicFrame>
+      <p:sp>
+        <p:nvSpPr>
+          <p:cNvPr id="4" name="TextBox 3"/>
+          <p:cNvSpPr txBox="1"/>
+          <p:nvPr/>
+        </p:nvSpPr>
+        <p:spPr>
+          <a:xfrm>
+            <a:off x="640080" y="2852928"/>
+            <a:ext cx="10972800" cy="914400"/>
+          </a:xfrm>
+          <a:prstGeom prst="rect">
+            <a:avLst/>
+          </a:prstGeom>
+          <a:noFill/>
+        </p:spPr>
+        <p:txBody>
+          <a:bodyPr wrap="square">
+            <a:spAutoFit/>
+          </a:bodyPr>
+          <a:lstStyle/>
+          <a:p>
+            <a:pPr algn="l"/>
+            <a:r>
+              <a:rPr sz="1400" b="1" i="0">
+                <a:solidFill>
+                  <a:srgbClr val="0E6E6E"/>
+                </a:solidFill>
+              </a:rPr>
+              <a:t>Act I — the engineering that made the tool trustworthy · Act II — the new optical-geometry tools · Act III — the first science they made possible.</a:t>
+            </a:r>
+          </a:p>
+        </p:txBody>
+      </p:sp>
+    </p:spTree>
+  </p:cSld>
+  <p:clrMapOvr>
+    <a:masterClrMapping/>
+  </p:clrMapOvr>
+</p:sld>
+</file>
+
+<file path=ppt/slides/slide30.xml><?xml version="1.0" encoding="utf-8"?>
+<p:sld xmlns:a="http://schemas.openxmlformats.org/drawingml/2006/main" xmlns:p="http://schemas.openxmlformats.org/presentationml/2006/main" xmlns:r="http://schemas.openxmlformats.org/officeDocument/2006/relationships">
+  <p:cSld>
+    <p:spTree>
+      <p:nvGrpSpPr>
+        <p:cNvPr id="1" name=""/>
+        <p:cNvGrpSpPr/>
+        <p:nvPr/>
+      </p:nvGrpSpPr>
+      <p:grpSpPr/>
+      <p:sp>
+        <p:nvSpPr>
+          <p:cNvPr id="2" name="TextBox 1"/>
+          <p:cNvSpPr txBox="1"/>
+          <p:nvPr/>
+        </p:nvSpPr>
+        <p:spPr>
+          <a:xfrm>
+            <a:off x="502920" y="320040"/>
+            <a:ext cx="11155680" cy="914400"/>
+          </a:xfrm>
+          <a:prstGeom prst="rect">
+            <a:avLst/>
+          </a:prstGeom>
+          <a:noFill/>
+        </p:spPr>
+        <p:txBody>
+          <a:bodyPr wrap="square">
+            <a:spAutoFit/>
+          </a:bodyPr>
+          <a:lstStyle/>
+          <a:p>
+            <a:pPr algn="l"/>
+            <a:r>
+              <a:rPr sz="3000" b="1" i="0">
+                <a:solidFill>
+                  <a:srgbClr val="1A5276"/>
+                </a:solidFill>
+              </a:rPr>
+              <a:t>Need help setting it up?</a:t>
+            </a:r>
+          </a:p>
+        </p:txBody>
+      </p:sp>
+      <p:sp>
+        <p:nvSpPr>
+          <p:cNvPr id="3" name="TextBox 2"/>
+          <p:cNvSpPr txBox="1"/>
+          <p:nvPr/>
+        </p:nvSpPr>
+        <p:spPr>
+          <a:xfrm>
+            <a:off x="640080" y="1463040"/>
+            <a:ext cx="10972800" cy="4937760"/>
+          </a:xfrm>
+          <a:prstGeom prst="rect">
+            <a:avLst/>
+          </a:prstGeom>
+          <a:noFill/>
+        </p:spPr>
+        <p:txBody>
+          <a:bodyPr wrap="square">
+            <a:spAutoFit/>
+          </a:bodyPr>
+          <a:lstStyle/>
+          <a:p>
+            <a:pPr algn="l">
+              <a:spcAft>
+                <a:spcPts val="600"/>
+              </a:spcAft>
+            </a:pPr>
+            <a:r>
+              <a:rPr sz="1800" b="0" i="0">
+                <a:solidFill>
+                  <a:srgbClr val="14303D"/>
+                </a:solidFill>
+              </a:rPr>
+              <a:t>•  Requirements: QGIS 4.0+ (Qt 6), the bundled .venv, a FastGIS API key for GRASS</a:t>
+            </a:r>
+          </a:p>
+          <a:p>
+            <a:pPr algn="l" lvl="1">
+              <a:spcAft>
+                <a:spcPts val="600"/>
+              </a:spcAft>
+            </a:pPr>
+            <a:r>
+              <a:rPr sz="1500" b="0" i="0">
+                <a:solidFill>
+                  <a:srgbClr val="5B6B76"/>
+                </a:solidFill>
+              </a:rPr>
+              <a:t>–  and roughness (or a direct URL if you run the GPU service yourself)</a:t>
+            </a:r>
+          </a:p>
+          <a:p>
+            <a:pPr algn="l">
+              <a:spcAft>
+                <a:spcPts val="600"/>
+              </a:spcAft>
+            </a:pPr>
+            <a:r>
+              <a:rPr sz="1800" b="0" i="0">
+                <a:solidFill>
+                  <a:srgbClr val="14303D"/>
+                </a:solidFill>
+              </a:rPr>
+              <a:t>•  Install: symlink the repo into your QGIS profile, enable, point Settings at your</a:t>
+            </a:r>
+          </a:p>
+          <a:p>
+            <a:pPr algn="l" lvl="1">
+              <a:spcAft>
+                <a:spcPts val="600"/>
+              </a:spcAft>
+            </a:pPr>
+            <a:r>
+              <a:rPr sz="1500" b="0" i="0">
+                <a:solidFill>
+                  <a:srgbClr val="5B6B76"/>
+                </a:solidFill>
+              </a:rPr>
+              <a:t>–  data — invalid keys now disable only their own feature</a:t>
+            </a:r>
+          </a:p>
+          <a:p>
+            <a:pPr algn="l">
+              <a:spcAft>
+                <a:spcPts val="600"/>
+              </a:spcAft>
+            </a:pPr>
+            <a:r>
+              <a:rPr sz="1800" b="0" i="0">
+                <a:solidFill>
+                  <a:srgbClr val="14303D"/>
+                </a:solidFill>
+              </a:rPr>
+              <a:t>•  Try it: the Zenodo 'groundtruther test dataset' (CC-BY-4.0)</a:t>
+            </a:r>
+          </a:p>
+          <a:p>
+            <a:pPr algn="l">
+              <a:spcAft>
+                <a:spcPts val="600"/>
+              </a:spcAft>
+            </a:pPr>
+            <a:r>
+              <a:rPr sz="1800" b="0" i="0">
+                <a:solidFill>
+                  <a:srgbClr val="14303D"/>
+                </a:solidFill>
+              </a:rPr>
+              <a:t>•  Repo &amp; issues: github.com/epifanio/groundtruther</a:t>
+            </a:r>
+          </a:p>
+          <a:p>
+            <a:pPr algn="l">
+              <a:spcAft>
+                <a:spcPts val="600"/>
+              </a:spcAft>
+            </a:pPr>
+            <a:r>
+              <a:rPr sz="1800" b="0" i="0">
+                <a:solidFill>
+                  <a:srgbClr val="14303D"/>
+                </a:solidFill>
+              </a:rPr>
+              <a:t>•  Docs: epifanio.github.io/groundtruther · dev notes in docs/grass_fastgis.md</a:t>
+            </a:r>
+          </a:p>
+          <a:p>
+            <a:pPr algn="l" lvl="1">
+              <a:spcAft>
+                <a:spcPts val="600"/>
+              </a:spcAft>
+            </a:pPr>
+            <a:r>
+              <a:rPr sz="1500" b="0" i="0">
+                <a:solidFill>
+                  <a:srgbClr val="5B6B76"/>
+                </a:solidFill>
+              </a:rPr>
+              <a:t>–  and docs/photogrammetric_ribbon.md</a:t>
+            </a:r>
+          </a:p>
+          <a:p>
+            <a:pPr algn="l">
+              <a:spcAft>
+                <a:spcPts val="600"/>
+              </a:spcAft>
+            </a:pPr>
+            <a:r>
+              <a:rPr sz="1800" b="0" i="0">
+                <a:solidFill>
+                  <a:srgbClr val="14303D"/>
+                </a:solidFill>
+              </a:rPr>
+              <a:t>•  Analysis workflow: PDAL_MBIO/paper — frozen manifest, notebooks 00→09</a:t>
+            </a:r>
+          </a:p>
+          <a:p>
+            <a:pPr algn="l">
+              <a:spcAft>
+                <a:spcPts val="600"/>
+              </a:spcAft>
+            </a:pPr>
+            <a:r>
+              <a:rPr sz="1800" b="0" i="0">
+                <a:solidFill>
+                  <a:srgbClr val="14303D"/>
+                </a:solidFill>
+              </a:rPr>
+              <a:t>•  Happy to walk you through install, config, or your own dataset.</a:t>
+            </a:r>
+          </a:p>
+        </p:txBody>
+      </p:sp>
+    </p:spTree>
+  </p:cSld>
+  <p:clrMapOvr>
+    <a:masterClrMapping/>
+  </p:clrMapOvr>
+</p:sld>
+</file>
+
+<file path=ppt/slides/slide31.xml><?xml version="1.0" encoding="utf-8"?>
+<p:sld xmlns:a="http://schemas.openxmlformats.org/drawingml/2006/main" xmlns:p="http://schemas.openxmlformats.org/presentationml/2006/main" xmlns:r="http://schemas.openxmlformats.org/officeDocument/2006/relationships">
+  <p:cSld>
+    <p:spTree>
+      <p:nvGrpSpPr>
+        <p:cNvPr id="1" name=""/>
+        <p:cNvGrpSpPr/>
+        <p:nvPr/>
+      </p:nvGrpSpPr>
+      <p:grpSpPr/>
+      <p:sp>
+        <p:nvSpPr>
+          <p:cNvPr id="2" name="TextBox 1"/>
+          <p:cNvSpPr txBox="1"/>
+          <p:nvPr/>
+        </p:nvSpPr>
+        <p:spPr>
+          <a:xfrm>
+            <a:off x="914400" y="2103120"/>
+            <a:ext cx="10332720" cy="2743200"/>
+          </a:xfrm>
+          <a:prstGeom prst="rect">
+            <a:avLst/>
+          </a:prstGeom>
+          <a:noFill/>
+        </p:spPr>
+        <p:txBody>
+          <a:bodyPr wrap="square">
+            <a:spAutoFit/>
+          </a:bodyPr>
+          <a:lstStyle/>
+          <a:p>
+            <a:pPr algn="ctr"/>
+            <a:r>
+              <a:rPr sz="4600" b="1" i="0">
+                <a:solidFill>
+                  <a:srgbClr val="1A5276"/>
+                </a:solidFill>
+              </a:rPr>
+              <a:t>Thank you</a:t>
+            </a:r>
+          </a:p>
+          <a:p>
+            <a:pPr algn="ctr">
+              <a:spcBef>
+                <a:spcPts val="800"/>
+              </a:spcBef>
+            </a:pPr>
+            <a:r>
+              <a:rPr sz="2400" b="1" i="0">
+                <a:solidFill>
+                  <a:srgbClr val="0E6E6E"/>
+                </a:solidFill>
+              </a:rPr>
+              <a:t>GroundTruther · v0.4 · QGIS 4 / Qt 6</a:t>
+            </a:r>
+          </a:p>
+          <a:p>
+            <a:pPr algn="ctr"/>
+            <a:r>
+              <a:rPr sz="1500" b="0" i="0">
+                <a:solidFill>
+                  <a:srgbClr val="5B6B76"/>
+                </a:solidFill>
+              </a:rPr>
+              <a:t>MBES · imagery · video · stereo geometry · roughness · mosaics · ribbon · report</a:t>
+            </a:r>
+          </a:p>
+          <a:p>
+            <a:pPr algn="ctr"/>
+            <a:r>
+              <a:rPr sz="1500" b="0" i="0">
+                <a:solidFill>
+                  <a:srgbClr val="5B6B76"/>
+                </a:solidFill>
+              </a:rPr>
+              <a:t>github.com/epifanio/groundtruther · epifanio.github.io/groundtruther</a:t>
+            </a:r>
+          </a:p>
+        </p:txBody>
+      </p:sp>
+    </p:spTree>
+  </p:cSld>
+  <p:clrMapOvr>
+    <a:masterClrMapping/>
+  </p:clrMapOvr>
+</p:sld>
+</file>
+
+<file path=ppt/slides/slide4.xml><?xml version="1.0" encoding="utf-8"?>
+<p:sld xmlns:a="http://schemas.openxmlformats.org/drawingml/2006/main" xmlns:p="http://schemas.openxmlformats.org/presentationml/2006/main" xmlns:r="http://schemas.openxmlformats.org/officeDocument/2006/relationships">
+  <p:cSld>
+    <p:spTree>
+      <p:nvGrpSpPr>
+        <p:cNvPr id="1" name=""/>
+        <p:cNvGrpSpPr/>
+        <p:nvPr/>
+      </p:nvGrpSpPr>
+      <p:grpSpPr/>
+      <p:sp>
+        <p:nvSpPr>
+          <p:cNvPr id="2" name="TextBox 1"/>
+          <p:cNvSpPr txBox="1"/>
+          <p:nvPr/>
+        </p:nvSpPr>
+        <p:spPr>
+          <a:xfrm>
+            <a:off x="914400" y="2194560"/>
+            <a:ext cx="10332720" cy="2560320"/>
+          </a:xfrm>
+          <a:prstGeom prst="rect">
+            <a:avLst/>
+          </a:prstGeom>
+          <a:noFill/>
+        </p:spPr>
+        <p:txBody>
+          <a:bodyPr wrap="square">
+            <a:spAutoFit/>
+          </a:bodyPr>
+          <a:lstStyle/>
+          <a:p>
+            <a:pPr algn="ctr"/>
+            <a:r>
+              <a:rPr sz="5000" b="1" i="0">
+                <a:solidFill>
+                  <a:srgbClr val="1A5276"/>
+                </a:solidFill>
+              </a:rPr>
+              <a:t>Act I</a:t>
+            </a:r>
+          </a:p>
+          <a:p>
+            <a:pPr algn="ctr">
+              <a:spcBef>
+                <a:spcPts val="800"/>
+              </a:spcBef>
+            </a:pPr>
+            <a:r>
+              <a:rPr sz="2600" b="1" i="0">
+                <a:solidFill>
+                  <a:srgbClr val="0E6E6E"/>
+                </a:solidFill>
+              </a:rPr>
+              <a:t>The platform</a:t>
+            </a:r>
+          </a:p>
+          <a:p>
+            <a:pPr algn="ctr"/>
+            <a:r>
+              <a:rPr sz="1400" b="0" i="0">
+                <a:solidFill>
+                  <a:srgbClr val="5B6B76"/>
+                </a:solidFill>
+              </a:rPr>
+              <a:t>QGIS 4 / Qt 6 · docks &amp; sessions · configuration · internals ·</a:t>
+            </a:r>
+          </a:p>
+          <a:p>
+            <a:pPr algn="ctr"/>
+            <a:r>
+              <a:rPr sz="1400" b="0" i="0">
+                <a:solidFill>
+                  <a:srgbClr val="5B6B76"/>
+                </a:solidFill>
+              </a:rPr>
+              <a:t>FastGIS · query builder · video · reports · docs</a:t>
+            </a:r>
+          </a:p>
+        </p:txBody>
+      </p:sp>
+    </p:spTree>
+  </p:cSld>
+  <p:clrMapOvr>
+    <a:masterClrMapping/>
+  </p:clrMapOvr>
+</p:sld>
+</file>
+
+<file path=ppt/slides/slide5.xml><?xml version="1.0" encoding="utf-8"?>
+<p:sld xmlns:a="http://schemas.openxmlformats.org/drawingml/2006/main" xmlns:p="http://schemas.openxmlformats.org/presentationml/2006/main" xmlns:r="http://schemas.openxmlformats.org/officeDocument/2006/relationships">
+  <p:cSld>
+    <p:spTree>
+      <p:nvGrpSpPr>
+        <p:cNvPr id="1" name=""/>
+        <p:cNvGrpSpPr/>
+        <p:nvPr/>
+      </p:nvGrpSpPr>
+      <p:grpSpPr/>
+      <p:sp>
+        <p:nvSpPr>
+          <p:cNvPr id="2" name="TextBox 1"/>
+          <p:cNvSpPr txBox="1"/>
+          <p:nvPr/>
+        </p:nvSpPr>
+        <p:spPr>
+          <a:xfrm>
+            <a:off x="502920" y="320040"/>
+            <a:ext cx="11155680" cy="914400"/>
+          </a:xfrm>
+          <a:prstGeom prst="rect">
+            <a:avLst/>
+          </a:prstGeom>
+          <a:noFill/>
+        </p:spPr>
+        <p:txBody>
+          <a:bodyPr wrap="square">
+            <a:spAutoFit/>
+          </a:bodyPr>
+          <a:lstStyle/>
+          <a:p>
+            <a:pPr algn="l"/>
+            <a:r>
+              <a:rPr sz="3000" b="1" i="0">
+                <a:solidFill>
+                  <a:srgbClr val="1A5276"/>
+                </a:solidFill>
+              </a:rPr>
+              <a:t>QGIS 4 / Qt 6 support</a:t>
+            </a:r>
+          </a:p>
+        </p:txBody>
+      </p:sp>
+      <p:sp>
+        <p:nvSpPr>
+          <p:cNvPr id="3" name="TextBox 2"/>
+          <p:cNvSpPr txBox="1"/>
+          <p:nvPr/>
+        </p:nvSpPr>
+        <p:spPr>
+          <a:xfrm>
+            <a:off x="10058400" y="457200"/>
+            <a:ext cx="1737360" cy="457200"/>
+          </a:xfrm>
+          <a:prstGeom prst="rect">
+            <a:avLst/>
+          </a:prstGeom>
+          <a:noFill/>
+        </p:spPr>
+        <p:txBody>
+          <a:bodyPr wrap="none">
+            <a:spAutoFit/>
+          </a:bodyPr>
+          <a:lstStyle/>
+          <a:p>
+            <a:pPr algn="r"/>
+            <a:r>
+              <a:rPr sz="1100" b="1" i="0">
+                <a:solidFill>
+                  <a:srgbClr val="2E86C1"/>
+                </a:solidFill>
+              </a:rPr>
+              <a:t>PLATFORM</a:t>
+            </a:r>
+          </a:p>
+        </p:txBody>
+      </p:sp>
+      <p:sp>
+        <p:nvSpPr>
+          <p:cNvPr id="4" name="TextBox 3"/>
           <p:cNvSpPr txBox="1"/>
           <p:nvPr/>
         </p:nvSpPr>
@@ -5470,7 +11061,7 @@
                   <a:srgbClr val="14303D"/>
                 </a:solidFill>
               </a:rPr>
-              <a:t>•  Runs inside QGIS as a dock-based toolset</a:t>
+              <a:t>•  Full port to QGIS 4.0+ / Qt 6 (system Python 3.14)</a:t>
             </a:r>
           </a:p>
           <a:p>
@@ -5485,7 +11076,22 @@
                   <a:srgbClr val="14303D"/>
                 </a:solidFill>
               </a:rPr>
-              <a:t>•  Joins three data worlds on one map:</a:t>
+              <a:t>•  Qt 6 API rework: scoped enums, exec_ → exec</a:t>
+            </a:r>
+          </a:p>
+          <a:p>
+            <a:pPr algn="l">
+              <a:spcAft>
+                <a:spcPts val="600"/>
+              </a:spcAft>
+            </a:pPr>
+            <a:r>
+              <a:rPr sz="1600" b="0" i="0">
+                <a:solidFill>
+                  <a:srgbClr val="14303D"/>
+                </a:solidFill>
+              </a:rPr>
+              <a:t>•  Fixed Qt 6 dock-walk crashes — register docks with the QGIS main window,</a:t>
             </a:r>
           </a:p>
           <a:p>
@@ -5500,37 +11106,7 @@
                   <a:srgbClr val="5B6B76"/>
                 </a:solidFill>
               </a:rPr>
-              <a:t>–  MBES bathymetry + backscatter (ARA)</a:t>
-            </a:r>
-          </a:p>
-          <a:p>
-            <a:pPr algn="l" lvl="1">
-              <a:spcAft>
-                <a:spcPts val="600"/>
-              </a:spcAft>
-            </a:pPr>
-            <a:r>
-              <a:rPr sz="1300" b="0" i="0">
-                <a:solidFill>
-                  <a:srgbClr val="5B6B76"/>
-                </a:solidFill>
-              </a:rPr>
-              <a:t>–  Seafloor imagery (HabCam-style stills)</a:t>
-            </a:r>
-          </a:p>
-          <a:p>
-            <a:pPr algn="l" lvl="1">
-              <a:spcAft>
-                <a:spcPts val="600"/>
-              </a:spcAft>
-            </a:pPr>
-            <a:r>
-              <a:rPr sz="1300" b="0" i="0">
-                <a:solidFill>
-                  <a:srgbClr val="5B6B76"/>
-                </a:solidFill>
-              </a:rPr>
-              <a:t>–  Survey video with per-frame GPS</a:t>
+              <a:t>–  never with the plugin's inner QMainWindow</a:t>
             </a:r>
           </a:p>
           <a:p>
@@ -5545,7 +11121,7 @@
                   <a:srgbClr val="14303D"/>
                 </a:solidFill>
               </a:rPr>
-              <a:t>•  Ground-truth annotation → statistics → KMZ / HTML reports</a:t>
+              <a:t>•  OpenGL 3-D viewer made Qt 6-safe (PyOpenGL context)</a:t>
             </a:r>
           </a:p>
           <a:p>
@@ -5560,14 +11136,44 @@
                   <a:srgbClr val="14303D"/>
                 </a:solidFill>
               </a:rPr>
-              <a:t>•  Remote GRASS GIS service for geoprocessing</a:t>
-            </a:r>
-          </a:p>
-        </p:txBody>
-      </p:sp>
-      <p:sp>
-        <p:nvSpPr>
-          <p:cNvPr id="4" name="Rounded Rectangle 3"/>
+              <a:t>•  QWebEngineView → QTextBrowser (WebEngine absent from QGIS 4 OSGeo4W)</a:t>
+            </a:r>
+          </a:p>
+          <a:p>
+            <a:pPr algn="l">
+              <a:spcAft>
+                <a:spcPts val="600"/>
+              </a:spcAft>
+            </a:pPr>
+            <a:r>
+              <a:rPr sz="1600" b="0" i="0">
+                <a:solidFill>
+                  <a:srgbClr val="14303D"/>
+                </a:solidFill>
+              </a:rPr>
+              <a:t>•  Wayland: launch QT_QPA_PLATFORM=xcb for floating docks</a:t>
+            </a:r>
+          </a:p>
+          <a:p>
+            <a:pPr algn="l">
+              <a:spcAft>
+                <a:spcPts val="600"/>
+              </a:spcAft>
+            </a:pPr>
+            <a:r>
+              <a:rPr sz="1600" b="0" i="0">
+                <a:solidFill>
+                  <a:srgbClr val="14303D"/>
+                </a:solidFill>
+              </a:rPr>
+              <a:t>•  qgisMinimumVersion = 4.0</a:t>
+            </a:r>
+          </a:p>
+        </p:txBody>
+      </p:sp>
+      <p:sp>
+        <p:nvSpPr>
+          <p:cNvPr id="5" name="Rounded Rectangle 4"/>
           <p:cNvSpPr/>
           <p:nvPr/>
         </p:nvSpPr>
@@ -5625,7 +11231,7 @@
                   <a:srgbClr val="1A5276"/>
                 </a:solidFill>
               </a:rPr>
-              <a:t>GroundTruther docked in QGIS (overview)</a:t>
+              <a:t>plugin running in QGIS 4 (toolbar + docks)</a:t>
             </a:r>
           </a:p>
         </p:txBody>
@@ -5638,7 +11244,7 @@
 </p:sld>
 </file>
 
-<file path=ppt/slides/slide20.xml><?xml version="1.0" encoding="utf-8"?>
+<file path=ppt/slides/slide6.xml><?xml version="1.0" encoding="utf-8"?>
 <p:sld xmlns:a="http://schemas.openxmlformats.org/drawingml/2006/main" xmlns:p="http://schemas.openxmlformats.org/presentationml/2006/main" xmlns:r="http://schemas.openxmlformats.org/officeDocument/2006/relationships">
   <p:cSld>
     <p:spTree>
@@ -5677,411 +11283,7 @@
                   <a:srgbClr val="1A5276"/>
                 </a:solidFill>
               </a:rPr>
-              <a:t>Need help setting it up?</a:t>
-            </a:r>
-          </a:p>
-        </p:txBody>
-      </p:sp>
-      <p:sp>
-        <p:nvSpPr>
-          <p:cNvPr id="3" name="TextBox 2"/>
-          <p:cNvSpPr txBox="1"/>
-          <p:nvPr/>
-        </p:nvSpPr>
-        <p:spPr>
-          <a:xfrm>
-            <a:off x="640080" y="1463040"/>
-            <a:ext cx="10972800" cy="4937760"/>
-          </a:xfrm>
-          <a:prstGeom prst="rect">
-            <a:avLst/>
-          </a:prstGeom>
-          <a:noFill/>
-        </p:spPr>
-        <p:txBody>
-          <a:bodyPr wrap="square">
-            <a:spAutoFit/>
-          </a:bodyPr>
-          <a:lstStyle/>
-          <a:p>
-            <a:pPr algn="l">
-              <a:spcAft>
-                <a:spcPts val="600"/>
-              </a:spcAft>
-            </a:pPr>
-            <a:r>
-              <a:rPr sz="1800" b="0" i="0">
-                <a:solidFill>
-                  <a:srgbClr val="14303D"/>
-                </a:solidFill>
-              </a:rPr>
-              <a:t>•  Requirements: QGIS 4.0+ (Qt 6), the bundled .venv, a FastGIS API key for GRASS</a:t>
-            </a:r>
-          </a:p>
-          <a:p>
-            <a:pPr algn="l">
-              <a:spcAft>
-                <a:spcPts val="600"/>
-              </a:spcAft>
-            </a:pPr>
-            <a:r>
-              <a:rPr sz="1800" b="0" i="0">
-                <a:solidFill>
-                  <a:srgbClr val="14303D"/>
-                </a:solidFill>
-              </a:rPr>
-              <a:t>•  Install: symlink the repo into your QGIS profile, enable, point Settings at your data</a:t>
-            </a:r>
-          </a:p>
-          <a:p>
-            <a:pPr algn="l">
-              <a:spcAft>
-                <a:spcPts val="600"/>
-              </a:spcAft>
-            </a:pPr>
-            <a:r>
-              <a:rPr sz="1800" b="0" i="0">
-                <a:solidFill>
-                  <a:srgbClr val="14303D"/>
-                </a:solidFill>
-              </a:rPr>
-              <a:t>•  Try it: the Zenodo HabCam dataset (and a MAREANO .log + video)</a:t>
-            </a:r>
-          </a:p>
-          <a:p>
-            <a:pPr algn="l">
-              <a:spcAft>
-                <a:spcPts val="600"/>
-              </a:spcAft>
-            </a:pPr>
-            <a:r>
-              <a:rPr sz="1800" b="0" i="0">
-                <a:solidFill>
-                  <a:srgbClr val="14303D"/>
-                </a:solidFill>
-              </a:rPr>
-              <a:t>•  Repo &amp; issues: github.com/epifanio/groundtruther</a:t>
-            </a:r>
-          </a:p>
-          <a:p>
-            <a:pPr algn="l">
-              <a:spcAft>
-                <a:spcPts val="600"/>
-              </a:spcAft>
-            </a:pPr>
-            <a:r>
-              <a:rPr sz="1800" b="0" i="0">
-                <a:solidFill>
-                  <a:srgbClr val="14303D"/>
-                </a:solidFill>
-              </a:rPr>
-              <a:t>•  Docs: GRASS / FastGIS integration guide in docs/</a:t>
-            </a:r>
-          </a:p>
-          <a:p>
-            <a:pPr algn="l">
-              <a:spcAft>
-                <a:spcPts val="600"/>
-              </a:spcAft>
-            </a:pPr>
-            <a:r>
-              <a:rPr sz="1800" b="0" i="0">
-                <a:solidFill>
-                  <a:srgbClr val="14303D"/>
-                </a:solidFill>
-              </a:rPr>
-              <a:t>•  Happy to walk you through install, config, or your own dataset.</a:t>
-            </a:r>
-          </a:p>
-        </p:txBody>
-      </p:sp>
-    </p:spTree>
-  </p:cSld>
-  <p:clrMapOvr>
-    <a:masterClrMapping/>
-  </p:clrMapOvr>
-</p:sld>
-</file>
-
-<file path=ppt/slides/slide21.xml><?xml version="1.0" encoding="utf-8"?>
-<p:sld xmlns:a="http://schemas.openxmlformats.org/drawingml/2006/main" xmlns:p="http://schemas.openxmlformats.org/presentationml/2006/main" xmlns:r="http://schemas.openxmlformats.org/officeDocument/2006/relationships">
-  <p:cSld>
-    <p:spTree>
-      <p:nvGrpSpPr>
-        <p:cNvPr id="1" name=""/>
-        <p:cNvGrpSpPr/>
-        <p:nvPr/>
-      </p:nvGrpSpPr>
-      <p:grpSpPr/>
-      <p:sp>
-        <p:nvSpPr>
-          <p:cNvPr id="2" name="TextBox 1"/>
-          <p:cNvSpPr txBox="1"/>
-          <p:nvPr/>
-        </p:nvSpPr>
-        <p:spPr>
-          <a:xfrm>
-            <a:off x="914400" y="2103120"/>
-            <a:ext cx="10332720" cy="2743200"/>
-          </a:xfrm>
-          <a:prstGeom prst="rect">
-            <a:avLst/>
-          </a:prstGeom>
-          <a:noFill/>
-        </p:spPr>
-        <p:txBody>
-          <a:bodyPr wrap="square">
-            <a:spAutoFit/>
-          </a:bodyPr>
-          <a:lstStyle/>
-          <a:p>
-            <a:pPr algn="ctr"/>
-            <a:r>
-              <a:rPr sz="4600" b="1" i="0">
-                <a:solidFill>
-                  <a:srgbClr val="1A5276"/>
-                </a:solidFill>
-              </a:rPr>
-              <a:t>Thank you</a:t>
-            </a:r>
-          </a:p>
-          <a:p>
-            <a:pPr algn="ctr">
-              <a:spcBef>
-                <a:spcPts val="800"/>
-              </a:spcBef>
-            </a:pPr>
-            <a:r>
-              <a:rPr sz="2400" b="1" i="0">
-                <a:solidFill>
-                  <a:srgbClr val="0E6E6E"/>
-                </a:solidFill>
-              </a:rPr>
-              <a:t>GroundTruther · v0.4 · QGIS 4 / Qt 6</a:t>
-            </a:r>
-          </a:p>
-          <a:p>
-            <a:pPr algn="ctr"/>
-            <a:r>
-              <a:rPr sz="1500" b="0" i="0">
-                <a:solidFill>
-                  <a:srgbClr val="5B6B76"/>
-                </a:solidFill>
-              </a:rPr>
-              <a:t>MBES · imagery · video · GRASS · ground-truth · report</a:t>
-            </a:r>
-          </a:p>
-          <a:p>
-            <a:pPr algn="ctr"/>
-            <a:r>
-              <a:rPr sz="1500" b="0" i="0">
-                <a:solidFill>
-                  <a:srgbClr val="5B6B76"/>
-                </a:solidFill>
-              </a:rPr>
-              <a:t>github.com/epifanio/groundtruther</a:t>
-            </a:r>
-          </a:p>
-        </p:txBody>
-      </p:sp>
-    </p:spTree>
-  </p:cSld>
-  <p:clrMapOvr>
-    <a:masterClrMapping/>
-  </p:clrMapOvr>
-</p:sld>
-</file>
-
-<file path=ppt/slides/slide3.xml><?xml version="1.0" encoding="utf-8"?>
-<p:sld xmlns:a="http://schemas.openxmlformats.org/drawingml/2006/main" xmlns:p="http://schemas.openxmlformats.org/presentationml/2006/main" xmlns:r="http://schemas.openxmlformats.org/officeDocument/2006/relationships">
-  <p:cSld>
-    <p:spTree>
-      <p:nvGrpSpPr>
-        <p:cNvPr id="1" name=""/>
-        <p:cNvGrpSpPr/>
-        <p:nvPr/>
-      </p:nvGrpSpPr>
-      <p:grpSpPr/>
-      <p:sp>
-        <p:nvSpPr>
-          <p:cNvPr id="2" name="TextBox 1"/>
-          <p:cNvSpPr txBox="1"/>
-          <p:nvPr/>
-        </p:nvSpPr>
-        <p:spPr>
-          <a:xfrm>
-            <a:off x="502920" y="320040"/>
-            <a:ext cx="11155680" cy="914400"/>
-          </a:xfrm>
-          <a:prstGeom prst="rect">
-            <a:avLst/>
-          </a:prstGeom>
-          <a:noFill/>
-        </p:spPr>
-        <p:txBody>
-          <a:bodyPr wrap="square">
-            <a:spAutoFit/>
-          </a:bodyPr>
-          <a:lstStyle/>
-          <a:p>
-            <a:pPr algn="l"/>
-            <a:r>
-              <a:rPr sz="3000" b="1" i="0">
-                <a:solidFill>
-                  <a:srgbClr val="1A5276"/>
-                </a:solidFill>
-              </a:rPr>
-              <a:t>Timeline</a:t>
-            </a:r>
-          </a:p>
-        </p:txBody>
-      </p:sp>
-      <p:sp>
-        <p:nvSpPr>
-          <p:cNvPr id="3" name="TextBox 2"/>
-          <p:cNvSpPr txBox="1"/>
-          <p:nvPr/>
-        </p:nvSpPr>
-        <p:spPr>
-          <a:xfrm>
-            <a:off x="640080" y="1463040"/>
-            <a:ext cx="10972800" cy="4937760"/>
-          </a:xfrm>
-          <a:prstGeom prst="rect">
-            <a:avLst/>
-          </a:prstGeom>
-          <a:noFill/>
-        </p:spPr>
-        <p:txBody>
-          <a:bodyPr wrap="square">
-            <a:spAutoFit/>
-          </a:bodyPr>
-          <a:lstStyle/>
-          <a:p>
-            <a:pPr algn="l">
-              <a:spcAft>
-                <a:spcPts val="600"/>
-              </a:spcAft>
-            </a:pPr>
-            <a:r>
-              <a:rPr sz="1800" b="0" i="0">
-                <a:solidFill>
-                  <a:srgbClr val="14303D"/>
-                </a:solidFill>
-              </a:rPr>
-              <a:t>•  Paper release → first public, working tool</a:t>
-            </a:r>
-          </a:p>
-          <a:p>
-            <a:pPr algn="l">
-              <a:spcAft>
-                <a:spcPts val="600"/>
-              </a:spcAft>
-            </a:pPr>
-            <a:r>
-              <a:rPr sz="1800" b="0" i="0">
-                <a:solidFill>
-                  <a:srgbClr val="14303D"/>
-                </a:solidFill>
-              </a:rPr>
-              <a:t>•  This winter (≈ March 2026) → major modernization cycle begins</a:t>
-            </a:r>
-          </a:p>
-          <a:p>
-            <a:pPr algn="l">
-              <a:spcAft>
-                <a:spcPts val="600"/>
-              </a:spcAft>
-            </a:pPr>
-            <a:r>
-              <a:rPr sz="1800" b="0" i="0">
-                <a:solidFill>
-                  <a:srgbClr val="14303D"/>
-                </a:solidFill>
-              </a:rPr>
-              <a:t>•  Goals: QGIS 4 / Qt 6, a maintainable codebase, video support,</a:t>
-            </a:r>
-          </a:p>
-          <a:p>
-            <a:pPr algn="l" lvl="1">
-              <a:spcAft>
-                <a:spcPts val="600"/>
-              </a:spcAft>
-            </a:pPr>
-            <a:r>
-              <a:rPr sz="1500" b="0" i="0">
-                <a:solidFill>
-                  <a:srgbClr val="5B6B76"/>
-                </a:solidFill>
-              </a:rPr>
-              <a:t>–  and a modern authenticated GRASS API</a:t>
-            </a:r>
-          </a:p>
-          <a:p>
-            <a:pPr algn="l">
-              <a:spcAft>
-                <a:spcPts val="600"/>
-              </a:spcAft>
-            </a:pPr>
-            <a:r>
-              <a:rPr sz="1800" b="0" i="0">
-                <a:solidFill>
-                  <a:srgbClr val="14303D"/>
-                </a:solidFill>
-              </a:rPr>
-              <a:t>•  This deck = the highlights: platform · UI/UX · install · refactor · API · features · fixes</a:t>
-            </a:r>
-          </a:p>
-        </p:txBody>
-      </p:sp>
-    </p:spTree>
-  </p:cSld>
-  <p:clrMapOvr>
-    <a:masterClrMapping/>
-  </p:clrMapOvr>
-</p:sld>
-</file>
-
-<file path=ppt/slides/slide4.xml><?xml version="1.0" encoding="utf-8"?>
-<p:sld xmlns:a="http://schemas.openxmlformats.org/drawingml/2006/main" xmlns:p="http://schemas.openxmlformats.org/presentationml/2006/main" xmlns:r="http://schemas.openxmlformats.org/officeDocument/2006/relationships">
-  <p:cSld>
-    <p:spTree>
-      <p:nvGrpSpPr>
-        <p:cNvPr id="1" name=""/>
-        <p:cNvGrpSpPr/>
-        <p:nvPr/>
-      </p:nvGrpSpPr>
-      <p:grpSpPr/>
-      <p:sp>
-        <p:nvSpPr>
-          <p:cNvPr id="2" name="TextBox 1"/>
-          <p:cNvSpPr txBox="1"/>
-          <p:nvPr/>
-        </p:nvSpPr>
-        <p:spPr>
-          <a:xfrm>
-            <a:off x="502920" y="320040"/>
-            <a:ext cx="11155680" cy="914400"/>
-          </a:xfrm>
-          <a:prstGeom prst="rect">
-            <a:avLst/>
-          </a:prstGeom>
-          <a:noFill/>
-        </p:spPr>
-        <p:txBody>
-          <a:bodyPr wrap="square">
-            <a:spAutoFit/>
-          </a:bodyPr>
-          <a:lstStyle/>
-          <a:p>
-            <a:pPr algn="l"/>
-            <a:r>
-              <a:rPr sz="3000" b="1" i="0">
-                <a:solidFill>
-                  <a:srgbClr val="1A5276"/>
-                </a:solidFill>
-              </a:rPr>
-              <a:t>QGIS 4 / Qt 6 support</a:t>
+              <a:t>Dock workspace &amp; session persistence</a:t>
             </a:r>
           </a:p>
         </p:txBody>
@@ -6115,7 +11317,7 @@
                   <a:srgbClr val="2E86C1"/>
                 </a:solidFill>
               </a:rPr>
-              <a:t>PLATFORM</a:t>
+              <a:t>GUI</a:t>
             </a:r>
           </a:p>
         </p:txBody>
@@ -6153,7 +11355,22 @@
                   <a:srgbClr val="14303D"/>
                 </a:solidFill>
               </a:rPr>
-              <a:t>•  Full port to QGIS 4.0+ / Qt 6 (system Python 3.14)</a:t>
+              <a:t>•  Each tool an independent dockable / floatable panel: image browser, video</a:t>
+            </a:r>
+          </a:p>
+          <a:p>
+            <a:pPr algn="l" lvl="1">
+              <a:spcAft>
+                <a:spcPts val="600"/>
+              </a:spcAft>
+            </a:pPr>
+            <a:r>
+              <a:rPr sz="1300" b="0" i="0">
+                <a:solidFill>
+                  <a:srgbClr val="5B6B76"/>
+                </a:solidFill>
+              </a:rPr>
+              <a:t>–  player, query builder, report builder, GRASS tools, seafloor roughness</a:t>
             </a:r>
           </a:p>
           <a:p>
@@ -6168,7 +11385,7 @@
                   <a:srgbClr val="14303D"/>
                 </a:solidFill>
               </a:rPr>
-              <a:t>•  Qt 6 API rework: scoped enums, exec_ → exec</a:t>
+              <a:t>•  'Restore default layout' + reliable save/restore of docked layout</a:t>
             </a:r>
           </a:p>
           <a:p>
@@ -6183,7 +11400,7 @@
                   <a:srgbClr val="14303D"/>
                 </a:solidFill>
               </a:rPr>
-              <a:t>•  Fixed Qt 6 dock-walk crashes (register docks with main window)</a:t>
+              <a:t>•  Session persistence: a groundtruther_project file</a:t>
             </a:r>
           </a:p>
           <a:p>
@@ -6198,7 +11415,7 @@
                   <a:srgbClr val="14303D"/>
                 </a:solidFill>
               </a:rPr>
-              <a:t>•  OpenGL 3-D viewer made Qt 6-safe (PyOpenGL context)</a:t>
+              <a:t>•  Restores image index, zoom, query selection, dock layout, map-sync</a:t>
             </a:r>
           </a:p>
           <a:p>
@@ -6213,22 +11430,7 @@
                   <a:srgbClr val="14303D"/>
                 </a:solidFill>
               </a:rPr>
-              <a:t>•  Wayland: launch QT_QPA_PLATFORM=xcb for floating docks</a:t>
-            </a:r>
-          </a:p>
-          <a:p>
-            <a:pPr algn="l">
-              <a:spcAft>
-                <a:spcPts val="600"/>
-              </a:spcAft>
-            </a:pPr>
-            <a:r>
-              <a:rPr sz="1600" b="0" i="0">
-                <a:solidFill>
-                  <a:srgbClr val="14303D"/>
-                </a:solidFill>
-              </a:rPr>
-              <a:t>•  qgisMinimumVersion = 4.0</a:t>
+              <a:t>•  Written on QGIS project save · loaded at start → resume where you left off</a:t>
             </a:r>
           </a:p>
         </p:txBody>
@@ -6293,7 +11495,7 @@
                   <a:srgbClr val="1A5276"/>
                 </a:solidFill>
               </a:rPr>
-              <a:t>plugin running in QGIS 4 (toolbar + docks)</a:t>
+              <a:t>custom dock layout + Settings (session file field)</a:t>
             </a:r>
           </a:p>
         </p:txBody>
@@ -6306,7 +11508,7 @@
 </p:sld>
 </file>
 
-<file path=ppt/slides/slide5.xml><?xml version="1.0" encoding="utf-8"?>
+<file path=ppt/slides/slide7.xml><?xml version="1.0" encoding="utf-8"?>
 <p:sld xmlns:a="http://schemas.openxmlformats.org/drawingml/2006/main" xmlns:p="http://schemas.openxmlformats.org/presentationml/2006/main" xmlns:r="http://schemas.openxmlformats.org/officeDocument/2006/relationships">
   <p:cSld>
     <p:spTree>
@@ -6345,7 +11547,7 @@
                   <a:srgbClr val="1A5276"/>
                 </a:solidFill>
               </a:rPr>
-              <a:t>New UI layout &amp; project management</a:t>
+              <a:t>Configuration that degrades instead of failing</a:t>
             </a:r>
           </a:p>
         </p:txBody>
@@ -6379,7 +11581,7 @@
                   <a:srgbClr val="2E86C1"/>
                 </a:solidFill>
               </a:rPr>
-              <a:t>GUI</a:t>
+              <a:t>ROBUSTNESS</a:t>
             </a:r>
           </a:p>
         </p:txBody>
@@ -6417,7 +11619,7 @@
                   <a:srgbClr val="14303D"/>
                 </a:solidFill>
               </a:rPr>
-              <a:t>•  Each tool an independent dockable / floatable panel</a:t>
+              <a:t>•  The old model was all-or-nothing: one stale path and the plugin would not start</a:t>
             </a:r>
           </a:p>
           <a:p>
@@ -6432,7 +11634,7 @@
                   <a:srgbClr val="14303D"/>
                 </a:solidFill>
               </a:rPr>
-              <a:t>•  'Restore default layout' + reliable save/restore of docked layout</a:t>
+              <a:t>•  27 keys, validated per key and severity-aware; pydantic v2 is the schema of record</a:t>
             </a:r>
           </a:p>
           <a:p>
@@ -6447,7 +11649,22 @@
                   <a:srgbClr val="14303D"/>
                 </a:solidFill>
               </a:rPr>
-              <a:t>•  Session persistence (new): a groundtruther_project file</a:t>
+              <a:t>•  Only the two image paths are errors — everything else is a warning when</a:t>
+            </a:r>
+          </a:p>
+          <a:p>
+            <a:pPr algn="l" lvl="1">
+              <a:spcAft>
+                <a:spcPts val="600"/>
+              </a:spcAft>
+            </a:pPr>
+            <a:r>
+              <a:rPr sz="1300" b="0" i="0">
+                <a:solidFill>
+                  <a:srgbClr val="5B6B76"/>
+                </a:solidFill>
+              </a:rPr>
+              <a:t>–  set-but-invalid, and silent when unset</a:t>
             </a:r>
           </a:p>
           <a:p>
@@ -6462,7 +11679,7 @@
                   <a:srgbClr val="14303D"/>
                 </a:solidFill>
               </a:rPr>
-              <a:t>•  Restores image index, zoom, query selection, dock layout, map-sync</a:t>
+              <a:t>•  degrade() blanks only the failed keys → a bad value disables its own feature</a:t>
             </a:r>
           </a:p>
           <a:p>
@@ -6477,7 +11694,52 @@
                   <a:srgbClr val="14303D"/>
                 </a:solidFill>
               </a:rPr>
-              <a:t>•  Written on QGIS project save · loaded at start → resume where you left off</a:t>
+              <a:t>•  Config values treated as untrusted throughout</a:t>
+            </a:r>
+          </a:p>
+          <a:p>
+            <a:pPr algn="l">
+              <a:spcAft>
+                <a:spcPts val="600"/>
+              </a:spcAft>
+            </a:pPr>
+            <a:r>
+              <a:rPr sz="1600" b="0" i="0">
+                <a:solidFill>
+                  <a:srgbClr val="14303D"/>
+                </a:solidFill>
+              </a:rPr>
+              <a:t>•  Settings dialog covers every key and saves by merging into the file on disk</a:t>
+            </a:r>
+          </a:p>
+          <a:p>
+            <a:pPr algn="l" lvl="1">
+              <a:spcAft>
+                <a:spcPts val="600"/>
+              </a:spcAft>
+            </a:pPr>
+            <a:r>
+              <a:rPr sz="1300" b="0" i="0">
+                <a:solidFill>
+                  <a:srgbClr val="5B6B76"/>
+                </a:solidFill>
+              </a:rPr>
+              <a:t>–  (the old fixed template silently deleted whole sections)</a:t>
+            </a:r>
+          </a:p>
+          <a:p>
+            <a:pPr algn="l">
+              <a:spcAft>
+                <a:spcPts val="600"/>
+              </a:spcAft>
+            </a:pPr>
+            <a:r>
+              <a:rPr sz="1600" b="0" i="0">
+                <a:solidFill>
+                  <a:srgbClr val="14303D"/>
+                </a:solidFill>
+              </a:rPr>
+              <a:t>•  Cloud panels hide themselves when no service is configured</a:t>
             </a:r>
           </a:p>
         </p:txBody>
@@ -6542,7 +11804,7 @@
                   <a:srgbClr val="1A5276"/>
                 </a:solidFill>
               </a:rPr>
-              <a:t>custom dock layout + Settings (session file field)</a:t>
+              <a:t>Settings dialog + a validation report in the message log</a:t>
             </a:r>
           </a:p>
         </p:txBody>
@@ -6555,7 +11817,7 @@
 </p:sld>
 </file>
 
-<file path=ppt/slides/slide6.xml><?xml version="1.0" encoding="utf-8"?>
+<file path=ppt/slides/slide8.xml><?xml version="1.0" encoding="utf-8"?>
 <p:sld xmlns:a="http://schemas.openxmlformats.org/drawingml/2006/main" xmlns:p="http://schemas.openxmlformats.org/presentationml/2006/main" xmlns:r="http://schemas.openxmlformats.org/officeDocument/2006/relationships">
   <p:cSld>
     <p:spTree>
@@ -6594,7 +11856,7 @@
                   <a:srgbClr val="1A5276"/>
                 </a:solidFill>
               </a:rPr>
-              <a:t>UI settings &amp; configuration</a:t>
+              <a:t>Internals — modular, tested, documented</a:t>
             </a:r>
           </a:p>
         </p:txBody>
@@ -6628,7 +11890,266 @@
                   <a:srgbClr val="2E86C1"/>
                 </a:solidFill>
               </a:rPr>
-              <a:t>GUI</a:t>
+              <a:t>INTERNALS</a:t>
+            </a:r>
+          </a:p>
+        </p:txBody>
+      </p:sp>
+      <p:sp>
+        <p:nvSpPr>
+          <p:cNvPr id="4" name="TextBox 3"/>
+          <p:cNvSpPr txBox="1"/>
+          <p:nvPr/>
+        </p:nvSpPr>
+        <p:spPr>
+          <a:xfrm>
+            <a:off x="640080" y="1463040"/>
+            <a:ext cx="10972800" cy="4937760"/>
+          </a:xfrm>
+          <a:prstGeom prst="rect">
+            <a:avLst/>
+          </a:prstGeom>
+          <a:noFill/>
+        </p:spPr>
+        <p:txBody>
+          <a:bodyPr wrap="square">
+            <a:spAutoFit/>
+          </a:bodyPr>
+          <a:lstStyle/>
+          <a:p>
+            <a:pPr algn="l">
+              <a:spcAft>
+                <a:spcPts val="600"/>
+              </a:spcAft>
+            </a:pPr>
+            <a:r>
+              <a:rPr sz="1800" b="0" i="0">
+                <a:solidFill>
+                  <a:srgbClr val="14303D"/>
+                </a:solidFill>
+              </a:rPr>
+              <a:t>•  Thin orchestrator + focused mixins — dockwidget ≈ 240 lines:</a:t>
+            </a:r>
+          </a:p>
+          <a:p>
+            <a:pPr algn="l" lvl="1">
+              <a:spcAft>
+                <a:spcPts val="600"/>
+              </a:spcAft>
+            </a:pPr>
+            <a:r>
+              <a:rPr sz="1500" b="0" i="0">
+                <a:solidFill>
+                  <a:srgbClr val="5B6B76"/>
+                </a:solidFill>
+              </a:rPr>
+              <a:t>–  image browser · video browser · video annotation · GRASS · roughness ·</a:t>
+            </a:r>
+          </a:p>
+          <a:p>
+            <a:pPr algn="l" lvl="1">
+              <a:spcAft>
+                <a:spcPts val="600"/>
+              </a:spcAft>
+            </a:pPr>
+            <a:r>
+              <a:rPr sz="1500" b="0" i="0">
+                <a:solidFill>
+                  <a:srgbClr val="5B6B76"/>
+                </a:solidFill>
+              </a:rPr>
+              <a:t>–  report · settings · layout · session</a:t>
+            </a:r>
+          </a:p>
+          <a:p>
+            <a:pPr algn="l">
+              <a:spcAft>
+                <a:spcPts val="600"/>
+              </a:spcAft>
+            </a:pPr>
+            <a:r>
+              <a:rPr sz="1800" b="0" i="0">
+                <a:solidFill>
+                  <a:srgbClr val="14303D"/>
+                </a:solidFill>
+              </a:rPr>
+              <a:t>•  Stateless, testable core (gt/) — no Qt, unit-tested:</a:t>
+            </a:r>
+          </a:p>
+          <a:p>
+            <a:pPr algn="l" lvl="1">
+              <a:spcAft>
+                <a:spcPts val="600"/>
+              </a:spcAft>
+            </a:pPr>
+            <a:r>
+              <a:rPr sz="1500" b="0" i="0">
+                <a:solidFill>
+                  <a:srgbClr val="5B6B76"/>
+                </a:solidFill>
+              </a:rPr>
+              <a:t>–  grass_api · image_manager · video_manager · task_runner · mbes_fields ·</a:t>
+            </a:r>
+          </a:p>
+          <a:p>
+            <a:pPr algn="l" lvl="1">
+              <a:spcAft>
+                <a:spcPts val="600"/>
+              </a:spcAft>
+            </a:pPr>
+            <a:r>
+              <a:rPr sz="1500" b="0" i="0">
+                <a:solidFill>
+                  <a:srgbClr val="5B6B76"/>
+                </a:solidFill>
+              </a:rPr>
+              <a:t>–  session_state · roughness_client / _geo / _dem / _spectrum / _interpret · ribbon</a:t>
+            </a:r>
+          </a:p>
+          <a:p>
+            <a:pPr algn="l">
+              <a:spcAft>
+                <a:spcPts val="600"/>
+              </a:spcAft>
+            </a:pPr>
+            <a:r>
+              <a:rPr sz="1800" b="0" i="0">
+                <a:solidFill>
+                  <a:srgbClr val="14303D"/>
+                </a:solidFill>
+              </a:rPr>
+              <a:t>•  415 tests collected (unit / GUI-offscreen / integration) — including tests that</a:t>
+            </a:r>
+          </a:p>
+          <a:p>
+            <a:pPr algn="l" lvl="1">
+              <a:spcAft>
+                <a:spcPts val="600"/>
+              </a:spcAft>
+            </a:pPr>
+            <a:r>
+              <a:rPr sz="1500" b="0" i="0">
+                <a:solidFill>
+                  <a:srgbClr val="5B6B76"/>
+                </a:solidFill>
+              </a:rPr>
+              <a:t>–  guard the conventions: import hygiene, settings-docs drift, UI-built-once</a:t>
+            </a:r>
+          </a:p>
+          <a:p>
+            <a:pPr algn="l">
+              <a:spcAft>
+                <a:spcPts val="600"/>
+              </a:spcAft>
+            </a:pPr>
+            <a:r>
+              <a:rPr sz="1800" b="0" i="0">
+                <a:solidFill>
+                  <a:srgbClr val="14303D"/>
+                </a:solidFill>
+              </a:rPr>
+              <a:t>•  Non-trivial work is planned first in PLANNING/, executed in a dedicated git</a:t>
+            </a:r>
+          </a:p>
+          <a:p>
+            <a:pPr algn="l" lvl="1">
+              <a:spcAft>
+                <a:spcPts val="600"/>
+              </a:spcAft>
+            </a:pPr>
+            <a:r>
+              <a:rPr sz="1500" b="0" i="0">
+                <a:solidFill>
+                  <a:srgbClr val="5B6B76"/>
+                </a:solidFill>
+              </a:rPr>
+              <a:t>–  worktree, and closed out with a progress log</a:t>
+            </a:r>
+          </a:p>
+        </p:txBody>
+      </p:sp>
+    </p:spTree>
+  </p:cSld>
+  <p:clrMapOvr>
+    <a:masterClrMapping/>
+  </p:clrMapOvr>
+</p:sld>
+</file>
+
+<file path=ppt/slides/slide9.xml><?xml version="1.0" encoding="utf-8"?>
+<p:sld xmlns:a="http://schemas.openxmlformats.org/drawingml/2006/main" xmlns:p="http://schemas.openxmlformats.org/presentationml/2006/main" xmlns:r="http://schemas.openxmlformats.org/officeDocument/2006/relationships">
+  <p:cSld>
+    <p:spTree>
+      <p:nvGrpSpPr>
+        <p:cNvPr id="1" name=""/>
+        <p:cNvGrpSpPr/>
+        <p:nvPr/>
+      </p:nvGrpSpPr>
+      <p:grpSpPr/>
+      <p:sp>
+        <p:nvSpPr>
+          <p:cNvPr id="2" name="TextBox 1"/>
+          <p:cNvSpPr txBox="1"/>
+          <p:nvPr/>
+        </p:nvSpPr>
+        <p:spPr>
+          <a:xfrm>
+            <a:off x="502920" y="320040"/>
+            <a:ext cx="11155680" cy="914400"/>
+          </a:xfrm>
+          <a:prstGeom prst="rect">
+            <a:avLst/>
+          </a:prstGeom>
+          <a:noFill/>
+        </p:spPr>
+        <p:txBody>
+          <a:bodyPr wrap="square">
+            <a:spAutoFit/>
+          </a:bodyPr>
+          <a:lstStyle/>
+          <a:p>
+            <a:pPr algn="l"/>
+            <a:r>
+              <a:rPr sz="3000" b="1" i="0">
+                <a:solidFill>
+                  <a:srgbClr val="1A5276"/>
+                </a:solidFill>
+              </a:rPr>
+              <a:t>FastGIS — the GRASS backend</a:t>
+            </a:r>
+          </a:p>
+        </p:txBody>
+      </p:sp>
+      <p:sp>
+        <p:nvSpPr>
+          <p:cNvPr id="3" name="TextBox 2"/>
+          <p:cNvSpPr txBox="1"/>
+          <p:nvPr/>
+        </p:nvSpPr>
+        <p:spPr>
+          <a:xfrm>
+            <a:off x="10058400" y="457200"/>
+            <a:ext cx="1737360" cy="457200"/>
+          </a:xfrm>
+          <a:prstGeom prst="rect">
+            <a:avLst/>
+          </a:prstGeom>
+          <a:noFill/>
+        </p:spPr>
+        <p:txBody>
+          <a:bodyPr wrap="none">
+            <a:spAutoFit/>
+          </a:bodyPr>
+          <a:lstStyle/>
+          <a:p>
+            <a:pPr algn="r"/>
+            <a:r>
+              <a:rPr sz="1100" b="1" i="0">
+                <a:solidFill>
+                  <a:srgbClr val="2E86C1"/>
+                </a:solidFill>
+              </a:rPr>
+              <a:t>API</a:t>
             </a:r>
           </a:p>
         </p:txBody>
@@ -6666,7 +12187,7 @@
                   <a:srgbClr val="14303D"/>
                 </a:solidFill>
               </a:rPr>
-              <a:t>•  Single YAML config, validated by a pydantic v2 model</a:t>
+              <a:t>•  Legacy flat, unauthenticated endpoint → api.fastgis.eu</a:t>
             </a:r>
           </a:p>
           <a:p>
@@ -6681,7 +12202,7 @@
                   <a:srgbClr val="14303D"/>
                 </a:solidFill>
               </a:rPr>
-              <a:t>•  Clear errors instead of obscure runtime failures</a:t>
+              <a:t>•  Authenticated (X-API-Key), built around an environment model (env_id)</a:t>
             </a:r>
           </a:p>
           <a:p>
@@ -6696,7 +12217,22 @@
                   <a:srgbClr val="14303D"/>
                 </a:solidFill>
               </a:rPr>
-              <a:t>•  Dialog for image / MBES / video / export / GRASS paths &amp; keys</a:t>
+              <a:t>•  Schema-driven module dialogs — any GRASS module rendered from its interface</a:t>
+            </a:r>
+          </a:p>
+          <a:p>
+            <a:pPr algn="l" lvl="1">
+              <a:spcAft>
+                <a:spcPts val="600"/>
+              </a:spcAft>
+            </a:pPr>
+            <a:r>
+              <a:rPr sz="1300" b="0" i="0">
+                <a:solidFill>
+                  <a:srgbClr val="5B6B76"/>
+                </a:solidFill>
+              </a:rPr>
+              <a:t>–  description; async runs polled via a QgsTask</a:t>
             </a:r>
           </a:p>
           <a:p>
@@ -6711,7 +12247,37 @@
                   <a:srgbClr val="14303D"/>
                 </a:solidFill>
               </a:rPr>
-              <a:t>•  CRS-aware: zoom-to uses map scale (1:N) — same in metric and geographic CRSs</a:t>
+              <a:t>•  Detachable QGIS panel: module picker, push output rasters back into QGIS,</a:t>
+            </a:r>
+          </a:p>
+          <a:p>
+            <a:pPr algn="l" lvl="1">
+              <a:spcAft>
+                <a:spcPts val="600"/>
+              </a:spcAft>
+            </a:pPr>
+            <a:r>
+              <a:rPr sz="1300" b="0" i="0">
+                <a:solidFill>
+                  <a:srgbClr val="5B6B76"/>
+                </a:solidFill>
+              </a:rPr>
+              <a:t>–  show/hide the computational region</a:t>
+            </a:r>
+          </a:p>
+          <a:p>
+            <a:pPr algn="l">
+              <a:spcAft>
+                <a:spcPts val="600"/>
+              </a:spcAft>
+            </a:pPr>
+            <a:r>
+              <a:rPr sz="1600" b="0" i="0">
+                <a:solidFill>
+                  <a:srgbClr val="14303D"/>
+                </a:solidFill>
+              </a:rPr>
+              <a:t>•  Same credentials carry the stereo roughness service</a:t>
             </a:r>
           </a:p>
         </p:txBody>
@@ -6776,654 +12342,7 @@
                   <a:srgbClr val="1A5276"/>
                 </a:solidFill>
               </a:rPr>
-              <a:t>Settings dialog</a:t>
-            </a:r>
-          </a:p>
-        </p:txBody>
-      </p:sp>
-    </p:spTree>
-  </p:cSld>
-  <p:clrMapOvr>
-    <a:masterClrMapping/>
-  </p:clrMapOvr>
-</p:sld>
-</file>
-
-<file path=ppt/slides/slide7.xml><?xml version="1.0" encoding="utf-8"?>
-<p:sld xmlns:a="http://schemas.openxmlformats.org/drawingml/2006/main" xmlns:p="http://schemas.openxmlformats.org/presentationml/2006/main" xmlns:r="http://schemas.openxmlformats.org/officeDocument/2006/relationships">
-  <p:cSld>
-    <p:spTree>
-      <p:nvGrpSpPr>
-        <p:cNvPr id="1" name=""/>
-        <p:cNvGrpSpPr/>
-        <p:nvPr/>
-      </p:nvGrpSpPr>
-      <p:grpSpPr/>
-      <p:sp>
-        <p:nvSpPr>
-          <p:cNvPr id="2" name="TextBox 1"/>
-          <p:cNvSpPr txBox="1"/>
-          <p:nvPr/>
-        </p:nvSpPr>
-        <p:spPr>
-          <a:xfrm>
-            <a:off x="502920" y="320040"/>
-            <a:ext cx="11155680" cy="914400"/>
-          </a:xfrm>
-          <a:prstGeom prst="rect">
-            <a:avLst/>
-          </a:prstGeom>
-          <a:noFill/>
-        </p:spPr>
-        <p:txBody>
-          <a:bodyPr wrap="square">
-            <a:spAutoFit/>
-          </a:bodyPr>
-          <a:lstStyle/>
-          <a:p>
-            <a:pPr algn="l"/>
-            <a:r>
-              <a:rPr sz="3000" b="1" i="0">
-                <a:solidFill>
-                  <a:srgbClr val="1A5276"/>
-                </a:solidFill>
-              </a:rPr>
-              <a:t>Streamlined installation</a:t>
-            </a:r>
-          </a:p>
-        </p:txBody>
-      </p:sp>
-      <p:sp>
-        <p:nvSpPr>
-          <p:cNvPr id="3" name="TextBox 2"/>
-          <p:cNvSpPr txBox="1"/>
-          <p:nvPr/>
-        </p:nvSpPr>
-        <p:spPr>
-          <a:xfrm>
-            <a:off x="10058400" y="457200"/>
-            <a:ext cx="1737360" cy="457200"/>
-          </a:xfrm>
-          <a:prstGeom prst="rect">
-            <a:avLst/>
-          </a:prstGeom>
-          <a:noFill/>
-        </p:spPr>
-        <p:txBody>
-          <a:bodyPr wrap="none">
-            <a:spAutoFit/>
-          </a:bodyPr>
-          <a:lstStyle/>
-          <a:p>
-            <a:pPr algn="r"/>
-            <a:r>
-              <a:rPr sz="1100" b="1" i="0">
-                <a:solidFill>
-                  <a:srgbClr val="2E86C1"/>
-                </a:solidFill>
-              </a:rPr>
-              <a:t>SETUP</a:t>
-            </a:r>
-          </a:p>
-        </p:txBody>
-      </p:sp>
-      <p:sp>
-        <p:nvSpPr>
-          <p:cNvPr id="4" name="TextBox 3"/>
-          <p:cNvSpPr txBox="1"/>
-          <p:nvPr/>
-        </p:nvSpPr>
-        <p:spPr>
-          <a:xfrm>
-            <a:off x="640080" y="1463040"/>
-            <a:ext cx="10972800" cy="4937760"/>
-          </a:xfrm>
-          <a:prstGeom prst="rect">
-            <a:avLst/>
-          </a:prstGeom>
-          <a:noFill/>
-        </p:spPr>
-        <p:txBody>
-          <a:bodyPr wrap="square">
-            <a:spAutoFit/>
-          </a:bodyPr>
-          <a:lstStyle/>
-          <a:p>
-            <a:pPr algn="l">
-              <a:spcAft>
-                <a:spcPts val="600"/>
-              </a:spcAft>
-            </a:pPr>
-            <a:r>
-              <a:rPr sz="1800" b="0" i="0">
-                <a:solidFill>
-                  <a:srgbClr val="14303D"/>
-                </a:solidFill>
-              </a:rPr>
-              <a:t>•  QGIS 4 runs on system Python (PEP-668, no pip) — handled cleanly:</a:t>
-            </a:r>
-          </a:p>
-          <a:p>
-            <a:pPr algn="l" lvl="1">
-              <a:spcAft>
-                <a:spcPts val="600"/>
-              </a:spcAft>
-            </a:pPr>
-            <a:r>
-              <a:rPr sz="1500" b="0" i="0">
-                <a:solidFill>
-                  <a:srgbClr val="5B6B76"/>
-                </a:solidFill>
-              </a:rPr>
-              <a:t>–  Plugin deps live in a .venv beside the source</a:t>
-            </a:r>
-          </a:p>
-          <a:p>
-            <a:pPr algn="l" lvl="1">
-              <a:spcAft>
-                <a:spcPts val="600"/>
-              </a:spcAft>
-            </a:pPr>
-            <a:r>
-              <a:rPr sz="1500" b="0" i="0">
-                <a:solidFill>
-                  <a:srgbClr val="5B6B76"/>
-                </a:solidFill>
-              </a:rPr>
-              <a:t>–  _bootstrap_venv() appends it to sys.path at load</a:t>
-            </a:r>
-          </a:p>
-          <a:p>
-            <a:pPr algn="l">
-              <a:spcAft>
-                <a:spcPts val="600"/>
-              </a:spcAft>
-            </a:pPr>
-            <a:r>
-              <a:rPr sz="1800" b="0" i="0">
-                <a:solidFill>
-                  <a:srgbClr val="14303D"/>
-                </a:solidFill>
-              </a:rPr>
-              <a:t>•  Install = symlink the repo into the QGIS profile + enable</a:t>
-            </a:r>
-          </a:p>
-          <a:p>
-            <a:pPr algn="l">
-              <a:spcAft>
-                <a:spcPts val="600"/>
-              </a:spcAft>
-            </a:pPr>
-            <a:r>
-              <a:rPr sz="1800" b="0" i="0">
-                <a:solidFill>
-                  <a:srgbClr val="14303D"/>
-                </a:solidFill>
-              </a:rPr>
-              <a:t>•  Fixed missing runtime deps &amp; venv bootstrap → one-step setup</a:t>
-            </a:r>
-          </a:p>
-          <a:p>
-            <a:pPr algn="l">
-              <a:spcAft>
-                <a:spcPts val="600"/>
-              </a:spcAft>
-            </a:pPr>
-            <a:r>
-              <a:rPr sz="1800" b="0" i="0">
-                <a:solidFill>
-                  <a:srgbClr val="14303D"/>
-                </a:solidFill>
-              </a:rPr>
-              <a:t>•  Video decode via PyAV (bundled FFmpeg) — no system-codec hunt</a:t>
-            </a:r>
-          </a:p>
-        </p:txBody>
-      </p:sp>
-    </p:spTree>
-  </p:cSld>
-  <p:clrMapOvr>
-    <a:masterClrMapping/>
-  </p:clrMapOvr>
-</p:sld>
-</file>
-
-<file path=ppt/slides/slide8.xml><?xml version="1.0" encoding="utf-8"?>
-<p:sld xmlns:a="http://schemas.openxmlformats.org/drawingml/2006/main" xmlns:p="http://schemas.openxmlformats.org/presentationml/2006/main" xmlns:r="http://schemas.openxmlformats.org/officeDocument/2006/relationships">
-  <p:cSld>
-    <p:spTree>
-      <p:nvGrpSpPr>
-        <p:cNvPr id="1" name=""/>
-        <p:cNvGrpSpPr/>
-        <p:nvPr/>
-      </p:nvGrpSpPr>
-      <p:grpSpPr/>
-      <p:sp>
-        <p:nvSpPr>
-          <p:cNvPr id="2" name="TextBox 1"/>
-          <p:cNvSpPr txBox="1"/>
-          <p:nvPr/>
-        </p:nvSpPr>
-        <p:spPr>
-          <a:xfrm>
-            <a:off x="502920" y="320040"/>
-            <a:ext cx="11155680" cy="914400"/>
-          </a:xfrm>
-          <a:prstGeom prst="rect">
-            <a:avLst/>
-          </a:prstGeom>
-          <a:noFill/>
-        </p:spPr>
-        <p:txBody>
-          <a:bodyPr wrap="square">
-            <a:spAutoFit/>
-          </a:bodyPr>
-          <a:lstStyle/>
-          <a:p>
-            <a:pPr algn="l"/>
-            <a:r>
-              <a:rPr sz="3000" b="1" i="0">
-                <a:solidFill>
-                  <a:srgbClr val="1A5276"/>
-                </a:solidFill>
-              </a:rPr>
-              <a:t>Code refactoring — modular &amp; maintainable</a:t>
-            </a:r>
-          </a:p>
-        </p:txBody>
-      </p:sp>
-      <p:sp>
-        <p:nvSpPr>
-          <p:cNvPr id="3" name="TextBox 2"/>
-          <p:cNvSpPr txBox="1"/>
-          <p:nvPr/>
-        </p:nvSpPr>
-        <p:spPr>
-          <a:xfrm>
-            <a:off x="10058400" y="457200"/>
-            <a:ext cx="1737360" cy="457200"/>
-          </a:xfrm>
-          <a:prstGeom prst="rect">
-            <a:avLst/>
-          </a:prstGeom>
-          <a:noFill/>
-        </p:spPr>
-        <p:txBody>
-          <a:bodyPr wrap="none">
-            <a:spAutoFit/>
-          </a:bodyPr>
-          <a:lstStyle/>
-          <a:p>
-            <a:pPr algn="r"/>
-            <a:r>
-              <a:rPr sz="1100" b="1" i="0">
-                <a:solidFill>
-                  <a:srgbClr val="2E86C1"/>
-                </a:solidFill>
-              </a:rPr>
-              <a:t>INTERNALS</a:t>
-            </a:r>
-          </a:p>
-        </p:txBody>
-      </p:sp>
-      <p:sp>
-        <p:nvSpPr>
-          <p:cNvPr id="4" name="TextBox 3"/>
-          <p:cNvSpPr txBox="1"/>
-          <p:nvPr/>
-        </p:nvSpPr>
-        <p:spPr>
-          <a:xfrm>
-            <a:off x="640080" y="1463040"/>
-            <a:ext cx="10972800" cy="4937760"/>
-          </a:xfrm>
-          <a:prstGeom prst="rect">
-            <a:avLst/>
-          </a:prstGeom>
-          <a:noFill/>
-        </p:spPr>
-        <p:txBody>
-          <a:bodyPr wrap="square">
-            <a:spAutoFit/>
-          </a:bodyPr>
-          <a:lstStyle/>
-          <a:p>
-            <a:pPr algn="l">
-              <a:spcAft>
-                <a:spcPts val="600"/>
-              </a:spcAft>
-            </a:pPr>
-            <a:r>
-              <a:rPr sz="1800" b="0" i="0">
-                <a:solidFill>
-                  <a:srgbClr val="14303D"/>
-                </a:solidFill>
-              </a:rPr>
-              <a:t>•  Thin orchestrator + focused mixins — dockwidget ≈ 240 lines:</a:t>
-            </a:r>
-          </a:p>
-          <a:p>
-            <a:pPr algn="l" lvl="1">
-              <a:spcAft>
-                <a:spcPts val="600"/>
-              </a:spcAft>
-            </a:pPr>
-            <a:r>
-              <a:rPr sz="1500" b="0" i="0">
-                <a:solidFill>
-                  <a:srgbClr val="5B6B76"/>
-                </a:solidFill>
-              </a:rPr>
-              <a:t>–  image browser · video browser · video annotation · GRASS · report · settings · layout · session</a:t>
-            </a:r>
-          </a:p>
-          <a:p>
-            <a:pPr algn="l">
-              <a:spcAft>
-                <a:spcPts val="600"/>
-              </a:spcAft>
-            </a:pPr>
-            <a:r>
-              <a:rPr sz="1800" b="0" i="0">
-                <a:solidFill>
-                  <a:srgbClr val="14303D"/>
-                </a:solidFill>
-              </a:rPr>
-              <a:t>•  Stateless, testable core (gt/) — no Qt, unit-tested:</a:t>
-            </a:r>
-          </a:p>
-          <a:p>
-            <a:pPr algn="l" lvl="1">
-              <a:spcAft>
-                <a:spcPts val="600"/>
-              </a:spcAft>
-            </a:pPr>
-            <a:r>
-              <a:rPr sz="1500" b="0" i="0">
-                <a:solidFill>
-                  <a:srgbClr val="5B6B76"/>
-                </a:solidFill>
-              </a:rPr>
-              <a:t>–  grass_api · image_manager · video_manager · task_runner</a:t>
-            </a:r>
-          </a:p>
-          <a:p>
-            <a:pPr algn="l" lvl="1">
-              <a:spcAft>
-                <a:spcPts val="600"/>
-              </a:spcAft>
-            </a:pPr>
-            <a:r>
-              <a:rPr sz="1500" b="0" i="0">
-                <a:solidFill>
-                  <a:srgbClr val="5B6B76"/>
-                </a:solidFill>
-              </a:rPr>
-              <a:t>–  NEW: mbes_fields · video_reader · session_state</a:t>
-            </a:r>
-          </a:p>
-          <a:p>
-            <a:pPr algn="l">
-              <a:spcAft>
-                <a:spcPts val="600"/>
-              </a:spcAft>
-            </a:pPr>
-            <a:r>
-              <a:rPr sz="1800" b="0" i="0">
-                <a:solidFill>
-                  <a:srgbClr val="14303D"/>
-                </a:solidFill>
-              </a:rPr>
-              <a:t>•  A growing pytest suite (unit / GUI-offscreen / integration)</a:t>
-            </a:r>
-          </a:p>
-        </p:txBody>
-      </p:sp>
-    </p:spTree>
-  </p:cSld>
-  <p:clrMapOvr>
-    <a:masterClrMapping/>
-  </p:clrMapOvr>
-</p:sld>
-</file>
-
-<file path=ppt/slides/slide9.xml><?xml version="1.0" encoding="utf-8"?>
-<p:sld xmlns:a="http://schemas.openxmlformats.org/drawingml/2006/main" xmlns:p="http://schemas.openxmlformats.org/presentationml/2006/main" xmlns:r="http://schemas.openxmlformats.org/officeDocument/2006/relationships">
-  <p:cSld>
-    <p:spTree>
-      <p:nvGrpSpPr>
-        <p:cNvPr id="1" name=""/>
-        <p:cNvGrpSpPr/>
-        <p:nvPr/>
-      </p:nvGrpSpPr>
-      <p:grpSpPr/>
-      <p:sp>
-        <p:nvSpPr>
-          <p:cNvPr id="2" name="TextBox 1"/>
-          <p:cNvSpPr txBox="1"/>
-          <p:nvPr/>
-        </p:nvSpPr>
-        <p:spPr>
-          <a:xfrm>
-            <a:off x="502920" y="320040"/>
-            <a:ext cx="11155680" cy="914400"/>
-          </a:xfrm>
-          <a:prstGeom prst="rect">
-            <a:avLst/>
-          </a:prstGeom>
-          <a:noFill/>
-        </p:spPr>
-        <p:txBody>
-          <a:bodyPr wrap="square">
-            <a:spAutoFit/>
-          </a:bodyPr>
-          <a:lstStyle/>
-          <a:p>
-            <a:pPr algn="l"/>
-            <a:r>
-              <a:rPr sz="3000" b="1" i="0">
-                <a:solidFill>
-                  <a:srgbClr val="1A5276"/>
-                </a:solidFill>
-              </a:rPr>
-              <a:t>New FastGIS API (GRASS backend)</a:t>
-            </a:r>
-          </a:p>
-        </p:txBody>
-      </p:sp>
-      <p:sp>
-        <p:nvSpPr>
-          <p:cNvPr id="3" name="TextBox 2"/>
-          <p:cNvSpPr txBox="1"/>
-          <p:nvPr/>
-        </p:nvSpPr>
-        <p:spPr>
-          <a:xfrm>
-            <a:off x="10058400" y="457200"/>
-            <a:ext cx="1737360" cy="457200"/>
-          </a:xfrm>
-          <a:prstGeom prst="rect">
-            <a:avLst/>
-          </a:prstGeom>
-          <a:noFill/>
-        </p:spPr>
-        <p:txBody>
-          <a:bodyPr wrap="none">
-            <a:spAutoFit/>
-          </a:bodyPr>
-          <a:lstStyle/>
-          <a:p>
-            <a:pPr algn="r"/>
-            <a:r>
-              <a:rPr sz="1100" b="1" i="0">
-                <a:solidFill>
-                  <a:srgbClr val="2E86C1"/>
-                </a:solidFill>
-              </a:rPr>
-              <a:t>BACKEND</a:t>
-            </a:r>
-          </a:p>
-        </p:txBody>
-      </p:sp>
-      <p:sp>
-        <p:nvSpPr>
-          <p:cNvPr id="4" name="TextBox 3"/>
-          <p:cNvSpPr txBox="1"/>
-          <p:nvPr/>
-        </p:nvSpPr>
-        <p:spPr>
-          <a:xfrm>
-            <a:off x="502920" y="1463040"/>
-            <a:ext cx="5852160" cy="4937760"/>
-          </a:xfrm>
-          <a:prstGeom prst="rect">
-            <a:avLst/>
-          </a:prstGeom>
-          <a:noFill/>
-        </p:spPr>
-        <p:txBody>
-          <a:bodyPr wrap="square">
-            <a:spAutoFit/>
-          </a:bodyPr>
-          <a:lstStyle/>
-          <a:p>
-            <a:pPr algn="l">
-              <a:spcAft>
-                <a:spcPts val="600"/>
-              </a:spcAft>
-            </a:pPr>
-            <a:r>
-              <a:rPr sz="1600" b="0" i="0">
-                <a:solidFill>
-                  <a:srgbClr val="14303D"/>
-                </a:solidFill>
-              </a:rPr>
-              <a:t>•  Legacy flat, unauthenticated endpoint → api.fastgis.eu</a:t>
-            </a:r>
-          </a:p>
-          <a:p>
-            <a:pPr algn="l">
-              <a:spcAft>
-                <a:spcPts val="600"/>
-              </a:spcAft>
-            </a:pPr>
-            <a:r>
-              <a:rPr sz="1600" b="0" i="0">
-                <a:solidFill>
-                  <a:srgbClr val="14303D"/>
-                </a:solidFill>
-              </a:rPr>
-              <a:t>•  Authenticated (X-API-Key), built on an environment model (env_id)</a:t>
-            </a:r>
-          </a:p>
-          <a:p>
-            <a:pPr algn="l">
-              <a:spcAft>
-                <a:spcPts val="600"/>
-              </a:spcAft>
-            </a:pPr>
-            <a:r>
-              <a:rPr sz="1600" b="0" i="0">
-                <a:solidFill>
-                  <a:srgbClr val="14303D"/>
-                </a:solidFill>
-              </a:rPr>
-              <a:t>•  Schema-driven module dialogs — any GRASS module; async via QgsTask</a:t>
-            </a:r>
-          </a:p>
-          <a:p>
-            <a:pPr algn="l">
-              <a:spcAft>
-                <a:spcPts val="600"/>
-              </a:spcAft>
-            </a:pPr>
-            <a:r>
-              <a:rPr sz="1600" b="0" i="0">
-                <a:solidFill>
-                  <a:srgbClr val="14303D"/>
-                </a:solidFill>
-              </a:rPr>
-              <a:t>•  GRASS Tools is now an undockable QGIS panel:</a:t>
-            </a:r>
-          </a:p>
-          <a:p>
-            <a:pPr algn="l" lvl="1">
-              <a:spcAft>
-                <a:spcPts val="600"/>
-              </a:spcAft>
-            </a:pPr>
-            <a:r>
-              <a:rPr sz="1300" b="0" i="0">
-                <a:solidFill>
-                  <a:srgbClr val="5B6B76"/>
-                </a:solidFill>
-              </a:rPr>
-              <a:t>–  module picker · push rasters back to QGIS · show/hide computational region</a:t>
-            </a:r>
-          </a:p>
-        </p:txBody>
-      </p:sp>
-      <p:sp>
-        <p:nvSpPr>
-          <p:cNvPr id="5" name="Rounded Rectangle 4"/>
-          <p:cNvSpPr/>
-          <p:nvPr/>
-        </p:nvSpPr>
-        <p:spPr>
-          <a:xfrm>
-            <a:off x="6583680" y="1554480"/>
-            <a:ext cx="5120640" cy="4572000"/>
-          </a:xfrm>
-          <a:prstGeom prst="roundRect">
-            <a:avLst/>
-          </a:prstGeom>
-          <a:solidFill>
-            <a:srgbClr val="EAF2F8"/>
-          </a:solidFill>
-          <a:ln w="22225">
-            <a:solidFill>
-              <a:srgbClr val="2E86C1"/>
-            </a:solidFill>
-          </a:ln>
-          <a:effectLst/>
-        </p:spPr>
-        <p:style>
-          <a:lnRef idx="1">
-            <a:schemeClr val="accent1"/>
-          </a:lnRef>
-          <a:fillRef idx="3">
-            <a:schemeClr val="accent1"/>
-          </a:fillRef>
-          <a:effectRef idx="2">
-            <a:schemeClr val="accent1"/>
-          </a:effectRef>
-          <a:fontRef idx="minor">
-            <a:schemeClr val="lt1"/>
-          </a:fontRef>
-        </p:style>
-        <p:txBody>
-          <a:bodyPr rtlCol="0" anchor="ctr" wrap="square"/>
-          <a:lstStyle/>
-          <a:p>
-            <a:pPr algn="ctr"/>
-            <a:r>
-              <a:rPr sz="1400" b="1" i="0">
-                <a:solidFill>
-                  <a:srgbClr val="1A5276"/>
-                </a:solidFill>
-              </a:rPr>
-              <a:t>🖼  Screenshot</a:t>
-            </a:r>
-          </a:p>
-          <a:p>
-            <a:pPr algn="ctr"/>
-            <a:r>
-              <a:rPr sz="1100" b="0" i="0">
-                <a:solidFill>
-                  <a:srgbClr val="1A5276"/>
-                </a:solidFill>
-              </a:rPr>
-              <a:t>GRASS Tools panel + a schema-driven module dialog</a:t>
+              <a:t>GRASS Tools panel + a generated module form</a:t>
             </a:r>
           </a:p>
         </p:txBody>
